--- a/ML_Precision_Recall_ROC_Confusion.pptx
+++ b/ML_Precision_Recall_ROC_Confusion.pptx
@@ -5,19 +5,21 @@
     <p:sldMasterId id="2147483648" r:id="rId1"/>
   </p:sldMasterIdLst>
   <p:notesMasterIdLst>
-    <p:notesMasterId r:id="rId12"/>
+    <p:notesMasterId r:id="rId14"/>
   </p:notesMasterIdLst>
   <p:sldIdLst>
     <p:sldId id="347" r:id="rId2"/>
     <p:sldId id="333" r:id="rId3"/>
     <p:sldId id="348" r:id="rId4"/>
     <p:sldId id="345" r:id="rId5"/>
-    <p:sldId id="342" r:id="rId6"/>
-    <p:sldId id="344" r:id="rId7"/>
-    <p:sldId id="343" r:id="rId8"/>
-    <p:sldId id="346" r:id="rId9"/>
-    <p:sldId id="256" r:id="rId10"/>
-    <p:sldId id="352" r:id="rId11"/>
+    <p:sldId id="354" r:id="rId6"/>
+    <p:sldId id="342" r:id="rId7"/>
+    <p:sldId id="344" r:id="rId8"/>
+    <p:sldId id="343" r:id="rId9"/>
+    <p:sldId id="346" r:id="rId10"/>
+    <p:sldId id="256" r:id="rId11"/>
+    <p:sldId id="352" r:id="rId12"/>
+    <p:sldId id="353" r:id="rId13"/>
   </p:sldIdLst>
   <p:sldSz cx="12192000" cy="6858000"/>
   <p:notesSz cx="6858000" cy="9144000"/>
@@ -976,7 +978,7 @@
           <a:p>
             <a:fld id="{AC91B679-F1BC-D040-817F-A2F595AB9D9A}" type="datetimeFigureOut">
               <a:rPr lang="en-US" smtClean="0"/>
-              <a:t>5/28/21</a:t>
+              <a:t>6/24/21</a:t>
             </a:fld>
             <a:endParaRPr lang="en-US"/>
           </a:p>
@@ -1826,7 +1828,7 @@
           <a:p>
             <a:fld id="{F1DC6890-0266-1140-AA82-3B7AF23274A1}" type="datetimeFigureOut">
               <a:rPr lang="en-US" smtClean="0"/>
-              <a:t>5/28/21</a:t>
+              <a:t>6/24/21</a:t>
             </a:fld>
             <a:endParaRPr lang="en-US"/>
           </a:p>
@@ -2024,7 +2026,7 @@
           <a:p>
             <a:fld id="{F1DC6890-0266-1140-AA82-3B7AF23274A1}" type="datetimeFigureOut">
               <a:rPr lang="en-US" smtClean="0"/>
-              <a:t>5/28/21</a:t>
+              <a:t>6/24/21</a:t>
             </a:fld>
             <a:endParaRPr lang="en-US"/>
           </a:p>
@@ -2232,7 +2234,7 @@
           <a:p>
             <a:fld id="{F1DC6890-0266-1140-AA82-3B7AF23274A1}" type="datetimeFigureOut">
               <a:rPr lang="en-US" smtClean="0"/>
-              <a:t>5/28/21</a:t>
+              <a:t>6/24/21</a:t>
             </a:fld>
             <a:endParaRPr lang="en-US"/>
           </a:p>
@@ -2430,7 +2432,7 @@
           <a:p>
             <a:fld id="{F1DC6890-0266-1140-AA82-3B7AF23274A1}" type="datetimeFigureOut">
               <a:rPr lang="en-US" smtClean="0"/>
-              <a:t>5/28/21</a:t>
+              <a:t>6/24/21</a:t>
             </a:fld>
             <a:endParaRPr lang="en-US"/>
           </a:p>
@@ -2705,7 +2707,7 @@
           <a:p>
             <a:fld id="{F1DC6890-0266-1140-AA82-3B7AF23274A1}" type="datetimeFigureOut">
               <a:rPr lang="en-US" smtClean="0"/>
-              <a:t>5/28/21</a:t>
+              <a:t>6/24/21</a:t>
             </a:fld>
             <a:endParaRPr lang="en-US"/>
           </a:p>
@@ -2970,7 +2972,7 @@
           <a:p>
             <a:fld id="{F1DC6890-0266-1140-AA82-3B7AF23274A1}" type="datetimeFigureOut">
               <a:rPr lang="en-US" smtClean="0"/>
-              <a:t>5/28/21</a:t>
+              <a:t>6/24/21</a:t>
             </a:fld>
             <a:endParaRPr lang="en-US"/>
           </a:p>
@@ -3382,7 +3384,7 @@
           <a:p>
             <a:fld id="{F1DC6890-0266-1140-AA82-3B7AF23274A1}" type="datetimeFigureOut">
               <a:rPr lang="en-US" smtClean="0"/>
-              <a:t>5/28/21</a:t>
+              <a:t>6/24/21</a:t>
             </a:fld>
             <a:endParaRPr lang="en-US"/>
           </a:p>
@@ -3523,7 +3525,7 @@
           <a:p>
             <a:fld id="{F1DC6890-0266-1140-AA82-3B7AF23274A1}" type="datetimeFigureOut">
               <a:rPr lang="en-US" smtClean="0"/>
-              <a:t>5/28/21</a:t>
+              <a:t>6/24/21</a:t>
             </a:fld>
             <a:endParaRPr lang="en-US"/>
           </a:p>
@@ -3636,7 +3638,7 @@
           <a:p>
             <a:fld id="{F1DC6890-0266-1140-AA82-3B7AF23274A1}" type="datetimeFigureOut">
               <a:rPr lang="en-US" smtClean="0"/>
-              <a:t>5/28/21</a:t>
+              <a:t>6/24/21</a:t>
             </a:fld>
             <a:endParaRPr lang="en-US"/>
           </a:p>
@@ -3947,7 +3949,7 @@
           <a:p>
             <a:fld id="{F1DC6890-0266-1140-AA82-3B7AF23274A1}" type="datetimeFigureOut">
               <a:rPr lang="en-US" smtClean="0"/>
-              <a:t>5/28/21</a:t>
+              <a:t>6/24/21</a:t>
             </a:fld>
             <a:endParaRPr lang="en-US"/>
           </a:p>
@@ -4235,7 +4237,7 @@
           <a:p>
             <a:fld id="{F1DC6890-0266-1140-AA82-3B7AF23274A1}" type="datetimeFigureOut">
               <a:rPr lang="en-US" smtClean="0"/>
-              <a:t>5/28/21</a:t>
+              <a:t>6/24/21</a:t>
             </a:fld>
             <a:endParaRPr lang="en-US"/>
           </a:p>
@@ -4476,7 +4478,7 @@
           <a:p>
             <a:fld id="{F1DC6890-0266-1140-AA82-3B7AF23274A1}" type="datetimeFigureOut">
               <a:rPr lang="en-US" smtClean="0"/>
-              <a:t>5/28/21</a:t>
+              <a:t>6/24/21</a:t>
             </a:fld>
             <a:endParaRPr lang="en-US"/>
           </a:p>
@@ -5001,213 +5003,26 @@
       </p:grpSpPr>
       <p:sp>
         <p:nvSpPr>
-          <p:cNvPr id="3" name="TextBox 2">
-            <a:extLst>
-              <a:ext uri="{FF2B5EF4-FFF2-40B4-BE49-F238E27FC236}">
-                <a16:creationId xmlns:a16="http://schemas.microsoft.com/office/drawing/2014/main" id="{C331A9BC-3B71-D94B-913F-5D13C7F8ADF1}"/>
-              </a:ext>
-            </a:extLst>
-          </p:cNvPr>
-          <p:cNvSpPr txBox="1"/>
-          <p:nvPr/>
-        </p:nvSpPr>
-        <p:spPr>
-          <a:xfrm>
-            <a:off x="222501" y="154074"/>
-            <a:ext cx="2970150" cy="584775"/>
+          <p:cNvPr id="4" name="Rectangle 3">
+            <a:extLst>
+              <a:ext uri="{FF2B5EF4-FFF2-40B4-BE49-F238E27FC236}">
+                <a16:creationId xmlns:a16="http://schemas.microsoft.com/office/drawing/2014/main" id="{9613AF28-158F-874A-80C9-B3721DC64360}"/>
+              </a:ext>
+            </a:extLst>
+          </p:cNvPr>
+          <p:cNvSpPr/>
+          <p:nvPr/>
+        </p:nvSpPr>
+        <p:spPr>
+          <a:xfrm>
+            <a:off x="150988" y="3594550"/>
+            <a:ext cx="6020789" cy="3059017"/>
           </a:xfrm>
           <a:prstGeom prst="rect">
             <a:avLst/>
           </a:prstGeom>
           <a:noFill/>
-        </p:spPr>
-        <p:txBody>
-          <a:bodyPr wrap="square" rtlCol="0">
-            <a:spAutoFit/>
-          </a:bodyPr>
-          <a:lstStyle/>
-          <a:p>
-            <a:r>
-              <a:rPr lang="en-US" sz="3200" b="1" dirty="0"/>
-              <a:t>Medical Tests</a:t>
-            </a:r>
-          </a:p>
-        </p:txBody>
-      </p:sp>
-      <p:sp>
-        <p:nvSpPr>
-          <p:cNvPr id="4" name="TextBox 3">
-            <a:extLst>
-              <a:ext uri="{FF2B5EF4-FFF2-40B4-BE49-F238E27FC236}">
-                <a16:creationId xmlns:a16="http://schemas.microsoft.com/office/drawing/2014/main" id="{EE8F2B30-236A-B049-BB9B-38E73740DE4C}"/>
-              </a:ext>
-            </a:extLst>
-          </p:cNvPr>
-          <p:cNvSpPr txBox="1"/>
-          <p:nvPr/>
-        </p:nvSpPr>
-        <p:spPr>
-          <a:xfrm>
-            <a:off x="222501" y="914400"/>
-            <a:ext cx="4039533" cy="954107"/>
-          </a:xfrm>
-          <a:prstGeom prst="rect">
-            <a:avLst/>
-          </a:prstGeom>
-          <a:noFill/>
-        </p:spPr>
-        <p:txBody>
-          <a:bodyPr wrap="square" rtlCol="0">
-            <a:spAutoFit/>
-          </a:bodyPr>
-          <a:lstStyle/>
-          <a:p>
-            <a:r>
-              <a:rPr lang="en-US" dirty="0"/>
-              <a:t>Merck Manuals:</a:t>
-            </a:r>
-          </a:p>
-          <a:p>
-            <a:r>
-              <a:rPr lang="en-US" sz="1000" dirty="0">
-                <a:hlinkClick r:id="rId2"/>
-              </a:rPr>
-              <a:t>https://www.merckmanuals.com/professional/special-subjects/clinical-decision-making/understanding-medical-tests-and-test-results</a:t>
-            </a:r>
-            <a:endParaRPr lang="en-US" sz="1000" dirty="0"/>
-          </a:p>
-          <a:p>
-            <a:endParaRPr lang="en-US" dirty="0"/>
-          </a:p>
-        </p:txBody>
-      </p:sp>
-      <p:pic>
-        <p:nvPicPr>
-          <p:cNvPr id="5" name="Picture 4">
-            <a:extLst>
-              <a:ext uri="{FF2B5EF4-FFF2-40B4-BE49-F238E27FC236}">
-                <a16:creationId xmlns:a16="http://schemas.microsoft.com/office/drawing/2014/main" id="{BFC12F5C-307B-B641-A137-8EFD1F15A6C9}"/>
-              </a:ext>
-            </a:extLst>
-          </p:cNvPr>
-          <p:cNvPicPr>
-            <a:picLocks noChangeAspect="1"/>
-          </p:cNvPicPr>
-          <p:nvPr/>
-        </p:nvPicPr>
-        <p:blipFill>
-          <a:blip r:embed="rId3" cstate="email">
-            <a:extLst>
-              <a:ext uri="{28A0092B-C50C-407E-A947-70E740481C1C}">
-                <a14:useLocalDpi xmlns:a14="http://schemas.microsoft.com/office/drawing/2010/main"/>
-              </a:ext>
-            </a:extLst>
-          </a:blip>
-          <a:stretch>
-            <a:fillRect/>
-          </a:stretch>
-        </p:blipFill>
-        <p:spPr>
-          <a:xfrm>
-            <a:off x="5705998" y="2058013"/>
-            <a:ext cx="6335770" cy="2646991"/>
-          </a:xfrm>
-          <a:prstGeom prst="rect">
-            <a:avLst/>
-          </a:prstGeom>
-        </p:spPr>
-      </p:pic>
-      <p:pic>
-        <p:nvPicPr>
-          <p:cNvPr id="6" name="Picture 5">
-            <a:extLst>
-              <a:ext uri="{FF2B5EF4-FFF2-40B4-BE49-F238E27FC236}">
-                <a16:creationId xmlns:a16="http://schemas.microsoft.com/office/drawing/2014/main" id="{31285B1A-8D6C-D649-9463-5B30D36B16D2}"/>
-              </a:ext>
-            </a:extLst>
-          </p:cNvPr>
-          <p:cNvPicPr>
-            <a:picLocks noChangeAspect="1"/>
-          </p:cNvPicPr>
-          <p:nvPr/>
-        </p:nvPicPr>
-        <p:blipFill>
-          <a:blip r:embed="rId4" cstate="email">
-            <a:extLst>
-              <a:ext uri="{28A0092B-C50C-407E-A947-70E740481C1C}">
-                <a14:useLocalDpi xmlns:a14="http://schemas.microsoft.com/office/drawing/2010/main"/>
-              </a:ext>
-            </a:extLst>
-          </a:blip>
-          <a:stretch>
-            <a:fillRect/>
-          </a:stretch>
-        </p:blipFill>
-        <p:spPr>
-          <a:xfrm>
-            <a:off x="61417" y="2824079"/>
-            <a:ext cx="4775195" cy="3879847"/>
-          </a:xfrm>
-          <a:prstGeom prst="rect">
-            <a:avLst/>
-          </a:prstGeom>
-        </p:spPr>
-      </p:pic>
-      <p:sp>
-        <p:nvSpPr>
-          <p:cNvPr id="7" name="TextBox 6">
-            <a:extLst>
-              <a:ext uri="{FF2B5EF4-FFF2-40B4-BE49-F238E27FC236}">
-                <a16:creationId xmlns:a16="http://schemas.microsoft.com/office/drawing/2014/main" id="{1408861C-1B62-5443-869D-88254F4698CC}"/>
-              </a:ext>
-            </a:extLst>
-          </p:cNvPr>
-          <p:cNvSpPr txBox="1"/>
-          <p:nvPr/>
-        </p:nvSpPr>
-        <p:spPr>
-          <a:xfrm>
-            <a:off x="939557" y="2300859"/>
-            <a:ext cx="3322477" cy="523220"/>
-          </a:xfrm>
-          <a:prstGeom prst="rect">
-            <a:avLst/>
-          </a:prstGeom>
-          <a:noFill/>
-        </p:spPr>
-        <p:txBody>
-          <a:bodyPr wrap="square" rtlCol="0">
-            <a:spAutoFit/>
-          </a:bodyPr>
-          <a:lstStyle/>
-          <a:p>
-            <a:r>
-              <a:rPr lang="en-US" sz="2800" b="1" dirty="0"/>
-              <a:t>Typical ROC Curves</a:t>
-            </a:r>
-          </a:p>
-        </p:txBody>
-      </p:sp>
-      <p:sp>
-        <p:nvSpPr>
-          <p:cNvPr id="2" name="Left-Right Arrow 1">
-            <a:extLst>
-              <a:ext uri="{FF2B5EF4-FFF2-40B4-BE49-F238E27FC236}">
-                <a16:creationId xmlns:a16="http://schemas.microsoft.com/office/drawing/2014/main" id="{F15F1F48-93F5-A34E-9C6D-C43D7921711E}"/>
-              </a:ext>
-            </a:extLst>
-          </p:cNvPr>
-          <p:cNvSpPr/>
-          <p:nvPr/>
-        </p:nvSpPr>
-        <p:spPr>
-          <a:xfrm>
-            <a:off x="7946965" y="1580959"/>
-            <a:ext cx="2161309" cy="287548"/>
-          </a:xfrm>
-          <a:prstGeom prst="leftRightArrow">
-            <a:avLst/>
-          </a:prstGeom>
+          <a:ln w="63500"/>
         </p:spPr>
         <p:style>
           <a:lnRef idx="2">
@@ -5230,6 +5045,1043 @@
           <a:lstStyle/>
           <a:p>
             <a:pPr algn="ctr"/>
+            <a:endParaRPr lang="en-US" dirty="0"/>
+          </a:p>
+        </p:txBody>
+      </p:sp>
+      <p:sp>
+        <p:nvSpPr>
+          <p:cNvPr id="5" name="Rectangle 4">
+            <a:extLst>
+              <a:ext uri="{FF2B5EF4-FFF2-40B4-BE49-F238E27FC236}">
+                <a16:creationId xmlns:a16="http://schemas.microsoft.com/office/drawing/2014/main" id="{92764486-E703-DE4F-A0AF-94B80A05EA77}"/>
+              </a:ext>
+            </a:extLst>
+          </p:cNvPr>
+          <p:cNvSpPr/>
+          <p:nvPr/>
+        </p:nvSpPr>
+        <p:spPr>
+          <a:xfrm>
+            <a:off x="6171777" y="3594550"/>
+            <a:ext cx="1027087" cy="3059017"/>
+          </a:xfrm>
+          <a:prstGeom prst="rect">
+            <a:avLst/>
+          </a:prstGeom>
+          <a:noFill/>
+          <a:ln w="63500"/>
+        </p:spPr>
+        <p:style>
+          <a:lnRef idx="2">
+            <a:schemeClr val="accent1">
+              <a:shade val="50000"/>
+            </a:schemeClr>
+          </a:lnRef>
+          <a:fillRef idx="1">
+            <a:schemeClr val="accent1"/>
+          </a:fillRef>
+          <a:effectRef idx="0">
+            <a:schemeClr val="accent1"/>
+          </a:effectRef>
+          <a:fontRef idx="minor">
+            <a:schemeClr val="lt1"/>
+          </a:fontRef>
+        </p:style>
+        <p:txBody>
+          <a:bodyPr rtlCol="0" anchor="ctr"/>
+          <a:lstStyle/>
+          <a:p>
+            <a:pPr algn="ctr"/>
+            <a:endParaRPr lang="en-US" dirty="0"/>
+          </a:p>
+        </p:txBody>
+      </p:sp>
+      <p:sp>
+        <p:nvSpPr>
+          <p:cNvPr id="6" name="Rectangle 5">
+            <a:extLst>
+              <a:ext uri="{FF2B5EF4-FFF2-40B4-BE49-F238E27FC236}">
+                <a16:creationId xmlns:a16="http://schemas.microsoft.com/office/drawing/2014/main" id="{5AEF3E3B-D40A-8E40-A82A-F9EBF21FFAF7}"/>
+              </a:ext>
+            </a:extLst>
+          </p:cNvPr>
+          <p:cNvSpPr/>
+          <p:nvPr/>
+        </p:nvSpPr>
+        <p:spPr>
+          <a:xfrm>
+            <a:off x="5505890" y="4048581"/>
+            <a:ext cx="1692974" cy="2585108"/>
+          </a:xfrm>
+          <a:prstGeom prst="rect">
+            <a:avLst/>
+          </a:prstGeom>
+          <a:solidFill>
+            <a:schemeClr val="accent5">
+              <a:lumMod val="40000"/>
+              <a:lumOff val="60000"/>
+              <a:alpha val="39000"/>
+            </a:schemeClr>
+          </a:solidFill>
+        </p:spPr>
+        <p:style>
+          <a:lnRef idx="2">
+            <a:schemeClr val="accent1">
+              <a:shade val="50000"/>
+            </a:schemeClr>
+          </a:lnRef>
+          <a:fillRef idx="1">
+            <a:schemeClr val="accent1"/>
+          </a:fillRef>
+          <a:effectRef idx="0">
+            <a:schemeClr val="accent1"/>
+          </a:effectRef>
+          <a:fontRef idx="minor">
+            <a:schemeClr val="lt1"/>
+          </a:fontRef>
+        </p:style>
+        <p:txBody>
+          <a:bodyPr rtlCol="0" anchor="ctr"/>
+          <a:lstStyle/>
+          <a:p>
+            <a:pPr algn="ctr"/>
+            <a:endParaRPr lang="en-US" dirty="0"/>
+          </a:p>
+        </p:txBody>
+      </p:sp>
+      <p:sp>
+        <p:nvSpPr>
+          <p:cNvPr id="7" name="TextBox 6">
+            <a:extLst>
+              <a:ext uri="{FF2B5EF4-FFF2-40B4-BE49-F238E27FC236}">
+                <a16:creationId xmlns:a16="http://schemas.microsoft.com/office/drawing/2014/main" id="{6B74670B-9E8A-0B4B-9B60-F33269846B51}"/>
+              </a:ext>
+            </a:extLst>
+          </p:cNvPr>
+          <p:cNvSpPr txBox="1"/>
+          <p:nvPr/>
+        </p:nvSpPr>
+        <p:spPr>
+          <a:xfrm>
+            <a:off x="6339726" y="4933452"/>
+            <a:ext cx="682573" cy="646331"/>
+          </a:xfrm>
+          <a:prstGeom prst="rect">
+            <a:avLst/>
+          </a:prstGeom>
+          <a:noFill/>
+        </p:spPr>
+        <p:txBody>
+          <a:bodyPr wrap="square" rtlCol="0">
+            <a:spAutoFit/>
+          </a:bodyPr>
+          <a:lstStyle/>
+          <a:p>
+            <a:pPr algn="ctr"/>
+            <a:r>
+              <a:rPr lang="en-US" b="1" dirty="0">
+                <a:solidFill>
+                  <a:srgbClr val="0070C0"/>
+                </a:solidFill>
+              </a:rPr>
+              <a:t>TP</a:t>
+            </a:r>
+          </a:p>
+          <a:p>
+            <a:pPr algn="ctr"/>
+            <a:r>
+              <a:rPr lang="en-US" b="1" dirty="0">
+                <a:solidFill>
+                  <a:srgbClr val="0070C0"/>
+                </a:solidFill>
+              </a:rPr>
+              <a:t>495</a:t>
+            </a:r>
+          </a:p>
+        </p:txBody>
+      </p:sp>
+      <p:sp>
+        <p:nvSpPr>
+          <p:cNvPr id="8" name="TextBox 7">
+            <a:extLst>
+              <a:ext uri="{FF2B5EF4-FFF2-40B4-BE49-F238E27FC236}">
+                <a16:creationId xmlns:a16="http://schemas.microsoft.com/office/drawing/2014/main" id="{1F57D23C-1B7E-9340-9CC9-2E518FED35CF}"/>
+              </a:ext>
+            </a:extLst>
+          </p:cNvPr>
+          <p:cNvSpPr txBox="1"/>
+          <p:nvPr/>
+        </p:nvSpPr>
+        <p:spPr>
+          <a:xfrm>
+            <a:off x="6339726" y="3645655"/>
+            <a:ext cx="682573" cy="369332"/>
+          </a:xfrm>
+          <a:prstGeom prst="rect">
+            <a:avLst/>
+          </a:prstGeom>
+          <a:noFill/>
+        </p:spPr>
+        <p:txBody>
+          <a:bodyPr wrap="square" rtlCol="0">
+            <a:spAutoFit/>
+          </a:bodyPr>
+          <a:lstStyle/>
+          <a:p>
+            <a:r>
+              <a:rPr lang="en-US" b="1" dirty="0">
+                <a:solidFill>
+                  <a:srgbClr val="0070C0"/>
+                </a:solidFill>
+              </a:rPr>
+              <a:t>FN=5</a:t>
+            </a:r>
+          </a:p>
+        </p:txBody>
+      </p:sp>
+      <p:sp>
+        <p:nvSpPr>
+          <p:cNvPr id="9" name="TextBox 8">
+            <a:extLst>
+              <a:ext uri="{FF2B5EF4-FFF2-40B4-BE49-F238E27FC236}">
+                <a16:creationId xmlns:a16="http://schemas.microsoft.com/office/drawing/2014/main" id="{DC6B00C2-624C-E54A-8F82-45AE7E8B68EB}"/>
+              </a:ext>
+            </a:extLst>
+          </p:cNvPr>
+          <p:cNvSpPr txBox="1"/>
+          <p:nvPr/>
+        </p:nvSpPr>
+        <p:spPr>
+          <a:xfrm>
+            <a:off x="5505890" y="4933452"/>
+            <a:ext cx="654433" cy="646331"/>
+          </a:xfrm>
+          <a:prstGeom prst="rect">
+            <a:avLst/>
+          </a:prstGeom>
+          <a:noFill/>
+        </p:spPr>
+        <p:txBody>
+          <a:bodyPr wrap="square" rtlCol="0">
+            <a:spAutoFit/>
+          </a:bodyPr>
+          <a:lstStyle/>
+          <a:p>
+            <a:pPr algn="ctr"/>
+            <a:r>
+              <a:rPr lang="en-US" b="1" dirty="0">
+                <a:solidFill>
+                  <a:srgbClr val="0070C0"/>
+                </a:solidFill>
+              </a:rPr>
+              <a:t>FP</a:t>
+            </a:r>
+          </a:p>
+          <a:p>
+            <a:pPr algn="ctr"/>
+            <a:r>
+              <a:rPr lang="en-US" b="1" dirty="0">
+                <a:solidFill>
+                  <a:srgbClr val="0070C0"/>
+                </a:solidFill>
+              </a:rPr>
+              <a:t>190</a:t>
+            </a:r>
+          </a:p>
+        </p:txBody>
+      </p:sp>
+      <p:sp>
+        <p:nvSpPr>
+          <p:cNvPr id="10" name="TextBox 9">
+            <a:extLst>
+              <a:ext uri="{FF2B5EF4-FFF2-40B4-BE49-F238E27FC236}">
+                <a16:creationId xmlns:a16="http://schemas.microsoft.com/office/drawing/2014/main" id="{AE36C196-A585-CC42-9604-0BFE015CBF48}"/>
+              </a:ext>
+            </a:extLst>
+          </p:cNvPr>
+          <p:cNvSpPr txBox="1"/>
+          <p:nvPr/>
+        </p:nvSpPr>
+        <p:spPr>
+          <a:xfrm>
+            <a:off x="113762" y="672510"/>
+            <a:ext cx="6703363" cy="2031325"/>
+          </a:xfrm>
+          <a:prstGeom prst="rect">
+            <a:avLst/>
+          </a:prstGeom>
+          <a:noFill/>
+        </p:spPr>
+        <p:txBody>
+          <a:bodyPr wrap="square" rtlCol="0">
+            <a:spAutoFit/>
+          </a:bodyPr>
+          <a:lstStyle/>
+          <a:p>
+            <a:r>
+              <a:rPr lang="en-US" dirty="0"/>
+              <a:t>We have a drug test with the following characteristics:</a:t>
+            </a:r>
+          </a:p>
+          <a:p>
+            <a:r>
+              <a:rPr lang="en-US" dirty="0"/>
+              <a:t>           false positives = 2%</a:t>
+            </a:r>
+          </a:p>
+          <a:p>
+            <a:r>
+              <a:rPr lang="en-US" dirty="0"/>
+              <a:t>           false negatives = 1%</a:t>
+            </a:r>
+          </a:p>
+          <a:p>
+            <a:r>
+              <a:rPr lang="en-US" dirty="0"/>
+              <a:t>5% of population are drug positive.</a:t>
+            </a:r>
+          </a:p>
+          <a:p>
+            <a:endParaRPr lang="en-US" dirty="0"/>
+          </a:p>
+          <a:p>
+            <a:r>
+              <a:rPr lang="en-US" dirty="0"/>
+              <a:t>If a person's test result is positive, what is the probability that this person is indeed drug positive?</a:t>
+            </a:r>
+          </a:p>
+        </p:txBody>
+      </p:sp>
+      <p:sp>
+        <p:nvSpPr>
+          <p:cNvPr id="12" name="TextBox 11">
+            <a:extLst>
+              <a:ext uri="{FF2B5EF4-FFF2-40B4-BE49-F238E27FC236}">
+                <a16:creationId xmlns:a16="http://schemas.microsoft.com/office/drawing/2014/main" id="{6B1C1EEC-E74C-B142-840B-42970BD8DED0}"/>
+              </a:ext>
+            </a:extLst>
+          </p:cNvPr>
+          <p:cNvSpPr txBox="1"/>
+          <p:nvPr/>
+        </p:nvSpPr>
+        <p:spPr>
+          <a:xfrm>
+            <a:off x="3720208" y="2826698"/>
+            <a:ext cx="2325759" cy="369332"/>
+          </a:xfrm>
+          <a:prstGeom prst="rect">
+            <a:avLst/>
+          </a:prstGeom>
+          <a:noFill/>
+        </p:spPr>
+        <p:txBody>
+          <a:bodyPr wrap="square" rtlCol="0">
+            <a:spAutoFit/>
+          </a:bodyPr>
+          <a:lstStyle/>
+          <a:p>
+            <a:r>
+              <a:rPr lang="en-US" b="1" dirty="0">
+                <a:solidFill>
+                  <a:srgbClr val="00B050"/>
+                </a:solidFill>
+              </a:rPr>
+              <a:t>10,000 people total</a:t>
+            </a:r>
+          </a:p>
+        </p:txBody>
+      </p:sp>
+      <p:sp>
+        <p:nvSpPr>
+          <p:cNvPr id="13" name="TextBox 12">
+            <a:extLst>
+              <a:ext uri="{FF2B5EF4-FFF2-40B4-BE49-F238E27FC236}">
+                <a16:creationId xmlns:a16="http://schemas.microsoft.com/office/drawing/2014/main" id="{19F54DC0-7904-4C4A-9A51-E770522D50CC}"/>
+              </a:ext>
+            </a:extLst>
+          </p:cNvPr>
+          <p:cNvSpPr txBox="1"/>
+          <p:nvPr/>
+        </p:nvSpPr>
+        <p:spPr>
+          <a:xfrm>
+            <a:off x="1520201" y="2882420"/>
+            <a:ext cx="1719425" cy="646331"/>
+          </a:xfrm>
+          <a:prstGeom prst="rect">
+            <a:avLst/>
+          </a:prstGeom>
+          <a:noFill/>
+        </p:spPr>
+        <p:txBody>
+          <a:bodyPr wrap="square" rtlCol="0">
+            <a:spAutoFit/>
+          </a:bodyPr>
+          <a:lstStyle/>
+          <a:p>
+            <a:pPr algn="ctr"/>
+            <a:r>
+              <a:rPr lang="en-US" b="1" dirty="0">
+                <a:solidFill>
+                  <a:srgbClr val="00B050"/>
+                </a:solidFill>
+              </a:rPr>
+              <a:t>95%</a:t>
+            </a:r>
+          </a:p>
+          <a:p>
+            <a:pPr algn="ctr"/>
+            <a:r>
+              <a:rPr lang="en-US" b="1" dirty="0">
+                <a:solidFill>
+                  <a:srgbClr val="00B050"/>
+                </a:solidFill>
+              </a:rPr>
+              <a:t>9,500 negative</a:t>
+            </a:r>
+          </a:p>
+        </p:txBody>
+      </p:sp>
+      <p:sp>
+        <p:nvSpPr>
+          <p:cNvPr id="14" name="TextBox 13">
+            <a:extLst>
+              <a:ext uri="{FF2B5EF4-FFF2-40B4-BE49-F238E27FC236}">
+                <a16:creationId xmlns:a16="http://schemas.microsoft.com/office/drawing/2014/main" id="{C21A50F1-5D51-3F4D-8F64-416F7FBD9E7E}"/>
+              </a:ext>
+            </a:extLst>
+          </p:cNvPr>
+          <p:cNvSpPr txBox="1"/>
+          <p:nvPr/>
+        </p:nvSpPr>
+        <p:spPr>
+          <a:xfrm>
+            <a:off x="5995211" y="2872864"/>
+            <a:ext cx="1371602" cy="646331"/>
+          </a:xfrm>
+          <a:prstGeom prst="rect">
+            <a:avLst/>
+          </a:prstGeom>
+          <a:noFill/>
+        </p:spPr>
+        <p:txBody>
+          <a:bodyPr wrap="square" rtlCol="0">
+            <a:spAutoFit/>
+          </a:bodyPr>
+          <a:lstStyle/>
+          <a:p>
+            <a:pPr algn="ctr"/>
+            <a:r>
+              <a:rPr lang="en-US" b="1" dirty="0">
+                <a:solidFill>
+                  <a:srgbClr val="00B050"/>
+                </a:solidFill>
+              </a:rPr>
+              <a:t>5%</a:t>
+            </a:r>
+          </a:p>
+          <a:p>
+            <a:pPr algn="ctr"/>
+            <a:r>
+              <a:rPr lang="en-US" b="1" dirty="0">
+                <a:solidFill>
+                  <a:srgbClr val="00B050"/>
+                </a:solidFill>
+              </a:rPr>
+              <a:t>500 positive</a:t>
+            </a:r>
+          </a:p>
+        </p:txBody>
+      </p:sp>
+      <p:sp>
+        <p:nvSpPr>
+          <p:cNvPr id="15" name="TextBox 14">
+            <a:extLst>
+              <a:ext uri="{FF2B5EF4-FFF2-40B4-BE49-F238E27FC236}">
+                <a16:creationId xmlns:a16="http://schemas.microsoft.com/office/drawing/2014/main" id="{5FB01364-0BA9-9949-8E1C-CC6D790D896A}"/>
+              </a:ext>
+            </a:extLst>
+          </p:cNvPr>
+          <p:cNvSpPr txBox="1"/>
+          <p:nvPr/>
+        </p:nvSpPr>
+        <p:spPr>
+          <a:xfrm>
+            <a:off x="8254691" y="751168"/>
+            <a:ext cx="2995035" cy="646331"/>
+          </a:xfrm>
+          <a:prstGeom prst="rect">
+            <a:avLst/>
+          </a:prstGeom>
+          <a:noFill/>
+        </p:spPr>
+        <p:txBody>
+          <a:bodyPr wrap="square" rtlCol="0">
+            <a:spAutoFit/>
+          </a:bodyPr>
+          <a:lstStyle/>
+          <a:p>
+            <a:r>
+              <a:rPr lang="en-US" dirty="0"/>
+              <a:t>FPR = 2% = </a:t>
+            </a:r>
+            <a:r>
+              <a:rPr lang="en-US" dirty="0">
+                <a:latin typeface="Consolas" panose="020B0609020204030204" pitchFamily="49" charset="0"/>
+                <a:cs typeface="Consolas" panose="020B0609020204030204" pitchFamily="49" charset="0"/>
+              </a:rPr>
+              <a:t>FP/N</a:t>
+            </a:r>
+          </a:p>
+          <a:p>
+            <a:r>
+              <a:rPr lang="en-US" dirty="0"/>
+              <a:t>FP = 2% of 9,500 = 190 </a:t>
+            </a:r>
+          </a:p>
+        </p:txBody>
+      </p:sp>
+      <p:sp>
+        <p:nvSpPr>
+          <p:cNvPr id="16" name="TextBox 15">
+            <a:extLst>
+              <a:ext uri="{FF2B5EF4-FFF2-40B4-BE49-F238E27FC236}">
+                <a16:creationId xmlns:a16="http://schemas.microsoft.com/office/drawing/2014/main" id="{980B50C7-3911-3F4F-AA46-65C283787DA7}"/>
+              </a:ext>
+            </a:extLst>
+          </p:cNvPr>
+          <p:cNvSpPr txBox="1"/>
+          <p:nvPr/>
+        </p:nvSpPr>
+        <p:spPr>
+          <a:xfrm>
+            <a:off x="8254691" y="1672605"/>
+            <a:ext cx="3041373" cy="646331"/>
+          </a:xfrm>
+          <a:prstGeom prst="rect">
+            <a:avLst/>
+          </a:prstGeom>
+          <a:noFill/>
+        </p:spPr>
+        <p:txBody>
+          <a:bodyPr wrap="square" rtlCol="0">
+            <a:spAutoFit/>
+          </a:bodyPr>
+          <a:lstStyle/>
+          <a:p>
+            <a:r>
+              <a:rPr lang="en-US" dirty="0"/>
+              <a:t>FNR = 1% = FN/P</a:t>
+            </a:r>
+          </a:p>
+          <a:p>
+            <a:r>
+              <a:rPr lang="en-US" dirty="0"/>
+              <a:t>FN = 1% of 500 = 5</a:t>
+            </a:r>
+          </a:p>
+        </p:txBody>
+      </p:sp>
+      <p:sp>
+        <p:nvSpPr>
+          <p:cNvPr id="17" name="TextBox 16">
+            <a:extLst>
+              <a:ext uri="{FF2B5EF4-FFF2-40B4-BE49-F238E27FC236}">
+                <a16:creationId xmlns:a16="http://schemas.microsoft.com/office/drawing/2014/main" id="{B84A3915-332E-C241-BD48-8886C250762A}"/>
+              </a:ext>
+            </a:extLst>
+          </p:cNvPr>
+          <p:cNvSpPr txBox="1"/>
+          <p:nvPr/>
+        </p:nvSpPr>
+        <p:spPr>
+          <a:xfrm>
+            <a:off x="8254691" y="2559565"/>
+            <a:ext cx="2047462" cy="369332"/>
+          </a:xfrm>
+          <a:prstGeom prst="rect">
+            <a:avLst/>
+          </a:prstGeom>
+          <a:noFill/>
+        </p:spPr>
+        <p:txBody>
+          <a:bodyPr wrap="square" rtlCol="0">
+            <a:spAutoFit/>
+          </a:bodyPr>
+          <a:lstStyle/>
+          <a:p>
+            <a:r>
+              <a:rPr lang="en-US" dirty="0"/>
+              <a:t>TP = 500-5=495</a:t>
+            </a:r>
+          </a:p>
+        </p:txBody>
+      </p:sp>
+      <p:sp>
+        <p:nvSpPr>
+          <p:cNvPr id="18" name="TextBox 17">
+            <a:extLst>
+              <a:ext uri="{FF2B5EF4-FFF2-40B4-BE49-F238E27FC236}">
+                <a16:creationId xmlns:a16="http://schemas.microsoft.com/office/drawing/2014/main" id="{093DAE60-9E58-FD49-878D-8C197C180CDA}"/>
+              </a:ext>
+            </a:extLst>
+          </p:cNvPr>
+          <p:cNvSpPr txBox="1"/>
+          <p:nvPr/>
+        </p:nvSpPr>
+        <p:spPr>
+          <a:xfrm>
+            <a:off x="8254691" y="2928897"/>
+            <a:ext cx="2842592" cy="369332"/>
+          </a:xfrm>
+          <a:prstGeom prst="rect">
+            <a:avLst/>
+          </a:prstGeom>
+          <a:noFill/>
+        </p:spPr>
+        <p:txBody>
+          <a:bodyPr wrap="square" rtlCol="0">
+            <a:spAutoFit/>
+          </a:bodyPr>
+          <a:lstStyle/>
+          <a:p>
+            <a:r>
+              <a:rPr lang="en-US" dirty="0"/>
+              <a:t>TN = 9,500-190 = 9310</a:t>
+            </a:r>
+          </a:p>
+        </p:txBody>
+      </p:sp>
+      <p:sp>
+        <p:nvSpPr>
+          <p:cNvPr id="19" name="TextBox 18">
+            <a:extLst>
+              <a:ext uri="{FF2B5EF4-FFF2-40B4-BE49-F238E27FC236}">
+                <a16:creationId xmlns:a16="http://schemas.microsoft.com/office/drawing/2014/main" id="{F0EDE16F-DA75-354A-9895-9AD2F69671BB}"/>
+              </a:ext>
+            </a:extLst>
+          </p:cNvPr>
+          <p:cNvSpPr txBox="1"/>
+          <p:nvPr/>
+        </p:nvSpPr>
+        <p:spPr>
+          <a:xfrm>
+            <a:off x="150987" y="3707337"/>
+            <a:ext cx="1207260" cy="369332"/>
+          </a:xfrm>
+          <a:prstGeom prst="rect">
+            <a:avLst/>
+          </a:prstGeom>
+          <a:noFill/>
+        </p:spPr>
+        <p:txBody>
+          <a:bodyPr wrap="square" rtlCol="0">
+            <a:spAutoFit/>
+          </a:bodyPr>
+          <a:lstStyle/>
+          <a:p>
+            <a:r>
+              <a:rPr lang="en-US" b="1" dirty="0">
+                <a:solidFill>
+                  <a:srgbClr val="0070C0"/>
+                </a:solidFill>
+              </a:rPr>
+              <a:t>TN = 9310</a:t>
+            </a:r>
+          </a:p>
+        </p:txBody>
+      </p:sp>
+      <p:sp>
+        <p:nvSpPr>
+          <p:cNvPr id="20" name="TextBox 19">
+            <a:extLst>
+              <a:ext uri="{FF2B5EF4-FFF2-40B4-BE49-F238E27FC236}">
+                <a16:creationId xmlns:a16="http://schemas.microsoft.com/office/drawing/2014/main" id="{F8D9657B-BE11-0347-B8B6-8AADCF22ED1B}"/>
+              </a:ext>
+            </a:extLst>
+          </p:cNvPr>
+          <p:cNvSpPr txBox="1"/>
+          <p:nvPr/>
+        </p:nvSpPr>
+        <p:spPr>
+          <a:xfrm>
+            <a:off x="8255428" y="3836096"/>
+            <a:ext cx="3936572" cy="2031325"/>
+          </a:xfrm>
+          <a:prstGeom prst="rect">
+            <a:avLst/>
+          </a:prstGeom>
+          <a:noFill/>
+        </p:spPr>
+        <p:txBody>
+          <a:bodyPr wrap="square" rtlCol="0">
+            <a:spAutoFit/>
+          </a:bodyPr>
+          <a:lstStyle/>
+          <a:p>
+            <a:r>
+              <a:rPr lang="en-US" dirty="0"/>
+              <a:t>If the person tests positive, </a:t>
+            </a:r>
+          </a:p>
+          <a:p>
+            <a:r>
+              <a:rPr lang="en-US" dirty="0"/>
+              <a:t>he is either TP or FP</a:t>
+            </a:r>
+          </a:p>
+          <a:p>
+            <a:endParaRPr lang="en-US" dirty="0"/>
+          </a:p>
+          <a:p>
+            <a:r>
+              <a:rPr lang="en-US" dirty="0"/>
+              <a:t>Probability of being positive given the results of the test:</a:t>
+            </a:r>
+          </a:p>
+          <a:p>
+            <a:endParaRPr lang="en-US" dirty="0"/>
+          </a:p>
+          <a:p>
+            <a:r>
+              <a:rPr lang="en-US" dirty="0"/>
+              <a:t>TP/(TP+FP) = 495/(495+190) = 0.72</a:t>
+            </a:r>
+          </a:p>
+        </p:txBody>
+      </p:sp>
+      <p:sp>
+        <p:nvSpPr>
+          <p:cNvPr id="2" name="TextBox 1">
+            <a:extLst>
+              <a:ext uri="{FF2B5EF4-FFF2-40B4-BE49-F238E27FC236}">
+                <a16:creationId xmlns:a16="http://schemas.microsoft.com/office/drawing/2014/main" id="{DF9ABAE0-A26C-5F44-8C55-794CA181EBFA}"/>
+              </a:ext>
+            </a:extLst>
+          </p:cNvPr>
+          <p:cNvSpPr txBox="1"/>
+          <p:nvPr/>
+        </p:nvSpPr>
+        <p:spPr>
+          <a:xfrm>
+            <a:off x="150987" y="149290"/>
+            <a:ext cx="3314457" cy="523220"/>
+          </a:xfrm>
+          <a:prstGeom prst="rect">
+            <a:avLst/>
+          </a:prstGeom>
+          <a:noFill/>
+        </p:spPr>
+        <p:txBody>
+          <a:bodyPr wrap="square" rtlCol="0">
+            <a:spAutoFit/>
+          </a:bodyPr>
+          <a:lstStyle/>
+          <a:p>
+            <a:r>
+              <a:rPr lang="en-US" sz="2800" b="1" dirty="0"/>
+              <a:t>Example – Drug Test</a:t>
+            </a:r>
+          </a:p>
+        </p:txBody>
+      </p:sp>
+      <p:sp>
+        <p:nvSpPr>
+          <p:cNvPr id="21" name="TextBox 20">
+            <a:extLst>
+              <a:ext uri="{FF2B5EF4-FFF2-40B4-BE49-F238E27FC236}">
+                <a16:creationId xmlns:a16="http://schemas.microsoft.com/office/drawing/2014/main" id="{7D5FB003-39A3-4F47-8B35-82CBDB400810}"/>
+              </a:ext>
+            </a:extLst>
+          </p:cNvPr>
+          <p:cNvSpPr txBox="1"/>
+          <p:nvPr/>
+        </p:nvSpPr>
+        <p:spPr>
+          <a:xfrm>
+            <a:off x="8254691" y="97203"/>
+            <a:ext cx="3314457" cy="523220"/>
+          </a:xfrm>
+          <a:prstGeom prst="rect">
+            <a:avLst/>
+          </a:prstGeom>
+          <a:noFill/>
+        </p:spPr>
+        <p:txBody>
+          <a:bodyPr wrap="square" rtlCol="0">
+            <a:spAutoFit/>
+          </a:bodyPr>
+          <a:lstStyle/>
+          <a:p>
+            <a:r>
+              <a:rPr lang="en-US" sz="2800" b="1" dirty="0"/>
+              <a:t>Solution:</a:t>
+            </a:r>
+          </a:p>
+        </p:txBody>
+      </p:sp>
+    </p:spTree>
+    <p:extLst>
+      <p:ext uri="{BB962C8B-B14F-4D97-AF65-F5344CB8AC3E}">
+        <p14:creationId xmlns:p14="http://schemas.microsoft.com/office/powerpoint/2010/main" val="2067706377"/>
+      </p:ext>
+    </p:extLst>
+  </p:cSld>
+  <p:clrMapOvr>
+    <a:masterClrMapping/>
+  </p:clrMapOvr>
+</p:sld>
+</file>
+
+<file path=ppt/slides/slide11.xml><?xml version="1.0" encoding="utf-8"?>
+<p:sld xmlns:a="http://schemas.openxmlformats.org/drawingml/2006/main" xmlns:r="http://schemas.openxmlformats.org/officeDocument/2006/relationships" xmlns:p="http://schemas.openxmlformats.org/presentationml/2006/main">
+  <p:cSld>
+    <p:spTree>
+      <p:nvGrpSpPr>
+        <p:cNvPr id="1" name=""/>
+        <p:cNvGrpSpPr/>
+        <p:nvPr/>
+      </p:nvGrpSpPr>
+      <p:grpSpPr>
+        <a:xfrm>
+          <a:off x="0" y="0"/>
+          <a:ext cx="0" cy="0"/>
+          <a:chOff x="0" y="0"/>
+          <a:chExt cx="0" cy="0"/>
+        </a:xfrm>
+      </p:grpSpPr>
+      <p:sp>
+        <p:nvSpPr>
+          <p:cNvPr id="3" name="TextBox 2">
+            <a:extLst>
+              <a:ext uri="{FF2B5EF4-FFF2-40B4-BE49-F238E27FC236}">
+                <a16:creationId xmlns:a16="http://schemas.microsoft.com/office/drawing/2014/main" id="{C331A9BC-3B71-D94B-913F-5D13C7F8ADF1}"/>
+              </a:ext>
+            </a:extLst>
+          </p:cNvPr>
+          <p:cNvSpPr txBox="1"/>
+          <p:nvPr/>
+        </p:nvSpPr>
+        <p:spPr>
+          <a:xfrm>
+            <a:off x="222501" y="154074"/>
+            <a:ext cx="2970150" cy="584775"/>
+          </a:xfrm>
+          <a:prstGeom prst="rect">
+            <a:avLst/>
+          </a:prstGeom>
+          <a:noFill/>
+        </p:spPr>
+        <p:txBody>
+          <a:bodyPr wrap="square" rtlCol="0">
+            <a:spAutoFit/>
+          </a:bodyPr>
+          <a:lstStyle/>
+          <a:p>
+            <a:r>
+              <a:rPr lang="en-US" sz="3200" b="1" dirty="0"/>
+              <a:t>Medical Tests</a:t>
+            </a:r>
+          </a:p>
+        </p:txBody>
+      </p:sp>
+      <p:sp>
+        <p:nvSpPr>
+          <p:cNvPr id="4" name="TextBox 3">
+            <a:extLst>
+              <a:ext uri="{FF2B5EF4-FFF2-40B4-BE49-F238E27FC236}">
+                <a16:creationId xmlns:a16="http://schemas.microsoft.com/office/drawing/2014/main" id="{EE8F2B30-236A-B049-BB9B-38E73740DE4C}"/>
+              </a:ext>
+            </a:extLst>
+          </p:cNvPr>
+          <p:cNvSpPr txBox="1"/>
+          <p:nvPr/>
+        </p:nvSpPr>
+        <p:spPr>
+          <a:xfrm>
+            <a:off x="222501" y="914400"/>
+            <a:ext cx="4039533" cy="954107"/>
+          </a:xfrm>
+          <a:prstGeom prst="rect">
+            <a:avLst/>
+          </a:prstGeom>
+          <a:noFill/>
+        </p:spPr>
+        <p:txBody>
+          <a:bodyPr wrap="square" rtlCol="0">
+            <a:spAutoFit/>
+          </a:bodyPr>
+          <a:lstStyle/>
+          <a:p>
+            <a:r>
+              <a:rPr lang="en-US" dirty="0"/>
+              <a:t>Merck Manuals:</a:t>
+            </a:r>
+          </a:p>
+          <a:p>
+            <a:r>
+              <a:rPr lang="en-US" sz="1000" dirty="0">
+                <a:hlinkClick r:id="rId2"/>
+              </a:rPr>
+              <a:t>https://www.merckmanuals.com/professional/special-subjects/clinical-decision-making/understanding-medical-tests-and-test-results</a:t>
+            </a:r>
+            <a:endParaRPr lang="en-US" sz="1000" dirty="0"/>
+          </a:p>
+          <a:p>
+            <a:endParaRPr lang="en-US" dirty="0"/>
+          </a:p>
+        </p:txBody>
+      </p:sp>
+      <p:pic>
+        <p:nvPicPr>
+          <p:cNvPr id="5" name="Picture 4">
+            <a:extLst>
+              <a:ext uri="{FF2B5EF4-FFF2-40B4-BE49-F238E27FC236}">
+                <a16:creationId xmlns:a16="http://schemas.microsoft.com/office/drawing/2014/main" id="{BFC12F5C-307B-B641-A137-8EFD1F15A6C9}"/>
+              </a:ext>
+            </a:extLst>
+          </p:cNvPr>
+          <p:cNvPicPr>
+            <a:picLocks noChangeAspect="1"/>
+          </p:cNvPicPr>
+          <p:nvPr/>
+        </p:nvPicPr>
+        <p:blipFill>
+          <a:blip r:embed="rId3" cstate="email">
+            <a:extLst>
+              <a:ext uri="{28A0092B-C50C-407E-A947-70E740481C1C}">
+                <a14:useLocalDpi xmlns:a14="http://schemas.microsoft.com/office/drawing/2010/main"/>
+              </a:ext>
+            </a:extLst>
+          </a:blip>
+          <a:stretch>
+            <a:fillRect/>
+          </a:stretch>
+        </p:blipFill>
+        <p:spPr>
+          <a:xfrm>
+            <a:off x="5705998" y="2058013"/>
+            <a:ext cx="6335770" cy="2646991"/>
+          </a:xfrm>
+          <a:prstGeom prst="rect">
+            <a:avLst/>
+          </a:prstGeom>
+        </p:spPr>
+      </p:pic>
+      <p:pic>
+        <p:nvPicPr>
+          <p:cNvPr id="6" name="Picture 5">
+            <a:extLst>
+              <a:ext uri="{FF2B5EF4-FFF2-40B4-BE49-F238E27FC236}">
+                <a16:creationId xmlns:a16="http://schemas.microsoft.com/office/drawing/2014/main" id="{31285B1A-8D6C-D649-9463-5B30D36B16D2}"/>
+              </a:ext>
+            </a:extLst>
+          </p:cNvPr>
+          <p:cNvPicPr>
+            <a:picLocks noChangeAspect="1"/>
+          </p:cNvPicPr>
+          <p:nvPr/>
+        </p:nvPicPr>
+        <p:blipFill>
+          <a:blip r:embed="rId4" cstate="email">
+            <a:extLst>
+              <a:ext uri="{28A0092B-C50C-407E-A947-70E740481C1C}">
+                <a14:useLocalDpi xmlns:a14="http://schemas.microsoft.com/office/drawing/2010/main"/>
+              </a:ext>
+            </a:extLst>
+          </a:blip>
+          <a:stretch>
+            <a:fillRect/>
+          </a:stretch>
+        </p:blipFill>
+        <p:spPr>
+          <a:xfrm>
+            <a:off x="61417" y="2824079"/>
+            <a:ext cx="4775195" cy="3879847"/>
+          </a:xfrm>
+          <a:prstGeom prst="rect">
+            <a:avLst/>
+          </a:prstGeom>
+        </p:spPr>
+      </p:pic>
+      <p:sp>
+        <p:nvSpPr>
+          <p:cNvPr id="7" name="TextBox 6">
+            <a:extLst>
+              <a:ext uri="{FF2B5EF4-FFF2-40B4-BE49-F238E27FC236}">
+                <a16:creationId xmlns:a16="http://schemas.microsoft.com/office/drawing/2014/main" id="{1408861C-1B62-5443-869D-88254F4698CC}"/>
+              </a:ext>
+            </a:extLst>
+          </p:cNvPr>
+          <p:cNvSpPr txBox="1"/>
+          <p:nvPr/>
+        </p:nvSpPr>
+        <p:spPr>
+          <a:xfrm>
+            <a:off x="939557" y="2300859"/>
+            <a:ext cx="3322477" cy="523220"/>
+          </a:xfrm>
+          <a:prstGeom prst="rect">
+            <a:avLst/>
+          </a:prstGeom>
+          <a:noFill/>
+        </p:spPr>
+        <p:txBody>
+          <a:bodyPr wrap="square" rtlCol="0">
+            <a:spAutoFit/>
+          </a:bodyPr>
+          <a:lstStyle/>
+          <a:p>
+            <a:r>
+              <a:rPr lang="en-US" sz="2800" b="1" dirty="0"/>
+              <a:t>Typical ROC Curves</a:t>
+            </a:r>
+          </a:p>
+        </p:txBody>
+      </p:sp>
+      <p:sp>
+        <p:nvSpPr>
+          <p:cNvPr id="2" name="Left-Right Arrow 1">
+            <a:extLst>
+              <a:ext uri="{FF2B5EF4-FFF2-40B4-BE49-F238E27FC236}">
+                <a16:creationId xmlns:a16="http://schemas.microsoft.com/office/drawing/2014/main" id="{F15F1F48-93F5-A34E-9C6D-C43D7921711E}"/>
+              </a:ext>
+            </a:extLst>
+          </p:cNvPr>
+          <p:cNvSpPr/>
+          <p:nvPr/>
+        </p:nvSpPr>
+        <p:spPr>
+          <a:xfrm>
+            <a:off x="7946965" y="1580959"/>
+            <a:ext cx="2161309" cy="287548"/>
+          </a:xfrm>
+          <a:prstGeom prst="leftRightArrow">
+            <a:avLst/>
+          </a:prstGeom>
+        </p:spPr>
+        <p:style>
+          <a:lnRef idx="2">
+            <a:schemeClr val="accent1">
+              <a:shade val="50000"/>
+            </a:schemeClr>
+          </a:lnRef>
+          <a:fillRef idx="1">
+            <a:schemeClr val="accent1"/>
+          </a:fillRef>
+          <a:effectRef idx="0">
+            <a:schemeClr val="accent1"/>
+          </a:effectRef>
+          <a:fontRef idx="minor">
+            <a:schemeClr val="lt1"/>
+          </a:fontRef>
+        </p:style>
+        <p:txBody>
+          <a:bodyPr rtlCol="0" anchor="ctr"/>
+          <a:lstStyle/>
+          <a:p>
+            <a:pPr algn="ctr"/>
             <a:endParaRPr lang="en-US"/>
           </a:p>
         </p:txBody>
@@ -5308,6 +6160,1146 @@
     <p:extLst>
       <p:ext uri="{BB962C8B-B14F-4D97-AF65-F5344CB8AC3E}">
         <p14:creationId xmlns:p14="http://schemas.microsoft.com/office/powerpoint/2010/main" val="4208035462"/>
+      </p:ext>
+    </p:extLst>
+  </p:cSld>
+  <p:clrMapOvr>
+    <a:masterClrMapping/>
+  </p:clrMapOvr>
+</p:sld>
+</file>
+
+<file path=ppt/slides/slide12.xml><?xml version="1.0" encoding="utf-8"?>
+<p:sld xmlns:a="http://schemas.openxmlformats.org/drawingml/2006/main" xmlns:r="http://schemas.openxmlformats.org/officeDocument/2006/relationships" xmlns:p="http://schemas.openxmlformats.org/presentationml/2006/main">
+  <p:cSld>
+    <p:spTree>
+      <p:nvGrpSpPr>
+        <p:cNvPr id="1" name=""/>
+        <p:cNvGrpSpPr/>
+        <p:nvPr/>
+      </p:nvGrpSpPr>
+      <p:grpSpPr>
+        <a:xfrm>
+          <a:off x="0" y="0"/>
+          <a:ext cx="0" cy="0"/>
+          <a:chOff x="0" y="0"/>
+          <a:chExt cx="0" cy="0"/>
+        </a:xfrm>
+      </p:grpSpPr>
+      <p:sp>
+        <p:nvSpPr>
+          <p:cNvPr id="3" name="TextBox 2">
+            <a:extLst>
+              <a:ext uri="{FF2B5EF4-FFF2-40B4-BE49-F238E27FC236}">
+                <a16:creationId xmlns:a16="http://schemas.microsoft.com/office/drawing/2014/main" id="{C331A9BC-3B71-D94B-913F-5D13C7F8ADF1}"/>
+              </a:ext>
+            </a:extLst>
+          </p:cNvPr>
+          <p:cNvSpPr txBox="1"/>
+          <p:nvPr/>
+        </p:nvSpPr>
+        <p:spPr>
+          <a:xfrm>
+            <a:off x="222501" y="154074"/>
+            <a:ext cx="4212365" cy="523220"/>
+          </a:xfrm>
+          <a:prstGeom prst="rect">
+            <a:avLst/>
+          </a:prstGeom>
+          <a:noFill/>
+        </p:spPr>
+        <p:txBody>
+          <a:bodyPr wrap="square" rtlCol="0">
+            <a:spAutoFit/>
+          </a:bodyPr>
+          <a:lstStyle/>
+          <a:p>
+            <a:r>
+              <a:rPr lang="en-US" sz="2800" b="1" dirty="0"/>
+              <a:t>ROC AUC vs Accuracy</a:t>
+            </a:r>
+          </a:p>
+        </p:txBody>
+      </p:sp>
+      <p:sp>
+        <p:nvSpPr>
+          <p:cNvPr id="4" name="TextBox 3">
+            <a:extLst>
+              <a:ext uri="{FF2B5EF4-FFF2-40B4-BE49-F238E27FC236}">
+                <a16:creationId xmlns:a16="http://schemas.microsoft.com/office/drawing/2014/main" id="{EE8F2B30-236A-B049-BB9B-38E73740DE4C}"/>
+              </a:ext>
+            </a:extLst>
+          </p:cNvPr>
+          <p:cNvSpPr txBox="1"/>
+          <p:nvPr/>
+        </p:nvSpPr>
+        <p:spPr>
+          <a:xfrm>
+            <a:off x="108269" y="2556787"/>
+            <a:ext cx="5266704" cy="2554545"/>
+          </a:xfrm>
+          <a:prstGeom prst="rect">
+            <a:avLst/>
+          </a:prstGeom>
+          <a:noFill/>
+        </p:spPr>
+        <p:txBody>
+          <a:bodyPr wrap="square" rtlCol="0">
+            <a:spAutoFit/>
+          </a:bodyPr>
+          <a:lstStyle/>
+          <a:p>
+            <a:r>
+              <a:rPr lang="en-US" sz="1600" dirty="0"/>
+              <a:t>Suppose we have classification problem (planes vs noise) which is highly imbalanced: 10 planes and 1000 noise spikes. Suppose we have good ROC curve with good AUC close to 1.</a:t>
+            </a:r>
+          </a:p>
+          <a:p>
+            <a:r>
+              <a:rPr lang="en-US" sz="1600" dirty="0"/>
+              <a:t>The "sweet spot" in the top left corner with coordinates (0.1,0.9). </a:t>
+            </a:r>
+          </a:p>
+          <a:p>
+            <a:r>
+              <a:rPr lang="en-US" sz="1600" dirty="0"/>
+              <a:t>If we run our classifier at this spot, this means that we will identify as planes : 9 planes (90% out of 10) and 100 noise spikes (10% out of 1000).</a:t>
+            </a:r>
+          </a:p>
+          <a:p>
+            <a:r>
+              <a:rPr lang="en-US" sz="1600" dirty="0"/>
+              <a:t>So this will be a very bad classifier – it will cry "plane" on noise events 10 times more often than on real planes.</a:t>
+            </a:r>
+          </a:p>
+        </p:txBody>
+      </p:sp>
+      <p:sp>
+        <p:nvSpPr>
+          <p:cNvPr id="11" name="Google Shape;88;p13">
+            <a:extLst>
+              <a:ext uri="{FF2B5EF4-FFF2-40B4-BE49-F238E27FC236}">
+                <a16:creationId xmlns:a16="http://schemas.microsoft.com/office/drawing/2014/main" id="{AD22FBE6-E244-044F-AC2B-98E47969D123}"/>
+              </a:ext>
+            </a:extLst>
+          </p:cNvPr>
+          <p:cNvSpPr txBox="1"/>
+          <p:nvPr/>
+        </p:nvSpPr>
+        <p:spPr>
+          <a:xfrm>
+            <a:off x="6808620" y="159149"/>
+            <a:ext cx="4155858" cy="429251"/>
+          </a:xfrm>
+          <a:prstGeom prst="rect">
+            <a:avLst/>
+          </a:prstGeom>
+          <a:noFill/>
+          <a:ln>
+            <a:noFill/>
+          </a:ln>
+        </p:spPr>
+        <p:txBody>
+          <a:bodyPr spcFirstLastPara="1" wrap="square" lIns="91425" tIns="45700" rIns="91425" bIns="45700" anchor="t" anchorCtr="0">
+            <a:noAutofit/>
+          </a:bodyPr>
+          <a:lstStyle/>
+          <a:p>
+            <a:pPr marL="0" marR="0" lvl="0" indent="0" algn="l" rtl="0">
+              <a:spcBef>
+                <a:spcPts val="0"/>
+              </a:spcBef>
+              <a:spcAft>
+                <a:spcPts val="0"/>
+              </a:spcAft>
+              <a:buNone/>
+            </a:pPr>
+            <a:r>
+              <a:rPr lang="en-US" sz="2000" b="1" i="0" u="none" strike="noStrike" cap="none" dirty="0">
+                <a:solidFill>
+                  <a:schemeClr val="dk1"/>
+                </a:solidFill>
+                <a:latin typeface="Calibri"/>
+                <a:ea typeface="Calibri"/>
+                <a:cs typeface="Calibri"/>
+                <a:sym typeface="Calibri"/>
+              </a:rPr>
+              <a:t>Accuracy = sum(Diagonal) / sum(ALL)</a:t>
+            </a:r>
+          </a:p>
+        </p:txBody>
+      </p:sp>
+      <p:sp>
+        <p:nvSpPr>
+          <p:cNvPr id="12" name="Rectangle 11">
+            <a:extLst>
+              <a:ext uri="{FF2B5EF4-FFF2-40B4-BE49-F238E27FC236}">
+                <a16:creationId xmlns:a16="http://schemas.microsoft.com/office/drawing/2014/main" id="{890B7FD2-4180-8542-97F2-039C343A2252}"/>
+              </a:ext>
+            </a:extLst>
+          </p:cNvPr>
+          <p:cNvSpPr/>
+          <p:nvPr/>
+        </p:nvSpPr>
+        <p:spPr>
+          <a:xfrm>
+            <a:off x="10124936" y="985093"/>
+            <a:ext cx="294022" cy="294022"/>
+          </a:xfrm>
+          <a:prstGeom prst="rect">
+            <a:avLst/>
+          </a:prstGeom>
+        </p:spPr>
+        <p:style>
+          <a:lnRef idx="2">
+            <a:schemeClr val="accent1">
+              <a:shade val="50000"/>
+            </a:schemeClr>
+          </a:lnRef>
+          <a:fillRef idx="1">
+            <a:schemeClr val="accent1"/>
+          </a:fillRef>
+          <a:effectRef idx="0">
+            <a:schemeClr val="accent1"/>
+          </a:effectRef>
+          <a:fontRef idx="minor">
+            <a:schemeClr val="lt1"/>
+          </a:fontRef>
+        </p:style>
+        <p:txBody>
+          <a:bodyPr rtlCol="0" anchor="ctr"/>
+          <a:lstStyle/>
+          <a:p>
+            <a:pPr algn="ctr"/>
+            <a:endParaRPr lang="en-US"/>
+          </a:p>
+        </p:txBody>
+      </p:sp>
+      <p:cxnSp>
+        <p:nvCxnSpPr>
+          <p:cNvPr id="13" name="Straight Connector 12">
+            <a:extLst>
+              <a:ext uri="{FF2B5EF4-FFF2-40B4-BE49-F238E27FC236}">
+                <a16:creationId xmlns:a16="http://schemas.microsoft.com/office/drawing/2014/main" id="{F438462C-D0AE-054D-A1CE-1FDA49D857E2}"/>
+              </a:ext>
+            </a:extLst>
+          </p:cNvPr>
+          <p:cNvCxnSpPr>
+            <a:cxnSpLocks/>
+          </p:cNvCxnSpPr>
+          <p:nvPr/>
+        </p:nvCxnSpPr>
+        <p:spPr>
+          <a:xfrm flipH="1">
+            <a:off x="9338191" y="820309"/>
+            <a:ext cx="662706" cy="941746"/>
+          </a:xfrm>
+          <a:prstGeom prst="line">
+            <a:avLst/>
+          </a:prstGeom>
+          <a:ln w="63500"/>
+        </p:spPr>
+        <p:style>
+          <a:lnRef idx="1">
+            <a:schemeClr val="accent1"/>
+          </a:lnRef>
+          <a:fillRef idx="0">
+            <a:schemeClr val="accent1"/>
+          </a:fillRef>
+          <a:effectRef idx="0">
+            <a:schemeClr val="accent1"/>
+          </a:effectRef>
+          <a:fontRef idx="minor">
+            <a:schemeClr val="tx1"/>
+          </a:fontRef>
+        </p:style>
+      </p:cxnSp>
+      <p:sp>
+        <p:nvSpPr>
+          <p:cNvPr id="14" name="Rectangle 13">
+            <a:extLst>
+              <a:ext uri="{FF2B5EF4-FFF2-40B4-BE49-F238E27FC236}">
+                <a16:creationId xmlns:a16="http://schemas.microsoft.com/office/drawing/2014/main" id="{2BFD939A-2CF8-8647-AB2C-0E394F9D6E17}"/>
+              </a:ext>
+            </a:extLst>
+          </p:cNvPr>
+          <p:cNvSpPr/>
+          <p:nvPr/>
+        </p:nvSpPr>
+        <p:spPr>
+          <a:xfrm>
+            <a:off x="10124936" y="1335480"/>
+            <a:ext cx="294022" cy="294022"/>
+          </a:xfrm>
+          <a:prstGeom prst="rect">
+            <a:avLst/>
+          </a:prstGeom>
+        </p:spPr>
+        <p:style>
+          <a:lnRef idx="2">
+            <a:schemeClr val="accent1">
+              <a:shade val="50000"/>
+            </a:schemeClr>
+          </a:lnRef>
+          <a:fillRef idx="1">
+            <a:schemeClr val="accent1"/>
+          </a:fillRef>
+          <a:effectRef idx="0">
+            <a:schemeClr val="accent1"/>
+          </a:effectRef>
+          <a:fontRef idx="minor">
+            <a:schemeClr val="lt1"/>
+          </a:fontRef>
+        </p:style>
+        <p:txBody>
+          <a:bodyPr rtlCol="0" anchor="ctr"/>
+          <a:lstStyle/>
+          <a:p>
+            <a:pPr algn="ctr"/>
+            <a:endParaRPr lang="en-US"/>
+          </a:p>
+        </p:txBody>
+      </p:sp>
+      <p:sp>
+        <p:nvSpPr>
+          <p:cNvPr id="15" name="Rectangle 14">
+            <a:extLst>
+              <a:ext uri="{FF2B5EF4-FFF2-40B4-BE49-F238E27FC236}">
+                <a16:creationId xmlns:a16="http://schemas.microsoft.com/office/drawing/2014/main" id="{C89DE113-9972-BF4A-9AB9-4E50323B87F2}"/>
+              </a:ext>
+            </a:extLst>
+          </p:cNvPr>
+          <p:cNvSpPr/>
+          <p:nvPr/>
+        </p:nvSpPr>
+        <p:spPr>
+          <a:xfrm>
+            <a:off x="10472033" y="988077"/>
+            <a:ext cx="294022" cy="294022"/>
+          </a:xfrm>
+          <a:prstGeom prst="rect">
+            <a:avLst/>
+          </a:prstGeom>
+        </p:spPr>
+        <p:style>
+          <a:lnRef idx="2">
+            <a:schemeClr val="accent1">
+              <a:shade val="50000"/>
+            </a:schemeClr>
+          </a:lnRef>
+          <a:fillRef idx="1">
+            <a:schemeClr val="accent1"/>
+          </a:fillRef>
+          <a:effectRef idx="0">
+            <a:schemeClr val="accent1"/>
+          </a:effectRef>
+          <a:fontRef idx="minor">
+            <a:schemeClr val="lt1"/>
+          </a:fontRef>
+        </p:style>
+        <p:txBody>
+          <a:bodyPr rtlCol="0" anchor="ctr"/>
+          <a:lstStyle/>
+          <a:p>
+            <a:pPr algn="ctr"/>
+            <a:endParaRPr lang="en-US"/>
+          </a:p>
+        </p:txBody>
+      </p:sp>
+      <p:sp>
+        <p:nvSpPr>
+          <p:cNvPr id="16" name="Rectangle 15">
+            <a:extLst>
+              <a:ext uri="{FF2B5EF4-FFF2-40B4-BE49-F238E27FC236}">
+                <a16:creationId xmlns:a16="http://schemas.microsoft.com/office/drawing/2014/main" id="{13A8D2B4-2BC5-F24E-BEA4-ADE4E1F477EE}"/>
+              </a:ext>
+            </a:extLst>
+          </p:cNvPr>
+          <p:cNvSpPr/>
+          <p:nvPr/>
+        </p:nvSpPr>
+        <p:spPr>
+          <a:xfrm>
+            <a:off x="10472033" y="1338464"/>
+            <a:ext cx="294022" cy="294022"/>
+          </a:xfrm>
+          <a:prstGeom prst="rect">
+            <a:avLst/>
+          </a:prstGeom>
+        </p:spPr>
+        <p:style>
+          <a:lnRef idx="2">
+            <a:schemeClr val="accent1">
+              <a:shade val="50000"/>
+            </a:schemeClr>
+          </a:lnRef>
+          <a:fillRef idx="1">
+            <a:schemeClr val="accent1"/>
+          </a:fillRef>
+          <a:effectRef idx="0">
+            <a:schemeClr val="accent1"/>
+          </a:effectRef>
+          <a:fontRef idx="minor">
+            <a:schemeClr val="lt1"/>
+          </a:fontRef>
+        </p:style>
+        <p:txBody>
+          <a:bodyPr rtlCol="0" anchor="ctr"/>
+          <a:lstStyle/>
+          <a:p>
+            <a:pPr algn="ctr"/>
+            <a:endParaRPr lang="en-US"/>
+          </a:p>
+        </p:txBody>
+      </p:sp>
+      <p:sp>
+        <p:nvSpPr>
+          <p:cNvPr id="17" name="Rectangle 16">
+            <a:extLst>
+              <a:ext uri="{FF2B5EF4-FFF2-40B4-BE49-F238E27FC236}">
+                <a16:creationId xmlns:a16="http://schemas.microsoft.com/office/drawing/2014/main" id="{0393E760-AB78-8B4E-825D-076171E3436C}"/>
+              </a:ext>
+            </a:extLst>
+          </p:cNvPr>
+          <p:cNvSpPr/>
+          <p:nvPr/>
+        </p:nvSpPr>
+        <p:spPr>
+          <a:xfrm>
+            <a:off x="8539452" y="992726"/>
+            <a:ext cx="294022" cy="294022"/>
+          </a:xfrm>
+          <a:prstGeom prst="rect">
+            <a:avLst/>
+          </a:prstGeom>
+        </p:spPr>
+        <p:style>
+          <a:lnRef idx="2">
+            <a:schemeClr val="accent1">
+              <a:shade val="50000"/>
+            </a:schemeClr>
+          </a:lnRef>
+          <a:fillRef idx="1">
+            <a:schemeClr val="accent1"/>
+          </a:fillRef>
+          <a:effectRef idx="0">
+            <a:schemeClr val="accent1"/>
+          </a:effectRef>
+          <a:fontRef idx="minor">
+            <a:schemeClr val="lt1"/>
+          </a:fontRef>
+        </p:style>
+        <p:txBody>
+          <a:bodyPr rtlCol="0" anchor="ctr"/>
+          <a:lstStyle/>
+          <a:p>
+            <a:pPr algn="ctr"/>
+            <a:endParaRPr lang="en-US"/>
+          </a:p>
+        </p:txBody>
+      </p:sp>
+      <p:sp>
+        <p:nvSpPr>
+          <p:cNvPr id="18" name="Rectangle 17">
+            <a:extLst>
+              <a:ext uri="{FF2B5EF4-FFF2-40B4-BE49-F238E27FC236}">
+                <a16:creationId xmlns:a16="http://schemas.microsoft.com/office/drawing/2014/main" id="{490F7957-3FC2-1F47-900E-7E339B84A540}"/>
+              </a:ext>
+            </a:extLst>
+          </p:cNvPr>
+          <p:cNvSpPr/>
+          <p:nvPr/>
+        </p:nvSpPr>
+        <p:spPr>
+          <a:xfrm>
+            <a:off x="8539452" y="1343113"/>
+            <a:ext cx="294022" cy="294022"/>
+          </a:xfrm>
+          <a:prstGeom prst="rect">
+            <a:avLst/>
+          </a:prstGeom>
+          <a:noFill/>
+        </p:spPr>
+        <p:style>
+          <a:lnRef idx="2">
+            <a:schemeClr val="accent1">
+              <a:shade val="50000"/>
+            </a:schemeClr>
+          </a:lnRef>
+          <a:fillRef idx="1">
+            <a:schemeClr val="accent1"/>
+          </a:fillRef>
+          <a:effectRef idx="0">
+            <a:schemeClr val="accent1"/>
+          </a:effectRef>
+          <a:fontRef idx="minor">
+            <a:schemeClr val="lt1"/>
+          </a:fontRef>
+        </p:style>
+        <p:txBody>
+          <a:bodyPr rtlCol="0" anchor="ctr"/>
+          <a:lstStyle/>
+          <a:p>
+            <a:pPr algn="ctr"/>
+            <a:endParaRPr lang="en-US"/>
+          </a:p>
+        </p:txBody>
+      </p:sp>
+      <p:sp>
+        <p:nvSpPr>
+          <p:cNvPr id="19" name="Rectangle 18">
+            <a:extLst>
+              <a:ext uri="{FF2B5EF4-FFF2-40B4-BE49-F238E27FC236}">
+                <a16:creationId xmlns:a16="http://schemas.microsoft.com/office/drawing/2014/main" id="{BE02EFDB-8E63-5B4B-BC39-0E3123CB4803}"/>
+              </a:ext>
+            </a:extLst>
+          </p:cNvPr>
+          <p:cNvSpPr/>
+          <p:nvPr/>
+        </p:nvSpPr>
+        <p:spPr>
+          <a:xfrm>
+            <a:off x="8886549" y="995710"/>
+            <a:ext cx="294022" cy="294022"/>
+          </a:xfrm>
+          <a:prstGeom prst="rect">
+            <a:avLst/>
+          </a:prstGeom>
+          <a:noFill/>
+        </p:spPr>
+        <p:style>
+          <a:lnRef idx="2">
+            <a:schemeClr val="accent1">
+              <a:shade val="50000"/>
+            </a:schemeClr>
+          </a:lnRef>
+          <a:fillRef idx="1">
+            <a:schemeClr val="accent1"/>
+          </a:fillRef>
+          <a:effectRef idx="0">
+            <a:schemeClr val="accent1"/>
+          </a:effectRef>
+          <a:fontRef idx="minor">
+            <a:schemeClr val="lt1"/>
+          </a:fontRef>
+        </p:style>
+        <p:txBody>
+          <a:bodyPr rtlCol="0" anchor="ctr"/>
+          <a:lstStyle/>
+          <a:p>
+            <a:pPr algn="ctr"/>
+            <a:endParaRPr lang="en-US"/>
+          </a:p>
+        </p:txBody>
+      </p:sp>
+      <p:sp>
+        <p:nvSpPr>
+          <p:cNvPr id="20" name="Rectangle 19">
+            <a:extLst>
+              <a:ext uri="{FF2B5EF4-FFF2-40B4-BE49-F238E27FC236}">
+                <a16:creationId xmlns:a16="http://schemas.microsoft.com/office/drawing/2014/main" id="{86327AAD-75C3-AF41-A073-392994A7407A}"/>
+              </a:ext>
+            </a:extLst>
+          </p:cNvPr>
+          <p:cNvSpPr/>
+          <p:nvPr/>
+        </p:nvSpPr>
+        <p:spPr>
+          <a:xfrm>
+            <a:off x="8886549" y="1346097"/>
+            <a:ext cx="294022" cy="294022"/>
+          </a:xfrm>
+          <a:prstGeom prst="rect">
+            <a:avLst/>
+          </a:prstGeom>
+        </p:spPr>
+        <p:style>
+          <a:lnRef idx="2">
+            <a:schemeClr val="accent1">
+              <a:shade val="50000"/>
+            </a:schemeClr>
+          </a:lnRef>
+          <a:fillRef idx="1">
+            <a:schemeClr val="accent1"/>
+          </a:fillRef>
+          <a:effectRef idx="0">
+            <a:schemeClr val="accent1"/>
+          </a:effectRef>
+          <a:fontRef idx="minor">
+            <a:schemeClr val="lt1"/>
+          </a:fontRef>
+        </p:style>
+        <p:txBody>
+          <a:bodyPr rtlCol="0" anchor="ctr"/>
+          <a:lstStyle/>
+          <a:p>
+            <a:pPr algn="ctr"/>
+            <a:endParaRPr lang="en-US"/>
+          </a:p>
+        </p:txBody>
+      </p:sp>
+      <p:sp>
+        <p:nvSpPr>
+          <p:cNvPr id="22" name="TextBox 21">
+            <a:extLst>
+              <a:ext uri="{FF2B5EF4-FFF2-40B4-BE49-F238E27FC236}">
+                <a16:creationId xmlns:a16="http://schemas.microsoft.com/office/drawing/2014/main" id="{C3FED549-A95F-0E4A-BD2E-3D7ECFC1A8A7}"/>
+              </a:ext>
+            </a:extLst>
+          </p:cNvPr>
+          <p:cNvSpPr txBox="1"/>
+          <p:nvPr/>
+        </p:nvSpPr>
+        <p:spPr>
+          <a:xfrm>
+            <a:off x="6253196" y="2274838"/>
+            <a:ext cx="5488229" cy="1323439"/>
+          </a:xfrm>
+          <a:prstGeom prst="rect">
+            <a:avLst/>
+          </a:prstGeom>
+          <a:noFill/>
+        </p:spPr>
+        <p:txBody>
+          <a:bodyPr wrap="square" rtlCol="0">
+            <a:spAutoFit/>
+          </a:bodyPr>
+          <a:lstStyle/>
+          <a:p>
+            <a:r>
+              <a:rPr lang="en-US" sz="1600" dirty="0"/>
+              <a:t>Accuracy may be also a bad criteria for highly imbalanced sets. Suppose we have the same example with 10 planes and 1000 noise spikes. Suppose our classifier is completely "blind". </a:t>
+            </a:r>
+            <a:r>
+              <a:rPr lang="en-US" sz="1600" b="1" dirty="0">
+                <a:solidFill>
+                  <a:srgbClr val="00B050"/>
+                </a:solidFill>
+              </a:rPr>
+              <a:t>It simply labels everything as noise.</a:t>
+            </a:r>
+            <a:r>
+              <a:rPr lang="en-US" sz="1600" dirty="0"/>
+              <a:t> Then its confusion matrix will look like this:</a:t>
+            </a:r>
+          </a:p>
+        </p:txBody>
+      </p:sp>
+      <p:pic>
+        <p:nvPicPr>
+          <p:cNvPr id="23" name="Picture 22">
+            <a:extLst>
+              <a:ext uri="{FF2B5EF4-FFF2-40B4-BE49-F238E27FC236}">
+                <a16:creationId xmlns:a16="http://schemas.microsoft.com/office/drawing/2014/main" id="{B609A130-2F49-8B45-AA36-2B72486F7769}"/>
+              </a:ext>
+            </a:extLst>
+          </p:cNvPr>
+          <p:cNvPicPr>
+            <a:picLocks noChangeAspect="1"/>
+          </p:cNvPicPr>
+          <p:nvPr/>
+        </p:nvPicPr>
+        <p:blipFill>
+          <a:blip r:embed="rId2" cstate="email">
+            <a:extLst>
+              <a:ext uri="{28A0092B-C50C-407E-A947-70E740481C1C}">
+                <a14:useLocalDpi xmlns:a14="http://schemas.microsoft.com/office/drawing/2010/main"/>
+              </a:ext>
+            </a:extLst>
+          </a:blip>
+          <a:stretch>
+            <a:fillRect/>
+          </a:stretch>
+        </p:blipFill>
+        <p:spPr>
+          <a:xfrm>
+            <a:off x="4720120" y="290407"/>
+            <a:ext cx="2035425" cy="1765670"/>
+          </a:xfrm>
+          <a:prstGeom prst="rect">
+            <a:avLst/>
+          </a:prstGeom>
+        </p:spPr>
+      </p:pic>
+      <p:sp>
+        <p:nvSpPr>
+          <p:cNvPr id="24" name="Rectangle 23">
+            <a:extLst>
+              <a:ext uri="{FF2B5EF4-FFF2-40B4-BE49-F238E27FC236}">
+                <a16:creationId xmlns:a16="http://schemas.microsoft.com/office/drawing/2014/main" id="{76F98B58-DE40-F041-9FC9-344C25D936CE}"/>
+              </a:ext>
+            </a:extLst>
+          </p:cNvPr>
+          <p:cNvSpPr/>
+          <p:nvPr/>
+        </p:nvSpPr>
+        <p:spPr>
+          <a:xfrm>
+            <a:off x="8098044" y="3570817"/>
+            <a:ext cx="294022" cy="294022"/>
+          </a:xfrm>
+          <a:prstGeom prst="rect">
+            <a:avLst/>
+          </a:prstGeom>
+          <a:solidFill>
+            <a:schemeClr val="accent1">
+              <a:alpha val="35738"/>
+            </a:schemeClr>
+          </a:solidFill>
+        </p:spPr>
+        <p:style>
+          <a:lnRef idx="2">
+            <a:schemeClr val="accent1">
+              <a:shade val="50000"/>
+            </a:schemeClr>
+          </a:lnRef>
+          <a:fillRef idx="1">
+            <a:schemeClr val="accent1"/>
+          </a:fillRef>
+          <a:effectRef idx="0">
+            <a:schemeClr val="accent1"/>
+          </a:effectRef>
+          <a:fontRef idx="minor">
+            <a:schemeClr val="lt1"/>
+          </a:fontRef>
+        </p:style>
+        <p:txBody>
+          <a:bodyPr rtlCol="0" anchor="ctr"/>
+          <a:lstStyle/>
+          <a:p>
+            <a:pPr algn="ctr"/>
+            <a:endParaRPr lang="en-US"/>
+          </a:p>
+        </p:txBody>
+      </p:sp>
+      <p:sp>
+        <p:nvSpPr>
+          <p:cNvPr id="25" name="Rectangle 24">
+            <a:extLst>
+              <a:ext uri="{FF2B5EF4-FFF2-40B4-BE49-F238E27FC236}">
+                <a16:creationId xmlns:a16="http://schemas.microsoft.com/office/drawing/2014/main" id="{1A8D357E-6860-784C-8BA3-D50217536479}"/>
+              </a:ext>
+            </a:extLst>
+          </p:cNvPr>
+          <p:cNvSpPr/>
+          <p:nvPr/>
+        </p:nvSpPr>
+        <p:spPr>
+          <a:xfrm>
+            <a:off x="7750947" y="3901039"/>
+            <a:ext cx="294022" cy="294022"/>
+          </a:xfrm>
+          <a:prstGeom prst="rect">
+            <a:avLst/>
+          </a:prstGeom>
+          <a:noFill/>
+        </p:spPr>
+        <p:style>
+          <a:lnRef idx="2">
+            <a:schemeClr val="accent1">
+              <a:shade val="50000"/>
+            </a:schemeClr>
+          </a:lnRef>
+          <a:fillRef idx="1">
+            <a:schemeClr val="accent1"/>
+          </a:fillRef>
+          <a:effectRef idx="0">
+            <a:schemeClr val="accent1"/>
+          </a:effectRef>
+          <a:fontRef idx="minor">
+            <a:schemeClr val="lt1"/>
+          </a:fontRef>
+        </p:style>
+        <p:txBody>
+          <a:bodyPr rtlCol="0" anchor="ctr"/>
+          <a:lstStyle/>
+          <a:p>
+            <a:pPr algn="ctr"/>
+            <a:endParaRPr lang="en-US"/>
+          </a:p>
+        </p:txBody>
+      </p:sp>
+      <p:sp>
+        <p:nvSpPr>
+          <p:cNvPr id="26" name="Rectangle 25">
+            <a:extLst>
+              <a:ext uri="{FF2B5EF4-FFF2-40B4-BE49-F238E27FC236}">
+                <a16:creationId xmlns:a16="http://schemas.microsoft.com/office/drawing/2014/main" id="{8C3F82B3-99D9-EF4C-8245-D8EE3EE73E6D}"/>
+              </a:ext>
+            </a:extLst>
+          </p:cNvPr>
+          <p:cNvSpPr/>
+          <p:nvPr/>
+        </p:nvSpPr>
+        <p:spPr>
+          <a:xfrm>
+            <a:off x="7756518" y="3570817"/>
+            <a:ext cx="294022" cy="294022"/>
+          </a:xfrm>
+          <a:prstGeom prst="rect">
+            <a:avLst/>
+          </a:prstGeom>
+          <a:noFill/>
+        </p:spPr>
+        <p:style>
+          <a:lnRef idx="2">
+            <a:schemeClr val="accent1">
+              <a:shade val="50000"/>
+            </a:schemeClr>
+          </a:lnRef>
+          <a:fillRef idx="1">
+            <a:schemeClr val="accent1"/>
+          </a:fillRef>
+          <a:effectRef idx="0">
+            <a:schemeClr val="accent1"/>
+          </a:effectRef>
+          <a:fontRef idx="minor">
+            <a:schemeClr val="lt1"/>
+          </a:fontRef>
+        </p:style>
+        <p:txBody>
+          <a:bodyPr rtlCol="0" anchor="ctr"/>
+          <a:lstStyle/>
+          <a:p>
+            <a:pPr algn="ctr"/>
+            <a:endParaRPr lang="en-US"/>
+          </a:p>
+        </p:txBody>
+      </p:sp>
+      <p:sp>
+        <p:nvSpPr>
+          <p:cNvPr id="27" name="Rectangle 26">
+            <a:extLst>
+              <a:ext uri="{FF2B5EF4-FFF2-40B4-BE49-F238E27FC236}">
+                <a16:creationId xmlns:a16="http://schemas.microsoft.com/office/drawing/2014/main" id="{4D5F9C4E-2770-F24C-81F9-1232BD453D1D}"/>
+              </a:ext>
+            </a:extLst>
+          </p:cNvPr>
+          <p:cNvSpPr/>
+          <p:nvPr/>
+        </p:nvSpPr>
+        <p:spPr>
+          <a:xfrm>
+            <a:off x="8098044" y="3904023"/>
+            <a:ext cx="294022" cy="294022"/>
+          </a:xfrm>
+          <a:prstGeom prst="rect">
+            <a:avLst/>
+          </a:prstGeom>
+          <a:solidFill>
+            <a:schemeClr val="accent1">
+              <a:alpha val="35738"/>
+            </a:schemeClr>
+          </a:solidFill>
+        </p:spPr>
+        <p:style>
+          <a:lnRef idx="2">
+            <a:schemeClr val="accent1">
+              <a:shade val="50000"/>
+            </a:schemeClr>
+          </a:lnRef>
+          <a:fillRef idx="1">
+            <a:schemeClr val="accent1"/>
+          </a:fillRef>
+          <a:effectRef idx="0">
+            <a:schemeClr val="accent1"/>
+          </a:effectRef>
+          <a:fontRef idx="minor">
+            <a:schemeClr val="lt1"/>
+          </a:fontRef>
+        </p:style>
+        <p:txBody>
+          <a:bodyPr rtlCol="0" anchor="ctr"/>
+          <a:lstStyle/>
+          <a:p>
+            <a:pPr algn="ctr"/>
+            <a:endParaRPr lang="en-US"/>
+          </a:p>
+        </p:txBody>
+      </p:sp>
+      <p:sp>
+        <p:nvSpPr>
+          <p:cNvPr id="10" name="TextBox 9">
+            <a:extLst>
+              <a:ext uri="{FF2B5EF4-FFF2-40B4-BE49-F238E27FC236}">
+                <a16:creationId xmlns:a16="http://schemas.microsoft.com/office/drawing/2014/main" id="{AC854BA0-A777-ED4A-A940-B9DFABFB9F97}"/>
+              </a:ext>
+            </a:extLst>
+          </p:cNvPr>
+          <p:cNvSpPr txBox="1"/>
+          <p:nvPr/>
+        </p:nvSpPr>
+        <p:spPr>
+          <a:xfrm>
+            <a:off x="7779205" y="3587840"/>
+            <a:ext cx="237505" cy="246221"/>
+          </a:xfrm>
+          <a:prstGeom prst="rect">
+            <a:avLst/>
+          </a:prstGeom>
+          <a:noFill/>
+        </p:spPr>
+        <p:txBody>
+          <a:bodyPr wrap="square" rtlCol="0">
+            <a:spAutoFit/>
+          </a:bodyPr>
+          <a:lstStyle/>
+          <a:p>
+            <a:r>
+              <a:rPr lang="en-US" sz="1000" dirty="0"/>
+              <a:t>0</a:t>
+            </a:r>
+          </a:p>
+        </p:txBody>
+      </p:sp>
+      <p:sp>
+        <p:nvSpPr>
+          <p:cNvPr id="29" name="TextBox 28">
+            <a:extLst>
+              <a:ext uri="{FF2B5EF4-FFF2-40B4-BE49-F238E27FC236}">
+                <a16:creationId xmlns:a16="http://schemas.microsoft.com/office/drawing/2014/main" id="{D96E1B76-58F1-8648-A31C-E703381D03AA}"/>
+              </a:ext>
+            </a:extLst>
+          </p:cNvPr>
+          <p:cNvSpPr txBox="1"/>
+          <p:nvPr/>
+        </p:nvSpPr>
+        <p:spPr>
+          <a:xfrm>
+            <a:off x="7779204" y="3909550"/>
+            <a:ext cx="237505" cy="246221"/>
+          </a:xfrm>
+          <a:prstGeom prst="rect">
+            <a:avLst/>
+          </a:prstGeom>
+          <a:noFill/>
+        </p:spPr>
+        <p:txBody>
+          <a:bodyPr wrap="square" rtlCol="0">
+            <a:spAutoFit/>
+          </a:bodyPr>
+          <a:lstStyle/>
+          <a:p>
+            <a:r>
+              <a:rPr lang="en-US" sz="1000" dirty="0"/>
+              <a:t>0</a:t>
+            </a:r>
+          </a:p>
+        </p:txBody>
+      </p:sp>
+      <p:sp>
+        <p:nvSpPr>
+          <p:cNvPr id="30" name="TextBox 29">
+            <a:extLst>
+              <a:ext uri="{FF2B5EF4-FFF2-40B4-BE49-F238E27FC236}">
+                <a16:creationId xmlns:a16="http://schemas.microsoft.com/office/drawing/2014/main" id="{2246EFFF-CE7C-1A4B-8968-71EB67659DAB}"/>
+              </a:ext>
+            </a:extLst>
+          </p:cNvPr>
+          <p:cNvSpPr txBox="1"/>
+          <p:nvPr/>
+        </p:nvSpPr>
+        <p:spPr>
+          <a:xfrm>
+            <a:off x="8068353" y="3587839"/>
+            <a:ext cx="357187" cy="246221"/>
+          </a:xfrm>
+          <a:prstGeom prst="rect">
+            <a:avLst/>
+          </a:prstGeom>
+          <a:noFill/>
+        </p:spPr>
+        <p:txBody>
+          <a:bodyPr wrap="square" rtlCol="0">
+            <a:spAutoFit/>
+          </a:bodyPr>
+          <a:lstStyle/>
+          <a:p>
+            <a:r>
+              <a:rPr lang="en-US" sz="1000" dirty="0"/>
+              <a:t>10</a:t>
+            </a:r>
+          </a:p>
+        </p:txBody>
+      </p:sp>
+      <p:sp>
+        <p:nvSpPr>
+          <p:cNvPr id="31" name="TextBox 30">
+            <a:extLst>
+              <a:ext uri="{FF2B5EF4-FFF2-40B4-BE49-F238E27FC236}">
+                <a16:creationId xmlns:a16="http://schemas.microsoft.com/office/drawing/2014/main" id="{15CECA13-7ECF-0A45-B15E-D7FEE870A463}"/>
+              </a:ext>
+            </a:extLst>
+          </p:cNvPr>
+          <p:cNvSpPr txBox="1"/>
+          <p:nvPr/>
+        </p:nvSpPr>
+        <p:spPr>
+          <a:xfrm>
+            <a:off x="8023170" y="3910386"/>
+            <a:ext cx="580501" cy="246221"/>
+          </a:xfrm>
+          <a:prstGeom prst="rect">
+            <a:avLst/>
+          </a:prstGeom>
+          <a:noFill/>
+        </p:spPr>
+        <p:txBody>
+          <a:bodyPr wrap="square" rtlCol="0">
+            <a:spAutoFit/>
+          </a:bodyPr>
+          <a:lstStyle/>
+          <a:p>
+            <a:r>
+              <a:rPr lang="en-US" sz="1000" dirty="0"/>
+              <a:t>1000</a:t>
+            </a:r>
+          </a:p>
+        </p:txBody>
+      </p:sp>
+      <p:sp>
+        <p:nvSpPr>
+          <p:cNvPr id="32" name="TextBox 31">
+            <a:extLst>
+              <a:ext uri="{FF2B5EF4-FFF2-40B4-BE49-F238E27FC236}">
+                <a16:creationId xmlns:a16="http://schemas.microsoft.com/office/drawing/2014/main" id="{EB4033BC-B01A-B840-963C-926409FDBD8F}"/>
+              </a:ext>
+            </a:extLst>
+          </p:cNvPr>
+          <p:cNvSpPr txBox="1"/>
+          <p:nvPr/>
+        </p:nvSpPr>
+        <p:spPr>
+          <a:xfrm>
+            <a:off x="6289445" y="4362005"/>
+            <a:ext cx="5668875" cy="830997"/>
+          </a:xfrm>
+          <a:prstGeom prst="rect">
+            <a:avLst/>
+          </a:prstGeom>
+          <a:noFill/>
+        </p:spPr>
+        <p:txBody>
+          <a:bodyPr wrap="square" rtlCol="0">
+            <a:spAutoFit/>
+          </a:bodyPr>
+          <a:lstStyle/>
+          <a:p>
+            <a:r>
+              <a:rPr lang="en-US" sz="1600" dirty="0"/>
+              <a:t>Accuracy = 1000/1010 = 0.99 – almost perfect.</a:t>
+            </a:r>
+          </a:p>
+          <a:p>
+            <a:endParaRPr lang="en-US" sz="1600" dirty="0"/>
+          </a:p>
+          <a:p>
+            <a:r>
+              <a:rPr lang="en-US" sz="1600" dirty="0"/>
+              <a:t>So we have good accuracy while </a:t>
+            </a:r>
+            <a:r>
+              <a:rPr lang="en-US" sz="1600" b="1" dirty="0">
+                <a:solidFill>
+                  <a:srgbClr val="00B050"/>
+                </a:solidFill>
+              </a:rPr>
+              <a:t>the classifier is completely blind!</a:t>
+            </a:r>
+          </a:p>
+        </p:txBody>
+      </p:sp>
+      <p:sp>
+        <p:nvSpPr>
+          <p:cNvPr id="21" name="TextBox 20">
+            <a:extLst>
+              <a:ext uri="{FF2B5EF4-FFF2-40B4-BE49-F238E27FC236}">
+                <a16:creationId xmlns:a16="http://schemas.microsoft.com/office/drawing/2014/main" id="{92A59542-D8D5-F546-9C13-0E924EC68BB5}"/>
+              </a:ext>
+            </a:extLst>
+          </p:cNvPr>
+          <p:cNvSpPr txBox="1"/>
+          <p:nvPr/>
+        </p:nvSpPr>
+        <p:spPr>
+          <a:xfrm>
+            <a:off x="82613" y="5460741"/>
+            <a:ext cx="5355339" cy="1200329"/>
+          </a:xfrm>
+          <a:prstGeom prst="rect">
+            <a:avLst/>
+          </a:prstGeom>
+          <a:noFill/>
+        </p:spPr>
+        <p:txBody>
+          <a:bodyPr wrap="square" rtlCol="0">
+            <a:spAutoFit/>
+          </a:bodyPr>
+          <a:lstStyle/>
+          <a:p>
+            <a:r>
+              <a:rPr lang="en-US" sz="1400" dirty="0">
+                <a:solidFill>
+                  <a:srgbClr val="00B050"/>
+                </a:solidFill>
+                <a:cs typeface="Calibri" panose="020F0502020204030204" pitchFamily="34" charset="0"/>
+              </a:rPr>
+              <a:t>Note: AUC is NOT a function of threshold. It is an evaluation of the classifier as threshold varies over all possible values. It is a metric of the quality of the internal value that the classifier generates and then compares to a threshold. It is not testing the quality of a particular choice of threshold.</a:t>
+            </a:r>
+          </a:p>
+        </p:txBody>
+      </p:sp>
+      <p:pic>
+        <p:nvPicPr>
+          <p:cNvPr id="1030" name="Picture 6" descr="Understanding AUC - ROC Curve | by Sarang Narkhede | Towards Data Science">
+            <a:extLst>
+              <a:ext uri="{FF2B5EF4-FFF2-40B4-BE49-F238E27FC236}">
+                <a16:creationId xmlns:a16="http://schemas.microsoft.com/office/drawing/2014/main" id="{C50FA22F-AE59-834B-B3C2-8BD6CCE2B2BF}"/>
+              </a:ext>
+            </a:extLst>
+          </p:cNvPr>
+          <p:cNvPicPr>
+            <a:picLocks noChangeAspect="1" noChangeArrowheads="1"/>
+          </p:cNvPicPr>
+          <p:nvPr/>
+        </p:nvPicPr>
+        <p:blipFill>
+          <a:blip r:embed="rId3" cstate="email">
+            <a:extLst>
+              <a:ext uri="{28A0092B-C50C-407E-A947-70E740481C1C}">
+                <a14:useLocalDpi xmlns:a14="http://schemas.microsoft.com/office/drawing/2010/main"/>
+              </a:ext>
+            </a:extLst>
+          </a:blip>
+          <a:srcRect/>
+          <a:stretch>
+            <a:fillRect/>
+          </a:stretch>
+        </p:blipFill>
+        <p:spPr bwMode="auto">
+          <a:xfrm>
+            <a:off x="810898" y="745027"/>
+            <a:ext cx="1949384" cy="1781985"/>
+          </a:xfrm>
+          <a:prstGeom prst="rect">
+            <a:avLst/>
+          </a:prstGeom>
+          <a:noFill/>
+          <a:extLst>
+            <a:ext uri="{909E8E84-426E-40DD-AFC4-6F175D3DCCD1}">
+              <a14:hiddenFill xmlns:a14="http://schemas.microsoft.com/office/drawing/2010/main">
+                <a:solidFill>
+                  <a:srgbClr val="FFFFFF"/>
+                </a:solidFill>
+              </a14:hiddenFill>
+            </a:ext>
+          </a:extLst>
+        </p:spPr>
+      </p:pic>
+    </p:spTree>
+    <p:extLst>
+      <p:ext uri="{BB962C8B-B14F-4D97-AF65-F5344CB8AC3E}">
+        <p14:creationId xmlns:p14="http://schemas.microsoft.com/office/powerpoint/2010/main" val="2545802946"/>
       </p:ext>
     </p:extLst>
   </p:cSld>
@@ -9139,7 +11131,7 @@
   <p:cSld>
     <p:spTree>
       <p:nvGrpSpPr>
-        <p:cNvPr id="1" name="Shape 87"/>
+        <p:cNvPr id="1" name=""/>
         <p:cNvGrpSpPr/>
         <p:nvPr/>
       </p:nvGrpSpPr>
@@ -9153,80 +11145,51 @@
       </p:grpSpPr>
       <p:sp>
         <p:nvSpPr>
-          <p:cNvPr id="88" name="Google Shape;88;p13"/>
+          <p:cNvPr id="5" name="TextBox 4">
+            <a:extLst>
+              <a:ext uri="{FF2B5EF4-FFF2-40B4-BE49-F238E27FC236}">
+                <a16:creationId xmlns:a16="http://schemas.microsoft.com/office/drawing/2014/main" id="{D2C938DA-C2D4-E942-B671-13A55030B276}"/>
+              </a:ext>
+            </a:extLst>
+          </p:cNvPr>
           <p:cNvSpPr txBox="1"/>
           <p:nvPr/>
         </p:nvSpPr>
         <p:spPr>
           <a:xfrm>
-            <a:off x="249168" y="238705"/>
-            <a:ext cx="4564879" cy="595013"/>
+            <a:off x="101600" y="91440"/>
+            <a:ext cx="5496560" cy="830997"/>
           </a:xfrm>
           <a:prstGeom prst="rect">
             <a:avLst/>
           </a:prstGeom>
           <a:noFill/>
-          <a:ln>
-            <a:noFill/>
-          </a:ln>
-        </p:spPr>
-        <p:txBody>
-          <a:bodyPr spcFirstLastPara="1" wrap="square" lIns="91425" tIns="45700" rIns="91425" bIns="45700" anchor="t" anchorCtr="0">
-            <a:noAutofit/>
+        </p:spPr>
+        <p:txBody>
+          <a:bodyPr wrap="square" rtlCol="0">
+            <a:spAutoFit/>
           </a:bodyPr>
           <a:lstStyle/>
           <a:p>
-            <a:pPr marL="0" marR="0" lvl="0" indent="0" algn="l" rtl="0">
-              <a:spcBef>
-                <a:spcPts val="0"/>
-              </a:spcBef>
-              <a:spcAft>
-                <a:spcPts val="0"/>
-              </a:spcAft>
-              <a:buNone/>
-            </a:pPr>
-            <a:r>
-              <a:rPr lang="en-US" sz="3200" b="1" i="0" u="none" strike="noStrike" cap="none" dirty="0">
-                <a:solidFill>
-                  <a:schemeClr val="dk1"/>
-                </a:solidFill>
-                <a:latin typeface="Calibri"/>
-                <a:ea typeface="Calibri"/>
-                <a:cs typeface="Calibri"/>
-                <a:sym typeface="Calibri"/>
-              </a:rPr>
-              <a:t>Confusion Matrix</a:t>
-            </a:r>
-            <a:endParaRPr dirty="0"/>
-          </a:p>
-          <a:p>
-            <a:pPr marL="0" marR="0" lvl="0" indent="0" algn="l" rtl="0">
-              <a:spcBef>
-                <a:spcPts val="0"/>
-              </a:spcBef>
-              <a:spcAft>
-                <a:spcPts val="0"/>
-              </a:spcAft>
-              <a:buNone/>
-            </a:pPr>
-            <a:endParaRPr sz="1800" dirty="0">
-              <a:solidFill>
-                <a:schemeClr val="dk1"/>
-              </a:solidFill>
-              <a:latin typeface="Calibri"/>
-              <a:ea typeface="Calibri"/>
-              <a:cs typeface="Calibri"/>
-              <a:sym typeface="Calibri"/>
-            </a:endParaRPr>
+            <a:r>
+              <a:rPr lang="en-US" sz="2400" b="1" dirty="0"/>
+              <a:t>ROC AUC is terrible for imbalanced data.</a:t>
+            </a:r>
+          </a:p>
+          <a:p>
+            <a:r>
+              <a:rPr lang="en-US" sz="2400" b="1" dirty="0"/>
+              <a:t>Precision-Recall is much better.</a:t>
+            </a:r>
           </a:p>
         </p:txBody>
       </p:sp>
       <p:pic>
         <p:nvPicPr>
-          <p:cNvPr id="3" name="Picture 2">
-            <a:extLst>
-              <a:ext uri="{FF2B5EF4-FFF2-40B4-BE49-F238E27FC236}">
-                <a16:creationId xmlns:a16="http://schemas.microsoft.com/office/drawing/2014/main" id="{4D8283FA-2D57-6143-BD4D-5E14DD32FD69}"/>
+          <p:cNvPr id="7" name="Picture 6">
+            <a:extLst>
+              <a:ext uri="{FF2B5EF4-FFF2-40B4-BE49-F238E27FC236}">
+                <a16:creationId xmlns:a16="http://schemas.microsoft.com/office/drawing/2014/main" id="{59FDEBD1-78FA-5B45-8C6E-256EB90951FE}"/>
               </a:ext>
             </a:extLst>
           </p:cNvPr>
@@ -9236,37 +11199,7 @@
           <p:nvPr/>
         </p:nvPicPr>
         <p:blipFill>
-          <a:blip r:embed="rId3"/>
-          <a:stretch>
-            <a:fillRect/>
-          </a:stretch>
-        </p:blipFill>
-        <p:spPr>
-          <a:xfrm>
-            <a:off x="8727140" y="0"/>
-            <a:ext cx="3248213" cy="2817727"/>
-          </a:xfrm>
-          <a:prstGeom prst="rect">
-            <a:avLst/>
-          </a:prstGeom>
-        </p:spPr>
-      </p:pic>
-      <p:pic>
-        <p:nvPicPr>
-          <p:cNvPr id="5" name="Picture 4">
-            <a:extLst>
-              <a:ext uri="{FF2B5EF4-FFF2-40B4-BE49-F238E27FC236}">
-                <a16:creationId xmlns:a16="http://schemas.microsoft.com/office/drawing/2014/main" id="{FB4BAF2C-0C1A-F448-A098-8A465864D8DA}"/>
-              </a:ext>
-            </a:extLst>
-          </p:cNvPr>
-          <p:cNvPicPr>
-            <a:picLocks noChangeAspect="1"/>
-          </p:cNvPicPr>
-          <p:nvPr/>
-        </p:nvPicPr>
-        <p:blipFill>
-          <a:blip r:embed="rId4" cstate="email">
+          <a:blip r:embed="rId2" cstate="email">
             <a:extLst>
               <a:ext uri="{28A0092B-C50C-407E-A947-70E740481C1C}">
                 <a14:useLocalDpi xmlns:a14="http://schemas.microsoft.com/office/drawing/2010/main"/>
@@ -9279,8 +11212,8 @@
         </p:blipFill>
         <p:spPr>
           <a:xfrm>
-            <a:off x="6705600" y="3012140"/>
-            <a:ext cx="5486400" cy="3657600"/>
+            <a:off x="4837924" y="579120"/>
+            <a:ext cx="7252476" cy="5638800"/>
           </a:xfrm>
           <a:prstGeom prst="rect">
             <a:avLst/>
@@ -9289,10 +11222,10 @@
       </p:pic>
       <p:sp>
         <p:nvSpPr>
-          <p:cNvPr id="6" name="TextBox 5">
-            <a:extLst>
-              <a:ext uri="{FF2B5EF4-FFF2-40B4-BE49-F238E27FC236}">
-                <a16:creationId xmlns:a16="http://schemas.microsoft.com/office/drawing/2014/main" id="{0776A3DB-E3D6-044A-B6B6-0333CC961AFA}"/>
+          <p:cNvPr id="8" name="TextBox 7">
+            <a:extLst>
+              <a:ext uri="{FF2B5EF4-FFF2-40B4-BE49-F238E27FC236}">
+                <a16:creationId xmlns:a16="http://schemas.microsoft.com/office/drawing/2014/main" id="{7FEEFB28-182A-EE43-A6F7-37981AE81319}"/>
               </a:ext>
             </a:extLst>
           </p:cNvPr>
@@ -9301,8 +11234,8 @@
         </p:nvSpPr>
         <p:spPr>
           <a:xfrm>
-            <a:off x="789290" y="2242844"/>
-            <a:ext cx="5916310" cy="3108543"/>
+            <a:off x="101600" y="1168400"/>
+            <a:ext cx="4632960" cy="3293209"/>
           </a:xfrm>
           <a:prstGeom prst="rect">
             <a:avLst/>
@@ -9316,258 +11249,54 @@
           <a:lstStyle/>
           <a:p>
             <a:r>
-              <a:rPr lang="en-US" sz="1400" b="1" dirty="0">
-                <a:solidFill>
-                  <a:srgbClr val="00B0F0"/>
-                </a:solidFill>
-                <a:latin typeface="Consolas" panose="020B0609020204030204" pitchFamily="49" charset="0"/>
-                <a:cs typeface="Consolas" panose="020B0609020204030204" pitchFamily="49" charset="0"/>
-              </a:rPr>
-              <a:t>from </a:t>
-            </a:r>
-            <a:r>
-              <a:rPr lang="en-US" sz="1400" b="1" dirty="0" err="1">
-                <a:solidFill>
-                  <a:srgbClr val="00B0F0"/>
-                </a:solidFill>
-                <a:latin typeface="Consolas" panose="020B0609020204030204" pitchFamily="49" charset="0"/>
-                <a:cs typeface="Consolas" panose="020B0609020204030204" pitchFamily="49" charset="0"/>
-              </a:rPr>
-              <a:t>sklearn</a:t>
-            </a:r>
-            <a:r>
-              <a:rPr lang="en-US" sz="1400" b="1" dirty="0">
-                <a:solidFill>
-                  <a:srgbClr val="00B0F0"/>
-                </a:solidFill>
-                <a:latin typeface="Consolas" panose="020B0609020204030204" pitchFamily="49" charset="0"/>
-                <a:cs typeface="Consolas" panose="020B0609020204030204" pitchFamily="49" charset="0"/>
-              </a:rPr>
-              <a:t> import metrics</a:t>
-            </a:r>
-          </a:p>
-          <a:p>
-            <a:endParaRPr lang="en-US" sz="1400" b="1" dirty="0">
-              <a:solidFill>
-                <a:srgbClr val="00B0F0"/>
-              </a:solidFill>
-              <a:latin typeface="Consolas" panose="020B0609020204030204" pitchFamily="49" charset="0"/>
-              <a:cs typeface="Consolas" panose="020B0609020204030204" pitchFamily="49" charset="0"/>
-            </a:endParaRPr>
-          </a:p>
-          <a:p>
-            <a:r>
-              <a:rPr lang="en-US" sz="1400" b="1" dirty="0">
-                <a:solidFill>
-                  <a:srgbClr val="00B0F0"/>
-                </a:solidFill>
-                <a:latin typeface="Consolas" panose="020B0609020204030204" pitchFamily="49" charset="0"/>
-                <a:cs typeface="Consolas" panose="020B0609020204030204" pitchFamily="49" charset="0"/>
-              </a:rPr>
-              <a:t>expected = target</a:t>
-            </a:r>
-          </a:p>
-          <a:p>
-            <a:r>
-              <a:rPr lang="en-US" sz="1400" b="1" dirty="0">
-                <a:solidFill>
-                  <a:srgbClr val="00B0F0"/>
-                </a:solidFill>
-                <a:latin typeface="Consolas" panose="020B0609020204030204" pitchFamily="49" charset="0"/>
-                <a:cs typeface="Consolas" panose="020B0609020204030204" pitchFamily="49" charset="0"/>
-              </a:rPr>
-              <a:t>predicted = </a:t>
-            </a:r>
-            <a:r>
-              <a:rPr lang="en-US" sz="1400" b="1" dirty="0" err="1">
-                <a:solidFill>
-                  <a:srgbClr val="00B0F0"/>
-                </a:solidFill>
-                <a:latin typeface="Consolas" panose="020B0609020204030204" pitchFamily="49" charset="0"/>
-                <a:cs typeface="Consolas" panose="020B0609020204030204" pitchFamily="49" charset="0"/>
-              </a:rPr>
-              <a:t>model.predict</a:t>
-            </a:r>
-            <a:r>
-              <a:rPr lang="en-US" sz="1400" b="1" dirty="0">
-                <a:solidFill>
-                  <a:srgbClr val="00B0F0"/>
-                </a:solidFill>
-                <a:latin typeface="Consolas" panose="020B0609020204030204" pitchFamily="49" charset="0"/>
-                <a:cs typeface="Consolas" panose="020B0609020204030204" pitchFamily="49" charset="0"/>
-              </a:rPr>
-              <a:t>(data)</a:t>
-            </a:r>
-          </a:p>
-          <a:p>
-            <a:endParaRPr lang="en-US" sz="1400" b="1" dirty="0">
-              <a:solidFill>
-                <a:srgbClr val="00B0F0"/>
-              </a:solidFill>
-              <a:latin typeface="Consolas" panose="020B0609020204030204" pitchFamily="49" charset="0"/>
-              <a:cs typeface="Consolas" panose="020B0609020204030204" pitchFamily="49" charset="0"/>
-            </a:endParaRPr>
-          </a:p>
-          <a:p>
-            <a:r>
-              <a:rPr lang="en-US" sz="1400" b="1" dirty="0" err="1">
-                <a:solidFill>
-                  <a:srgbClr val="00B0F0"/>
-                </a:solidFill>
-                <a:latin typeface="Consolas" panose="020B0609020204030204" pitchFamily="49" charset="0"/>
-                <a:cs typeface="Consolas" panose="020B0609020204030204" pitchFamily="49" charset="0"/>
-              </a:rPr>
-              <a:t>metrics.precision_score</a:t>
-            </a:r>
-            <a:r>
-              <a:rPr lang="en-US" sz="1400" b="1" dirty="0">
-                <a:solidFill>
-                  <a:srgbClr val="00B0F0"/>
-                </a:solidFill>
-                <a:latin typeface="Consolas" panose="020B0609020204030204" pitchFamily="49" charset="0"/>
-                <a:cs typeface="Consolas" panose="020B0609020204030204" pitchFamily="49" charset="0"/>
-              </a:rPr>
-              <a:t>(expected, predicted)</a:t>
-            </a:r>
-          </a:p>
-          <a:p>
-            <a:r>
-              <a:rPr lang="en-US" sz="1400" b="1" dirty="0" err="1">
-                <a:solidFill>
-                  <a:srgbClr val="00B0F0"/>
-                </a:solidFill>
-                <a:latin typeface="Consolas" panose="020B0609020204030204" pitchFamily="49" charset="0"/>
-                <a:cs typeface="Consolas" panose="020B0609020204030204" pitchFamily="49" charset="0"/>
-              </a:rPr>
-              <a:t>metrics.recall_score</a:t>
-            </a:r>
-            <a:r>
-              <a:rPr lang="en-US" sz="1400" b="1" dirty="0">
-                <a:solidFill>
-                  <a:srgbClr val="00B0F0"/>
-                </a:solidFill>
-                <a:latin typeface="Consolas" panose="020B0609020204030204" pitchFamily="49" charset="0"/>
-                <a:cs typeface="Consolas" panose="020B0609020204030204" pitchFamily="49" charset="0"/>
-              </a:rPr>
-              <a:t>(expected, predicted)</a:t>
-            </a:r>
-          </a:p>
-          <a:p>
-            <a:r>
-              <a:rPr lang="en-US" sz="1400" b="1" dirty="0" err="1">
-                <a:solidFill>
-                  <a:srgbClr val="00B0F0"/>
-                </a:solidFill>
-                <a:latin typeface="Consolas" panose="020B0609020204030204" pitchFamily="49" charset="0"/>
-                <a:cs typeface="Consolas" panose="020B0609020204030204" pitchFamily="49" charset="0"/>
-              </a:rPr>
-              <a:t>metrics.roc_curve</a:t>
-            </a:r>
-            <a:r>
-              <a:rPr lang="en-US" sz="1400" b="1" dirty="0">
-                <a:solidFill>
-                  <a:srgbClr val="00B0F0"/>
-                </a:solidFill>
-                <a:latin typeface="Consolas" panose="020B0609020204030204" pitchFamily="49" charset="0"/>
-                <a:cs typeface="Consolas" panose="020B0609020204030204" pitchFamily="49" charset="0"/>
-              </a:rPr>
-              <a:t>(expected, predicted)</a:t>
-            </a:r>
-          </a:p>
-          <a:p>
-            <a:r>
-              <a:rPr lang="en-US" sz="1400" b="1" dirty="0" err="1">
-                <a:solidFill>
-                  <a:srgbClr val="00B0F0"/>
-                </a:solidFill>
-                <a:latin typeface="Consolas" panose="020B0609020204030204" pitchFamily="49" charset="0"/>
-                <a:cs typeface="Consolas" panose="020B0609020204030204" pitchFamily="49" charset="0"/>
-              </a:rPr>
-              <a:t>metrics.roc_auc_score</a:t>
-            </a:r>
-            <a:r>
-              <a:rPr lang="en-US" sz="1400" b="1" dirty="0">
-                <a:solidFill>
-                  <a:srgbClr val="00B0F0"/>
-                </a:solidFill>
-                <a:latin typeface="Consolas" panose="020B0609020204030204" pitchFamily="49" charset="0"/>
-                <a:cs typeface="Consolas" panose="020B0609020204030204" pitchFamily="49" charset="0"/>
-              </a:rPr>
-              <a:t>(expected, predicted)</a:t>
-            </a:r>
-          </a:p>
-          <a:p>
-            <a:endParaRPr lang="en-US" sz="1400" b="1" dirty="0">
-              <a:solidFill>
-                <a:srgbClr val="00B0F0"/>
-              </a:solidFill>
-              <a:latin typeface="Consolas" panose="020B0609020204030204" pitchFamily="49" charset="0"/>
-              <a:cs typeface="Consolas" panose="020B0609020204030204" pitchFamily="49" charset="0"/>
-            </a:endParaRPr>
-          </a:p>
-          <a:p>
-            <a:r>
-              <a:rPr lang="en-US" sz="1400" b="1" dirty="0" err="1">
-                <a:solidFill>
-                  <a:srgbClr val="00B0F0"/>
-                </a:solidFill>
-                <a:latin typeface="Consolas" panose="020B0609020204030204" pitchFamily="49" charset="0"/>
-                <a:cs typeface="Consolas" panose="020B0609020204030204" pitchFamily="49" charset="0"/>
-              </a:rPr>
-              <a:t>metrics.confusion_matrix</a:t>
-            </a:r>
-            <a:r>
-              <a:rPr lang="en-US" sz="1400" b="1" dirty="0">
-                <a:solidFill>
-                  <a:srgbClr val="00B0F0"/>
-                </a:solidFill>
-                <a:latin typeface="Consolas" panose="020B0609020204030204" pitchFamily="49" charset="0"/>
-                <a:cs typeface="Consolas" panose="020B0609020204030204" pitchFamily="49" charset="0"/>
-              </a:rPr>
-              <a:t>(expected, predicted)</a:t>
-            </a:r>
-          </a:p>
-          <a:p>
-            <a:endParaRPr lang="en-US" sz="1400" b="1" dirty="0">
-              <a:solidFill>
-                <a:srgbClr val="00B0F0"/>
-              </a:solidFill>
-              <a:latin typeface="Consolas" panose="020B0609020204030204" pitchFamily="49" charset="0"/>
-              <a:cs typeface="Consolas" panose="020B0609020204030204" pitchFamily="49" charset="0"/>
-            </a:endParaRPr>
-          </a:p>
-          <a:p>
-            <a:r>
-              <a:rPr lang="en-US" sz="1400" b="1" dirty="0">
-                <a:solidFill>
-                  <a:srgbClr val="00B0F0"/>
-                </a:solidFill>
-                <a:latin typeface="Consolas" panose="020B0609020204030204" pitchFamily="49" charset="0"/>
-                <a:cs typeface="Consolas" panose="020B0609020204030204" pitchFamily="49" charset="0"/>
-              </a:rPr>
-              <a:t>[[194156   4864]</a:t>
-            </a:r>
-          </a:p>
-          <a:p>
-            <a:r>
-              <a:rPr lang="en-US" sz="1400" b="1" dirty="0">
-                <a:solidFill>
-                  <a:srgbClr val="00B0F0"/>
-                </a:solidFill>
-                <a:latin typeface="Consolas" panose="020B0609020204030204" pitchFamily="49" charset="0"/>
-                <a:cs typeface="Consolas" panose="020B0609020204030204" pitchFamily="49" charset="0"/>
-              </a:rPr>
-              <a:t> [    23    321]]</a:t>
-            </a:r>
-          </a:p>
-        </p:txBody>
-      </p:sp>
-      <p:sp>
-        <p:nvSpPr>
-          <p:cNvPr id="7" name="TextBox 6">
-            <a:extLst>
-              <a:ext uri="{FF2B5EF4-FFF2-40B4-BE49-F238E27FC236}">
-                <a16:creationId xmlns:a16="http://schemas.microsoft.com/office/drawing/2014/main" id="{765B8119-CB34-004A-8BAF-2F2E2895F4D1}"/>
+              <a:rPr lang="en-US" sz="1600" dirty="0"/>
+              <a:t>Imagine imbalanced data set:</a:t>
+            </a:r>
+          </a:p>
+          <a:p>
+            <a:r>
+              <a:rPr lang="en-US" sz="1600" dirty="0"/>
+              <a:t>for 10 airplanes we get 10,000 noise spikes.</a:t>
+            </a:r>
+          </a:p>
+          <a:p>
+            <a:r>
+              <a:rPr lang="en-US" sz="1600" dirty="0"/>
+              <a:t>Suppose we have a classifier with reasonably good ROC curve, which at the "sweet spot" identifies 90% of planes and only 1% of noise as planes. The AUC will be very close to 1.</a:t>
+            </a:r>
+          </a:p>
+          <a:p>
+            <a:endParaRPr lang="en-US" sz="1600" dirty="0"/>
+          </a:p>
+          <a:p>
+            <a:r>
+              <a:rPr lang="en-US" sz="1600" dirty="0"/>
+              <a:t>But it is actually a terrible classifier.</a:t>
+            </a:r>
+          </a:p>
+          <a:p>
+            <a:r>
+              <a:rPr lang="en-US" sz="1600" dirty="0"/>
+              <a:t>Because it will cry "plane!" for noise spikes 10 times more than for real planes!</a:t>
+            </a:r>
+          </a:p>
+          <a:p>
+            <a:endParaRPr lang="en-US" sz="1600" dirty="0"/>
+          </a:p>
+          <a:p>
+            <a:r>
+              <a:rPr lang="en-US" sz="1600" dirty="0"/>
+              <a:t>The Precision-Recall curve is a much better indicator. Please see example on the right.</a:t>
+            </a:r>
+          </a:p>
+        </p:txBody>
+      </p:sp>
+      <p:sp>
+        <p:nvSpPr>
+          <p:cNvPr id="9" name="TextBox 8">
+            <a:extLst>
+              <a:ext uri="{FF2B5EF4-FFF2-40B4-BE49-F238E27FC236}">
+                <a16:creationId xmlns:a16="http://schemas.microsoft.com/office/drawing/2014/main" id="{BBF27CC1-901A-464C-94EF-AAB069AD082B}"/>
               </a:ext>
             </a:extLst>
           </p:cNvPr>
@@ -9576,8 +11305,8 @@
         </p:nvSpPr>
         <p:spPr>
           <a:xfrm>
-            <a:off x="249168" y="919405"/>
-            <a:ext cx="8228910" cy="1323439"/>
+            <a:off x="7813922" y="4782215"/>
+            <a:ext cx="650240" cy="338554"/>
           </a:xfrm>
           <a:prstGeom prst="rect">
             <a:avLst/>
@@ -9591,27 +11320,22 @@
           <a:lstStyle/>
           <a:p>
             <a:r>
-              <a:rPr lang="en-US" sz="2000" dirty="0"/>
-              <a:t>For a simple binary classifier we are predicting one of two possibilities (Yes/No, Positive/Negative, Plane/No-Plane, Normal/Abnormal, etc.).</a:t>
-            </a:r>
-          </a:p>
-          <a:p>
-            <a:endParaRPr lang="en-US" sz="2000" dirty="0"/>
-          </a:p>
-          <a:p>
-            <a:r>
-              <a:rPr lang="en-US" sz="2000" dirty="0"/>
-              <a:t>So we construct a 2x2 matrix to visualize True &amp; False Positives and Negatives.</a:t>
-            </a:r>
-          </a:p>
-        </p:txBody>
-      </p:sp>
-      <p:sp>
-        <p:nvSpPr>
-          <p:cNvPr id="8" name="Google Shape;88;p13">
-            <a:extLst>
-              <a:ext uri="{FF2B5EF4-FFF2-40B4-BE49-F238E27FC236}">
-                <a16:creationId xmlns:a16="http://schemas.microsoft.com/office/drawing/2014/main" id="{2B1BDB6E-ED89-9444-9CFB-7D7AF5C8172F}"/>
+              <a:rPr lang="en-US" sz="1600" b="1" dirty="0">
+                <a:solidFill>
+                  <a:srgbClr val="FF0000"/>
+                </a:solidFill>
+              </a:rPr>
+              <a:t>ROC</a:t>
+            </a:r>
+          </a:p>
+        </p:txBody>
+      </p:sp>
+      <p:sp>
+        <p:nvSpPr>
+          <p:cNvPr id="10" name="TextBox 9">
+            <a:extLst>
+              <a:ext uri="{FF2B5EF4-FFF2-40B4-BE49-F238E27FC236}">
+                <a16:creationId xmlns:a16="http://schemas.microsoft.com/office/drawing/2014/main" id="{502E4AA8-0F85-D343-B7E0-E08E62539B2F}"/>
               </a:ext>
             </a:extLst>
           </p:cNvPr>
@@ -9620,127 +11344,35 @@
         </p:nvSpPr>
         <p:spPr>
           <a:xfrm>
-            <a:off x="149086" y="5717894"/>
-            <a:ext cx="7270286" cy="1102647"/>
+            <a:off x="9965196" y="4782215"/>
+            <a:ext cx="1676400" cy="338554"/>
           </a:xfrm>
           <a:prstGeom prst="rect">
             <a:avLst/>
           </a:prstGeom>
           <a:noFill/>
-          <a:ln>
-            <a:noFill/>
-          </a:ln>
-        </p:spPr>
-        <p:txBody>
-          <a:bodyPr spcFirstLastPara="1" wrap="square" lIns="91425" tIns="45700" rIns="91425" bIns="45700" anchor="t" anchorCtr="0">
-            <a:noAutofit/>
+        </p:spPr>
+        <p:txBody>
+          <a:bodyPr wrap="square" rtlCol="0">
+            <a:spAutoFit/>
           </a:bodyPr>
           <a:lstStyle/>
           <a:p>
-            <a:pPr marL="0" marR="0" lvl="0" indent="0" algn="l" rtl="0">
-              <a:spcBef>
-                <a:spcPts val="0"/>
-              </a:spcBef>
-              <a:spcAft>
-                <a:spcPts val="0"/>
-              </a:spcAft>
-              <a:buNone/>
-            </a:pPr>
-            <a:r>
-              <a:rPr lang="en-US" sz="2000" b="1" i="0" u="none" strike="noStrike" cap="none" dirty="0">
+            <a:r>
+              <a:rPr lang="en-US" sz="1600" b="1" dirty="0">
                 <a:solidFill>
-                  <a:schemeClr val="dk1"/>
+                  <a:srgbClr val="FF0000"/>
                 </a:solidFill>
-                <a:latin typeface="Calibri"/>
-                <a:ea typeface="Calibri"/>
-                <a:cs typeface="Calibri"/>
-                <a:sym typeface="Calibri"/>
-              </a:rPr>
-              <a:t>Accuracy  =  sum(Diagonal) / sum(ALL)  =  sum(Correct) / sum(ALL)</a:t>
-            </a:r>
-          </a:p>
-          <a:p>
-            <a:pPr marL="0" marR="0" lvl="0" indent="0" algn="l" rtl="0">
-              <a:spcBef>
-                <a:spcPts val="0"/>
-              </a:spcBef>
-              <a:spcAft>
-                <a:spcPts val="0"/>
-              </a:spcAft>
-              <a:buNone/>
-            </a:pPr>
-            <a:r>
-              <a:rPr lang="en-US" sz="2000" b="1" dirty="0">
-                <a:solidFill>
-                  <a:schemeClr val="dk1"/>
-                </a:solidFill>
-                <a:latin typeface="Calibri"/>
-                <a:cs typeface="Calibri"/>
-                <a:sym typeface="Calibri"/>
-              </a:rPr>
-              <a:t>Precision  =  TP / (TP+FP)</a:t>
-            </a:r>
-          </a:p>
-          <a:p>
-            <a:pPr marL="0" marR="0" lvl="0" indent="0" algn="l" rtl="0">
-              <a:spcBef>
-                <a:spcPts val="0"/>
-              </a:spcBef>
-              <a:spcAft>
-                <a:spcPts val="0"/>
-              </a:spcAft>
-              <a:buNone/>
-            </a:pPr>
-            <a:r>
-              <a:rPr lang="en-US" sz="2000" b="1" dirty="0">
-                <a:solidFill>
-                  <a:schemeClr val="dk1"/>
-                </a:solidFill>
-                <a:latin typeface="Calibri"/>
-                <a:cs typeface="Calibri"/>
-                <a:sym typeface="Calibri"/>
-              </a:rPr>
-              <a:t>Recall  =  TP / (TP+FN)  =  TP / </a:t>
-            </a:r>
-            <a:r>
-              <a:rPr lang="en-US" sz="2000" b="1" dirty="0" err="1">
-                <a:solidFill>
-                  <a:schemeClr val="dk1"/>
-                </a:solidFill>
-                <a:latin typeface="Calibri"/>
-                <a:cs typeface="Calibri"/>
-                <a:sym typeface="Calibri"/>
-              </a:rPr>
-              <a:t>All_Actual_Positives</a:t>
-            </a:r>
-            <a:endParaRPr sz="2000" dirty="0"/>
-          </a:p>
-          <a:p>
-            <a:pPr marL="0" marR="0" lvl="0" indent="0" algn="l" rtl="0">
-              <a:spcBef>
-                <a:spcPts val="0"/>
-              </a:spcBef>
-              <a:spcAft>
-                <a:spcPts val="0"/>
-              </a:spcAft>
-              <a:buNone/>
-            </a:pPr>
-            <a:endParaRPr sz="2000" dirty="0">
-              <a:solidFill>
-                <a:schemeClr val="dk1"/>
-              </a:solidFill>
-              <a:latin typeface="Calibri"/>
-              <a:ea typeface="Calibri"/>
-              <a:cs typeface="Calibri"/>
-              <a:sym typeface="Calibri"/>
-            </a:endParaRPr>
+              </a:rPr>
+              <a:t>Precision - Recall</a:t>
+            </a:r>
           </a:p>
         </p:txBody>
       </p:sp>
     </p:spTree>
     <p:extLst>
       <p:ext uri="{BB962C8B-B14F-4D97-AF65-F5344CB8AC3E}">
-        <p14:creationId xmlns:p14="http://schemas.microsoft.com/office/powerpoint/2010/main" val="158420829"/>
+        <p14:creationId xmlns:p14="http://schemas.microsoft.com/office/powerpoint/2010/main" val="3318042859"/>
       </p:ext>
     </p:extLst>
   </p:cSld>
@@ -9767,52 +11399,16 @@
           <a:chExt cx="0" cy="0"/>
         </a:xfrm>
       </p:grpSpPr>
-      <p:pic>
-        <p:nvPicPr>
-          <p:cNvPr id="3" name="Picture 2">
-            <a:extLst>
-              <a:ext uri="{FF2B5EF4-FFF2-40B4-BE49-F238E27FC236}">
-                <a16:creationId xmlns:a16="http://schemas.microsoft.com/office/drawing/2014/main" id="{4D8283FA-2D57-6143-BD4D-5E14DD32FD69}"/>
-              </a:ext>
-            </a:extLst>
-          </p:cNvPr>
-          <p:cNvPicPr>
-            <a:picLocks noChangeAspect="1"/>
-          </p:cNvPicPr>
-          <p:nvPr/>
-        </p:nvPicPr>
-        <p:blipFill>
-          <a:blip r:embed="rId3"/>
-          <a:stretch>
-            <a:fillRect/>
-          </a:stretch>
-        </p:blipFill>
-        <p:spPr>
-          <a:xfrm>
-            <a:off x="8943787" y="-1637"/>
-            <a:ext cx="3248213" cy="2817727"/>
-          </a:xfrm>
-          <a:prstGeom prst="rect">
-            <a:avLst/>
-          </a:prstGeom>
-        </p:spPr>
-      </p:pic>
-      <p:sp>
-        <p:nvSpPr>
-          <p:cNvPr id="8" name="Google Shape;88;p13">
-            <a:extLst>
-              <a:ext uri="{FF2B5EF4-FFF2-40B4-BE49-F238E27FC236}">
-                <a16:creationId xmlns:a16="http://schemas.microsoft.com/office/drawing/2014/main" id="{2B1BDB6E-ED89-9444-9CFB-7D7AF5C8172F}"/>
-              </a:ext>
-            </a:extLst>
-          </p:cNvPr>
+      <p:sp>
+        <p:nvSpPr>
+          <p:cNvPr id="88" name="Google Shape;88;p13"/>
           <p:cNvSpPr txBox="1"/>
           <p:nvPr/>
         </p:nvSpPr>
         <p:spPr>
           <a:xfrm>
-            <a:off x="247177" y="159708"/>
-            <a:ext cx="4155858" cy="429251"/>
+            <a:off x="249168" y="238705"/>
+            <a:ext cx="4564879" cy="595013"/>
           </a:xfrm>
           <a:prstGeom prst="rect">
             <a:avLst/>
@@ -9838,7 +11434,7 @@
               <a:buNone/>
             </a:pPr>
             <a:r>
-              <a:rPr lang="en-US" sz="2000" b="1" i="0" u="none" strike="noStrike" cap="none" dirty="0">
+              <a:rPr lang="en-US" sz="3200" b="1" i="0" u="none" strike="noStrike" cap="none" dirty="0">
                 <a:solidFill>
                   <a:schemeClr val="dk1"/>
                 </a:solidFill>
@@ -9847,41 +11443,10 @@
                 <a:cs typeface="Calibri"/>
                 <a:sym typeface="Calibri"/>
               </a:rPr>
-              <a:t>Accuracy = sum(Diagonal) / sum(ALL)</a:t>
-            </a:r>
-          </a:p>
-        </p:txBody>
-      </p:sp>
-      <p:sp>
-        <p:nvSpPr>
-          <p:cNvPr id="12" name="Google Shape;88;p13">
-            <a:extLst>
-              <a:ext uri="{FF2B5EF4-FFF2-40B4-BE49-F238E27FC236}">
-                <a16:creationId xmlns:a16="http://schemas.microsoft.com/office/drawing/2014/main" id="{911526FC-858C-B54A-89E0-E40F21479EFA}"/>
-              </a:ext>
-            </a:extLst>
-          </p:cNvPr>
-          <p:cNvSpPr txBox="1"/>
-          <p:nvPr/>
-        </p:nvSpPr>
-        <p:spPr>
-          <a:xfrm>
-            <a:off x="226270" y="4572230"/>
-            <a:ext cx="4979394" cy="429251"/>
-          </a:xfrm>
-          <a:prstGeom prst="rect">
-            <a:avLst/>
-          </a:prstGeom>
-          <a:noFill/>
-          <a:ln>
-            <a:noFill/>
-          </a:ln>
-        </p:spPr>
-        <p:txBody>
-          <a:bodyPr spcFirstLastPara="1" wrap="square" lIns="91425" tIns="45700" rIns="91425" bIns="45700" anchor="t" anchorCtr="0">
-            <a:noAutofit/>
-          </a:bodyPr>
-          <a:lstStyle/>
+              <a:t>Confusion Matrix</a:t>
+            </a:r>
+            <a:endParaRPr dirty="0"/>
+          </a:p>
           <a:p>
             <a:pPr marL="0" marR="0" lvl="0" indent="0" algn="l" rtl="0">
               <a:spcBef>
@@ -9892,6 +11457,466 @@
               </a:spcAft>
               <a:buNone/>
             </a:pPr>
+            <a:endParaRPr sz="1800" dirty="0">
+              <a:solidFill>
+                <a:schemeClr val="dk1"/>
+              </a:solidFill>
+              <a:latin typeface="Calibri"/>
+              <a:ea typeface="Calibri"/>
+              <a:cs typeface="Calibri"/>
+              <a:sym typeface="Calibri"/>
+            </a:endParaRPr>
+          </a:p>
+        </p:txBody>
+      </p:sp>
+      <p:pic>
+        <p:nvPicPr>
+          <p:cNvPr id="3" name="Picture 2">
+            <a:extLst>
+              <a:ext uri="{FF2B5EF4-FFF2-40B4-BE49-F238E27FC236}">
+                <a16:creationId xmlns:a16="http://schemas.microsoft.com/office/drawing/2014/main" id="{4D8283FA-2D57-6143-BD4D-5E14DD32FD69}"/>
+              </a:ext>
+            </a:extLst>
+          </p:cNvPr>
+          <p:cNvPicPr>
+            <a:picLocks noChangeAspect="1"/>
+          </p:cNvPicPr>
+          <p:nvPr/>
+        </p:nvPicPr>
+        <p:blipFill>
+          <a:blip r:embed="rId3"/>
+          <a:stretch>
+            <a:fillRect/>
+          </a:stretch>
+        </p:blipFill>
+        <p:spPr>
+          <a:xfrm>
+            <a:off x="8727140" y="0"/>
+            <a:ext cx="3248213" cy="2817727"/>
+          </a:xfrm>
+          <a:prstGeom prst="rect">
+            <a:avLst/>
+          </a:prstGeom>
+        </p:spPr>
+      </p:pic>
+      <p:pic>
+        <p:nvPicPr>
+          <p:cNvPr id="5" name="Picture 4">
+            <a:extLst>
+              <a:ext uri="{FF2B5EF4-FFF2-40B4-BE49-F238E27FC236}">
+                <a16:creationId xmlns:a16="http://schemas.microsoft.com/office/drawing/2014/main" id="{FB4BAF2C-0C1A-F448-A098-8A465864D8DA}"/>
+              </a:ext>
+            </a:extLst>
+          </p:cNvPr>
+          <p:cNvPicPr>
+            <a:picLocks noChangeAspect="1"/>
+          </p:cNvPicPr>
+          <p:nvPr/>
+        </p:nvPicPr>
+        <p:blipFill>
+          <a:blip r:embed="rId4" cstate="email">
+            <a:extLst>
+              <a:ext uri="{28A0092B-C50C-407E-A947-70E740481C1C}">
+                <a14:useLocalDpi xmlns:a14="http://schemas.microsoft.com/office/drawing/2010/main"/>
+              </a:ext>
+            </a:extLst>
+          </a:blip>
+          <a:stretch>
+            <a:fillRect/>
+          </a:stretch>
+        </p:blipFill>
+        <p:spPr>
+          <a:xfrm>
+            <a:off x="6705600" y="3012140"/>
+            <a:ext cx="5486400" cy="3657600"/>
+          </a:xfrm>
+          <a:prstGeom prst="rect">
+            <a:avLst/>
+          </a:prstGeom>
+        </p:spPr>
+      </p:pic>
+      <p:sp>
+        <p:nvSpPr>
+          <p:cNvPr id="6" name="TextBox 5">
+            <a:extLst>
+              <a:ext uri="{FF2B5EF4-FFF2-40B4-BE49-F238E27FC236}">
+                <a16:creationId xmlns:a16="http://schemas.microsoft.com/office/drawing/2014/main" id="{0776A3DB-E3D6-044A-B6B6-0333CC961AFA}"/>
+              </a:ext>
+            </a:extLst>
+          </p:cNvPr>
+          <p:cNvSpPr txBox="1"/>
+          <p:nvPr/>
+        </p:nvSpPr>
+        <p:spPr>
+          <a:xfrm>
+            <a:off x="789290" y="2242844"/>
+            <a:ext cx="5916310" cy="3108543"/>
+          </a:xfrm>
+          <a:prstGeom prst="rect">
+            <a:avLst/>
+          </a:prstGeom>
+          <a:noFill/>
+        </p:spPr>
+        <p:txBody>
+          <a:bodyPr wrap="square" rtlCol="0">
+            <a:spAutoFit/>
+          </a:bodyPr>
+          <a:lstStyle/>
+          <a:p>
+            <a:r>
+              <a:rPr lang="en-US" sz="1400" b="1" dirty="0">
+                <a:solidFill>
+                  <a:srgbClr val="00B0F0"/>
+                </a:solidFill>
+                <a:latin typeface="Consolas" panose="020B0609020204030204" pitchFamily="49" charset="0"/>
+                <a:cs typeface="Consolas" panose="020B0609020204030204" pitchFamily="49" charset="0"/>
+              </a:rPr>
+              <a:t>from </a:t>
+            </a:r>
+            <a:r>
+              <a:rPr lang="en-US" sz="1400" b="1" dirty="0" err="1">
+                <a:solidFill>
+                  <a:srgbClr val="00B0F0"/>
+                </a:solidFill>
+                <a:latin typeface="Consolas" panose="020B0609020204030204" pitchFamily="49" charset="0"/>
+                <a:cs typeface="Consolas" panose="020B0609020204030204" pitchFamily="49" charset="0"/>
+              </a:rPr>
+              <a:t>sklearn</a:t>
+            </a:r>
+            <a:r>
+              <a:rPr lang="en-US" sz="1400" b="1" dirty="0">
+                <a:solidFill>
+                  <a:srgbClr val="00B0F0"/>
+                </a:solidFill>
+                <a:latin typeface="Consolas" panose="020B0609020204030204" pitchFamily="49" charset="0"/>
+                <a:cs typeface="Consolas" panose="020B0609020204030204" pitchFamily="49" charset="0"/>
+              </a:rPr>
+              <a:t> import metrics</a:t>
+            </a:r>
+          </a:p>
+          <a:p>
+            <a:endParaRPr lang="en-US" sz="1400" b="1" dirty="0">
+              <a:solidFill>
+                <a:srgbClr val="00B0F0"/>
+              </a:solidFill>
+              <a:latin typeface="Consolas" panose="020B0609020204030204" pitchFamily="49" charset="0"/>
+              <a:cs typeface="Consolas" panose="020B0609020204030204" pitchFamily="49" charset="0"/>
+            </a:endParaRPr>
+          </a:p>
+          <a:p>
+            <a:r>
+              <a:rPr lang="en-US" sz="1400" b="1" dirty="0">
+                <a:solidFill>
+                  <a:srgbClr val="00B0F0"/>
+                </a:solidFill>
+                <a:latin typeface="Consolas" panose="020B0609020204030204" pitchFamily="49" charset="0"/>
+                <a:cs typeface="Consolas" panose="020B0609020204030204" pitchFamily="49" charset="0"/>
+              </a:rPr>
+              <a:t>expected = target</a:t>
+            </a:r>
+          </a:p>
+          <a:p>
+            <a:r>
+              <a:rPr lang="en-US" sz="1400" b="1" dirty="0">
+                <a:solidFill>
+                  <a:srgbClr val="00B0F0"/>
+                </a:solidFill>
+                <a:latin typeface="Consolas" panose="020B0609020204030204" pitchFamily="49" charset="0"/>
+                <a:cs typeface="Consolas" panose="020B0609020204030204" pitchFamily="49" charset="0"/>
+              </a:rPr>
+              <a:t>predicted = </a:t>
+            </a:r>
+            <a:r>
+              <a:rPr lang="en-US" sz="1400" b="1" dirty="0" err="1">
+                <a:solidFill>
+                  <a:srgbClr val="00B0F0"/>
+                </a:solidFill>
+                <a:latin typeface="Consolas" panose="020B0609020204030204" pitchFamily="49" charset="0"/>
+                <a:cs typeface="Consolas" panose="020B0609020204030204" pitchFamily="49" charset="0"/>
+              </a:rPr>
+              <a:t>model.predict</a:t>
+            </a:r>
+            <a:r>
+              <a:rPr lang="en-US" sz="1400" b="1" dirty="0">
+                <a:solidFill>
+                  <a:srgbClr val="00B0F0"/>
+                </a:solidFill>
+                <a:latin typeface="Consolas" panose="020B0609020204030204" pitchFamily="49" charset="0"/>
+                <a:cs typeface="Consolas" panose="020B0609020204030204" pitchFamily="49" charset="0"/>
+              </a:rPr>
+              <a:t>(data)</a:t>
+            </a:r>
+          </a:p>
+          <a:p>
+            <a:endParaRPr lang="en-US" sz="1400" b="1" dirty="0">
+              <a:solidFill>
+                <a:srgbClr val="00B0F0"/>
+              </a:solidFill>
+              <a:latin typeface="Consolas" panose="020B0609020204030204" pitchFamily="49" charset="0"/>
+              <a:cs typeface="Consolas" panose="020B0609020204030204" pitchFamily="49" charset="0"/>
+            </a:endParaRPr>
+          </a:p>
+          <a:p>
+            <a:r>
+              <a:rPr lang="en-US" sz="1400" b="1" dirty="0" err="1">
+                <a:solidFill>
+                  <a:srgbClr val="00B0F0"/>
+                </a:solidFill>
+                <a:latin typeface="Consolas" panose="020B0609020204030204" pitchFamily="49" charset="0"/>
+                <a:cs typeface="Consolas" panose="020B0609020204030204" pitchFamily="49" charset="0"/>
+              </a:rPr>
+              <a:t>metrics.precision_score</a:t>
+            </a:r>
+            <a:r>
+              <a:rPr lang="en-US" sz="1400" b="1" dirty="0">
+                <a:solidFill>
+                  <a:srgbClr val="00B0F0"/>
+                </a:solidFill>
+                <a:latin typeface="Consolas" panose="020B0609020204030204" pitchFamily="49" charset="0"/>
+                <a:cs typeface="Consolas" panose="020B0609020204030204" pitchFamily="49" charset="0"/>
+              </a:rPr>
+              <a:t>(expected, predicted)</a:t>
+            </a:r>
+          </a:p>
+          <a:p>
+            <a:r>
+              <a:rPr lang="en-US" sz="1400" b="1" dirty="0" err="1">
+                <a:solidFill>
+                  <a:srgbClr val="00B0F0"/>
+                </a:solidFill>
+                <a:latin typeface="Consolas" panose="020B0609020204030204" pitchFamily="49" charset="0"/>
+                <a:cs typeface="Consolas" panose="020B0609020204030204" pitchFamily="49" charset="0"/>
+              </a:rPr>
+              <a:t>metrics.recall_score</a:t>
+            </a:r>
+            <a:r>
+              <a:rPr lang="en-US" sz="1400" b="1" dirty="0">
+                <a:solidFill>
+                  <a:srgbClr val="00B0F0"/>
+                </a:solidFill>
+                <a:latin typeface="Consolas" panose="020B0609020204030204" pitchFamily="49" charset="0"/>
+                <a:cs typeface="Consolas" panose="020B0609020204030204" pitchFamily="49" charset="0"/>
+              </a:rPr>
+              <a:t>(expected, predicted)</a:t>
+            </a:r>
+          </a:p>
+          <a:p>
+            <a:r>
+              <a:rPr lang="en-US" sz="1400" b="1" dirty="0" err="1">
+                <a:solidFill>
+                  <a:srgbClr val="00B0F0"/>
+                </a:solidFill>
+                <a:latin typeface="Consolas" panose="020B0609020204030204" pitchFamily="49" charset="0"/>
+                <a:cs typeface="Consolas" panose="020B0609020204030204" pitchFamily="49" charset="0"/>
+              </a:rPr>
+              <a:t>metrics.roc_curve</a:t>
+            </a:r>
+            <a:r>
+              <a:rPr lang="en-US" sz="1400" b="1" dirty="0">
+                <a:solidFill>
+                  <a:srgbClr val="00B0F0"/>
+                </a:solidFill>
+                <a:latin typeface="Consolas" panose="020B0609020204030204" pitchFamily="49" charset="0"/>
+                <a:cs typeface="Consolas" panose="020B0609020204030204" pitchFamily="49" charset="0"/>
+              </a:rPr>
+              <a:t>(expected, predicted)</a:t>
+            </a:r>
+          </a:p>
+          <a:p>
+            <a:r>
+              <a:rPr lang="en-US" sz="1400" b="1" dirty="0" err="1">
+                <a:solidFill>
+                  <a:srgbClr val="00B0F0"/>
+                </a:solidFill>
+                <a:latin typeface="Consolas" panose="020B0609020204030204" pitchFamily="49" charset="0"/>
+                <a:cs typeface="Consolas" panose="020B0609020204030204" pitchFamily="49" charset="0"/>
+              </a:rPr>
+              <a:t>metrics.roc_auc_score</a:t>
+            </a:r>
+            <a:r>
+              <a:rPr lang="en-US" sz="1400" b="1" dirty="0">
+                <a:solidFill>
+                  <a:srgbClr val="00B0F0"/>
+                </a:solidFill>
+                <a:latin typeface="Consolas" panose="020B0609020204030204" pitchFamily="49" charset="0"/>
+                <a:cs typeface="Consolas" panose="020B0609020204030204" pitchFamily="49" charset="0"/>
+              </a:rPr>
+              <a:t>(expected, predicted)</a:t>
+            </a:r>
+          </a:p>
+          <a:p>
+            <a:endParaRPr lang="en-US" sz="1400" b="1" dirty="0">
+              <a:solidFill>
+                <a:srgbClr val="00B0F0"/>
+              </a:solidFill>
+              <a:latin typeface="Consolas" panose="020B0609020204030204" pitchFamily="49" charset="0"/>
+              <a:cs typeface="Consolas" panose="020B0609020204030204" pitchFamily="49" charset="0"/>
+            </a:endParaRPr>
+          </a:p>
+          <a:p>
+            <a:r>
+              <a:rPr lang="en-US" sz="1400" b="1" dirty="0" err="1">
+                <a:solidFill>
+                  <a:srgbClr val="00B0F0"/>
+                </a:solidFill>
+                <a:latin typeface="Consolas" panose="020B0609020204030204" pitchFamily="49" charset="0"/>
+                <a:cs typeface="Consolas" panose="020B0609020204030204" pitchFamily="49" charset="0"/>
+              </a:rPr>
+              <a:t>metrics.confusion_matrix</a:t>
+            </a:r>
+            <a:r>
+              <a:rPr lang="en-US" sz="1400" b="1" dirty="0">
+                <a:solidFill>
+                  <a:srgbClr val="00B0F0"/>
+                </a:solidFill>
+                <a:latin typeface="Consolas" panose="020B0609020204030204" pitchFamily="49" charset="0"/>
+                <a:cs typeface="Consolas" panose="020B0609020204030204" pitchFamily="49" charset="0"/>
+              </a:rPr>
+              <a:t>(expected, predicted)</a:t>
+            </a:r>
+          </a:p>
+          <a:p>
+            <a:endParaRPr lang="en-US" sz="1400" b="1" dirty="0">
+              <a:solidFill>
+                <a:srgbClr val="00B0F0"/>
+              </a:solidFill>
+              <a:latin typeface="Consolas" panose="020B0609020204030204" pitchFamily="49" charset="0"/>
+              <a:cs typeface="Consolas" panose="020B0609020204030204" pitchFamily="49" charset="0"/>
+            </a:endParaRPr>
+          </a:p>
+          <a:p>
+            <a:r>
+              <a:rPr lang="en-US" sz="1400" b="1" dirty="0">
+                <a:solidFill>
+                  <a:srgbClr val="00B0F0"/>
+                </a:solidFill>
+                <a:latin typeface="Consolas" panose="020B0609020204030204" pitchFamily="49" charset="0"/>
+                <a:cs typeface="Consolas" panose="020B0609020204030204" pitchFamily="49" charset="0"/>
+              </a:rPr>
+              <a:t>[[194156   4864]</a:t>
+            </a:r>
+          </a:p>
+          <a:p>
+            <a:r>
+              <a:rPr lang="en-US" sz="1400" b="1" dirty="0">
+                <a:solidFill>
+                  <a:srgbClr val="00B0F0"/>
+                </a:solidFill>
+                <a:latin typeface="Consolas" panose="020B0609020204030204" pitchFamily="49" charset="0"/>
+                <a:cs typeface="Consolas" panose="020B0609020204030204" pitchFamily="49" charset="0"/>
+              </a:rPr>
+              <a:t> [    23    321]]</a:t>
+            </a:r>
+          </a:p>
+        </p:txBody>
+      </p:sp>
+      <p:sp>
+        <p:nvSpPr>
+          <p:cNvPr id="7" name="TextBox 6">
+            <a:extLst>
+              <a:ext uri="{FF2B5EF4-FFF2-40B4-BE49-F238E27FC236}">
+                <a16:creationId xmlns:a16="http://schemas.microsoft.com/office/drawing/2014/main" id="{765B8119-CB34-004A-8BAF-2F2E2895F4D1}"/>
+              </a:ext>
+            </a:extLst>
+          </p:cNvPr>
+          <p:cNvSpPr txBox="1"/>
+          <p:nvPr/>
+        </p:nvSpPr>
+        <p:spPr>
+          <a:xfrm>
+            <a:off x="249168" y="919405"/>
+            <a:ext cx="8228910" cy="1323439"/>
+          </a:xfrm>
+          <a:prstGeom prst="rect">
+            <a:avLst/>
+          </a:prstGeom>
+          <a:noFill/>
+        </p:spPr>
+        <p:txBody>
+          <a:bodyPr wrap="square" rtlCol="0">
+            <a:spAutoFit/>
+          </a:bodyPr>
+          <a:lstStyle/>
+          <a:p>
+            <a:r>
+              <a:rPr lang="en-US" sz="2000" dirty="0"/>
+              <a:t>For a simple binary classifier we are predicting one of two possibilities (Yes/No, Positive/Negative, Plane/No-Plane, Normal/Abnormal, etc.).</a:t>
+            </a:r>
+          </a:p>
+          <a:p>
+            <a:endParaRPr lang="en-US" sz="2000" dirty="0"/>
+          </a:p>
+          <a:p>
+            <a:r>
+              <a:rPr lang="en-US" sz="2000" dirty="0"/>
+              <a:t>So we construct a 2x2 matrix to visualize True &amp; False Positives and Negatives.</a:t>
+            </a:r>
+          </a:p>
+        </p:txBody>
+      </p:sp>
+      <p:sp>
+        <p:nvSpPr>
+          <p:cNvPr id="8" name="Google Shape;88;p13">
+            <a:extLst>
+              <a:ext uri="{FF2B5EF4-FFF2-40B4-BE49-F238E27FC236}">
+                <a16:creationId xmlns:a16="http://schemas.microsoft.com/office/drawing/2014/main" id="{2B1BDB6E-ED89-9444-9CFB-7D7AF5C8172F}"/>
+              </a:ext>
+            </a:extLst>
+          </p:cNvPr>
+          <p:cNvSpPr txBox="1"/>
+          <p:nvPr/>
+        </p:nvSpPr>
+        <p:spPr>
+          <a:xfrm>
+            <a:off x="149086" y="5717894"/>
+            <a:ext cx="7270286" cy="1102647"/>
+          </a:xfrm>
+          <a:prstGeom prst="rect">
+            <a:avLst/>
+          </a:prstGeom>
+          <a:noFill/>
+          <a:ln>
+            <a:noFill/>
+          </a:ln>
+        </p:spPr>
+        <p:txBody>
+          <a:bodyPr spcFirstLastPara="1" wrap="square" lIns="91425" tIns="45700" rIns="91425" bIns="45700" anchor="t" anchorCtr="0">
+            <a:noAutofit/>
+          </a:bodyPr>
+          <a:lstStyle/>
+          <a:p>
+            <a:pPr marL="0" marR="0" lvl="0" indent="0" algn="l" rtl="0">
+              <a:spcBef>
+                <a:spcPts val="0"/>
+              </a:spcBef>
+              <a:spcAft>
+                <a:spcPts val="0"/>
+              </a:spcAft>
+              <a:buNone/>
+            </a:pPr>
+            <a:r>
+              <a:rPr lang="en-US" sz="2000" b="1" i="0" u="none" strike="noStrike" cap="none" dirty="0">
+                <a:solidFill>
+                  <a:schemeClr val="dk1"/>
+                </a:solidFill>
+                <a:latin typeface="Calibri"/>
+                <a:ea typeface="Calibri"/>
+                <a:cs typeface="Calibri"/>
+                <a:sym typeface="Calibri"/>
+              </a:rPr>
+              <a:t>Accuracy  =  sum(Diagonal) / sum(ALL)  =  sum(Correct) / sum(ALL)</a:t>
+            </a:r>
+          </a:p>
+          <a:p>
+            <a:pPr marL="0" marR="0" lvl="0" indent="0" algn="l" rtl="0">
+              <a:spcBef>
+                <a:spcPts val="0"/>
+              </a:spcBef>
+              <a:spcAft>
+                <a:spcPts val="0"/>
+              </a:spcAft>
+              <a:buNone/>
+            </a:pPr>
             <a:r>
               <a:rPr lang="en-US" sz="2000" b="1" dirty="0">
                 <a:solidFill>
@@ -9901,7 +11926,29 @@
                 <a:cs typeface="Calibri"/>
                 <a:sym typeface="Calibri"/>
               </a:rPr>
-              <a:t>Recall = TP / (TP+FN) = TP / </a:t>
+              <a:t>Precision  =  TP / (TP+FP)</a:t>
+            </a:r>
+          </a:p>
+          <a:p>
+            <a:pPr marL="0" marR="0" lvl="0" indent="0" algn="l" rtl="0">
+              <a:spcBef>
+                <a:spcPts val="0"/>
+              </a:spcBef>
+              <a:spcAft>
+                <a:spcPts val="0"/>
+              </a:spcAft>
+              <a:buNone/>
+            </a:pPr>
+            <a:r>
+              <a:rPr lang="en-US" sz="2000" b="1" dirty="0">
+                <a:solidFill>
+                  <a:schemeClr val="dk1"/>
+                </a:solidFill>
+                <a:latin typeface="Calibri"/>
+                <a:cs typeface="Calibri"/>
+                <a:sym typeface="Calibri"/>
+              </a:rPr>
+              <a:t>Recall  =  TP / (TP+FN)  =  TP / </a:t>
             </a:r>
             <a:r>
               <a:rPr lang="en-US" sz="2000" b="1" dirty="0" err="1">
@@ -9912,7 +11959,7 @@
                 <a:cs typeface="Calibri"/>
                 <a:sym typeface="Calibri"/>
               </a:rPr>
-              <a:t>Actual_Positives</a:t>
+              <a:t>All_Actual_Positives</a:t>
             </a:r>
             <a:endParaRPr sz="2000" dirty="0"/>
           </a:p>
@@ -9938,1520 +11985,10 @@
           </a:p>
         </p:txBody>
       </p:sp>
-      <p:sp>
-        <p:nvSpPr>
-          <p:cNvPr id="13" name="Google Shape;88;p13">
-            <a:extLst>
-              <a:ext uri="{FF2B5EF4-FFF2-40B4-BE49-F238E27FC236}">
-                <a16:creationId xmlns:a16="http://schemas.microsoft.com/office/drawing/2014/main" id="{00CE273A-9856-814F-80A0-A0D131AA03C8}"/>
-              </a:ext>
-            </a:extLst>
-          </p:cNvPr>
-          <p:cNvSpPr txBox="1"/>
-          <p:nvPr/>
-        </p:nvSpPr>
-        <p:spPr>
-          <a:xfrm>
-            <a:off x="247176" y="2422320"/>
-            <a:ext cx="5712465" cy="505334"/>
-          </a:xfrm>
-          <a:prstGeom prst="rect">
-            <a:avLst/>
-          </a:prstGeom>
-          <a:noFill/>
-          <a:ln>
-            <a:noFill/>
-          </a:ln>
-        </p:spPr>
-        <p:txBody>
-          <a:bodyPr spcFirstLastPara="1" wrap="square" lIns="91425" tIns="45700" rIns="91425" bIns="45700" anchor="t" anchorCtr="0">
-            <a:noAutofit/>
-          </a:bodyPr>
-          <a:lstStyle/>
-          <a:p>
-            <a:pPr lvl="0"/>
-            <a:r>
-              <a:rPr lang="en-US" sz="2000" b="1" dirty="0">
-                <a:solidFill>
-                  <a:schemeClr val="dk1"/>
-                </a:solidFill>
-                <a:latin typeface="Calibri"/>
-                <a:cs typeface="Calibri"/>
-                <a:sym typeface="Calibri"/>
-              </a:rPr>
-              <a:t>Precision = TP / (TP+FP</a:t>
-            </a:r>
-            <a:r>
-              <a:rPr lang="en-US" sz="2000" b="1" dirty="0">
-                <a:solidFill>
-                  <a:schemeClr val="dk1"/>
-                </a:solidFill>
-                <a:cs typeface="Calibri"/>
-                <a:sym typeface="Calibri"/>
-              </a:rPr>
-              <a:t>) = TP / </a:t>
-            </a:r>
-            <a:r>
-              <a:rPr lang="en-US" sz="2000" b="1" dirty="0" err="1">
-                <a:solidFill>
-                  <a:schemeClr val="dk1"/>
-                </a:solidFill>
-                <a:cs typeface="Calibri"/>
-                <a:sym typeface="Calibri"/>
-              </a:rPr>
-              <a:t>Predicted_Positives</a:t>
-            </a:r>
-            <a:endParaRPr sz="2000" dirty="0">
-              <a:solidFill>
-                <a:schemeClr val="dk1"/>
-              </a:solidFill>
-              <a:latin typeface="Calibri"/>
-              <a:ea typeface="Calibri"/>
-              <a:cs typeface="Calibri"/>
-              <a:sym typeface="Calibri"/>
-            </a:endParaRPr>
-          </a:p>
-        </p:txBody>
-      </p:sp>
-      <p:sp>
-        <p:nvSpPr>
-          <p:cNvPr id="14" name="Rectangle 13">
-            <a:extLst>
-              <a:ext uri="{FF2B5EF4-FFF2-40B4-BE49-F238E27FC236}">
-                <a16:creationId xmlns:a16="http://schemas.microsoft.com/office/drawing/2014/main" id="{A149A53B-AD44-1146-A0BF-25CBD0891323}"/>
-              </a:ext>
-            </a:extLst>
-          </p:cNvPr>
-          <p:cNvSpPr/>
-          <p:nvPr/>
-        </p:nvSpPr>
-        <p:spPr>
-          <a:xfrm>
-            <a:off x="3703606" y="850584"/>
-            <a:ext cx="294022" cy="294022"/>
-          </a:xfrm>
-          <a:prstGeom prst="rect">
-            <a:avLst/>
-          </a:prstGeom>
-        </p:spPr>
-        <p:style>
-          <a:lnRef idx="2">
-            <a:schemeClr val="accent1">
-              <a:shade val="50000"/>
-            </a:schemeClr>
-          </a:lnRef>
-          <a:fillRef idx="1">
-            <a:schemeClr val="accent1"/>
-          </a:fillRef>
-          <a:effectRef idx="0">
-            <a:schemeClr val="accent1"/>
-          </a:effectRef>
-          <a:fontRef idx="minor">
-            <a:schemeClr val="lt1"/>
-          </a:fontRef>
-        </p:style>
-        <p:txBody>
-          <a:bodyPr rtlCol="0" anchor="ctr"/>
-          <a:lstStyle/>
-          <a:p>
-            <a:pPr algn="ctr"/>
-            <a:endParaRPr lang="en-US"/>
-          </a:p>
-        </p:txBody>
-      </p:sp>
-      <p:cxnSp>
-        <p:nvCxnSpPr>
-          <p:cNvPr id="22" name="Straight Connector 21">
-            <a:extLst>
-              <a:ext uri="{FF2B5EF4-FFF2-40B4-BE49-F238E27FC236}">
-                <a16:creationId xmlns:a16="http://schemas.microsoft.com/office/drawing/2014/main" id="{2428DF91-7CB5-7C4F-85CC-17D1E068A46B}"/>
-              </a:ext>
-            </a:extLst>
-          </p:cNvPr>
-          <p:cNvCxnSpPr>
-            <a:cxnSpLocks/>
-          </p:cNvCxnSpPr>
-          <p:nvPr/>
-        </p:nvCxnSpPr>
-        <p:spPr>
-          <a:xfrm flipH="1">
-            <a:off x="2916861" y="685800"/>
-            <a:ext cx="662706" cy="941746"/>
-          </a:xfrm>
-          <a:prstGeom prst="line">
-            <a:avLst/>
-          </a:prstGeom>
-          <a:ln w="63500"/>
-        </p:spPr>
-        <p:style>
-          <a:lnRef idx="1">
-            <a:schemeClr val="accent1"/>
-          </a:lnRef>
-          <a:fillRef idx="0">
-            <a:schemeClr val="accent1"/>
-          </a:fillRef>
-          <a:effectRef idx="0">
-            <a:schemeClr val="accent1"/>
-          </a:effectRef>
-          <a:fontRef idx="minor">
-            <a:schemeClr val="tx1"/>
-          </a:fontRef>
-        </p:style>
-      </p:cxnSp>
-      <p:sp>
-        <p:nvSpPr>
-          <p:cNvPr id="33" name="Rectangle 32">
-            <a:extLst>
-              <a:ext uri="{FF2B5EF4-FFF2-40B4-BE49-F238E27FC236}">
-                <a16:creationId xmlns:a16="http://schemas.microsoft.com/office/drawing/2014/main" id="{A5A08C01-7A38-A049-9823-C82C2EB96902}"/>
-              </a:ext>
-            </a:extLst>
-          </p:cNvPr>
-          <p:cNvSpPr/>
-          <p:nvPr/>
-        </p:nvSpPr>
-        <p:spPr>
-          <a:xfrm>
-            <a:off x="3703606" y="1200971"/>
-            <a:ext cx="294022" cy="294022"/>
-          </a:xfrm>
-          <a:prstGeom prst="rect">
-            <a:avLst/>
-          </a:prstGeom>
-        </p:spPr>
-        <p:style>
-          <a:lnRef idx="2">
-            <a:schemeClr val="accent1">
-              <a:shade val="50000"/>
-            </a:schemeClr>
-          </a:lnRef>
-          <a:fillRef idx="1">
-            <a:schemeClr val="accent1"/>
-          </a:fillRef>
-          <a:effectRef idx="0">
-            <a:schemeClr val="accent1"/>
-          </a:effectRef>
-          <a:fontRef idx="minor">
-            <a:schemeClr val="lt1"/>
-          </a:fontRef>
-        </p:style>
-        <p:txBody>
-          <a:bodyPr rtlCol="0" anchor="ctr"/>
-          <a:lstStyle/>
-          <a:p>
-            <a:pPr algn="ctr"/>
-            <a:endParaRPr lang="en-US"/>
-          </a:p>
-        </p:txBody>
-      </p:sp>
-      <p:sp>
-        <p:nvSpPr>
-          <p:cNvPr id="34" name="Rectangle 33">
-            <a:extLst>
-              <a:ext uri="{FF2B5EF4-FFF2-40B4-BE49-F238E27FC236}">
-                <a16:creationId xmlns:a16="http://schemas.microsoft.com/office/drawing/2014/main" id="{EB59FCFC-7742-B24F-B8B1-93C31745DA30}"/>
-              </a:ext>
-            </a:extLst>
-          </p:cNvPr>
-          <p:cNvSpPr/>
-          <p:nvPr/>
-        </p:nvSpPr>
-        <p:spPr>
-          <a:xfrm>
-            <a:off x="4050703" y="853568"/>
-            <a:ext cx="294022" cy="294022"/>
-          </a:xfrm>
-          <a:prstGeom prst="rect">
-            <a:avLst/>
-          </a:prstGeom>
-        </p:spPr>
-        <p:style>
-          <a:lnRef idx="2">
-            <a:schemeClr val="accent1">
-              <a:shade val="50000"/>
-            </a:schemeClr>
-          </a:lnRef>
-          <a:fillRef idx="1">
-            <a:schemeClr val="accent1"/>
-          </a:fillRef>
-          <a:effectRef idx="0">
-            <a:schemeClr val="accent1"/>
-          </a:effectRef>
-          <a:fontRef idx="minor">
-            <a:schemeClr val="lt1"/>
-          </a:fontRef>
-        </p:style>
-        <p:txBody>
-          <a:bodyPr rtlCol="0" anchor="ctr"/>
-          <a:lstStyle/>
-          <a:p>
-            <a:pPr algn="ctr"/>
-            <a:endParaRPr lang="en-US"/>
-          </a:p>
-        </p:txBody>
-      </p:sp>
-      <p:sp>
-        <p:nvSpPr>
-          <p:cNvPr id="35" name="Rectangle 34">
-            <a:extLst>
-              <a:ext uri="{FF2B5EF4-FFF2-40B4-BE49-F238E27FC236}">
-                <a16:creationId xmlns:a16="http://schemas.microsoft.com/office/drawing/2014/main" id="{04AA9930-BC63-374C-BDA9-AACA1FEC9CFA}"/>
-              </a:ext>
-            </a:extLst>
-          </p:cNvPr>
-          <p:cNvSpPr/>
-          <p:nvPr/>
-        </p:nvSpPr>
-        <p:spPr>
-          <a:xfrm>
-            <a:off x="4050703" y="1203955"/>
-            <a:ext cx="294022" cy="294022"/>
-          </a:xfrm>
-          <a:prstGeom prst="rect">
-            <a:avLst/>
-          </a:prstGeom>
-        </p:spPr>
-        <p:style>
-          <a:lnRef idx="2">
-            <a:schemeClr val="accent1">
-              <a:shade val="50000"/>
-            </a:schemeClr>
-          </a:lnRef>
-          <a:fillRef idx="1">
-            <a:schemeClr val="accent1"/>
-          </a:fillRef>
-          <a:effectRef idx="0">
-            <a:schemeClr val="accent1"/>
-          </a:effectRef>
-          <a:fontRef idx="minor">
-            <a:schemeClr val="lt1"/>
-          </a:fontRef>
-        </p:style>
-        <p:txBody>
-          <a:bodyPr rtlCol="0" anchor="ctr"/>
-          <a:lstStyle/>
-          <a:p>
-            <a:pPr algn="ctr"/>
-            <a:endParaRPr lang="en-US"/>
-          </a:p>
-        </p:txBody>
-      </p:sp>
-      <p:sp>
-        <p:nvSpPr>
-          <p:cNvPr id="36" name="Rectangle 35">
-            <a:extLst>
-              <a:ext uri="{FF2B5EF4-FFF2-40B4-BE49-F238E27FC236}">
-                <a16:creationId xmlns:a16="http://schemas.microsoft.com/office/drawing/2014/main" id="{803EF5E0-2203-954C-BBED-81EC8A345B35}"/>
-              </a:ext>
-            </a:extLst>
-          </p:cNvPr>
-          <p:cNvSpPr/>
-          <p:nvPr/>
-        </p:nvSpPr>
-        <p:spPr>
-          <a:xfrm>
-            <a:off x="2118122" y="858217"/>
-            <a:ext cx="294022" cy="294022"/>
-          </a:xfrm>
-          <a:prstGeom prst="rect">
-            <a:avLst/>
-          </a:prstGeom>
-        </p:spPr>
-        <p:style>
-          <a:lnRef idx="2">
-            <a:schemeClr val="accent1">
-              <a:shade val="50000"/>
-            </a:schemeClr>
-          </a:lnRef>
-          <a:fillRef idx="1">
-            <a:schemeClr val="accent1"/>
-          </a:fillRef>
-          <a:effectRef idx="0">
-            <a:schemeClr val="accent1"/>
-          </a:effectRef>
-          <a:fontRef idx="minor">
-            <a:schemeClr val="lt1"/>
-          </a:fontRef>
-        </p:style>
-        <p:txBody>
-          <a:bodyPr rtlCol="0" anchor="ctr"/>
-          <a:lstStyle/>
-          <a:p>
-            <a:pPr algn="ctr"/>
-            <a:endParaRPr lang="en-US"/>
-          </a:p>
-        </p:txBody>
-      </p:sp>
-      <p:sp>
-        <p:nvSpPr>
-          <p:cNvPr id="37" name="Rectangle 36">
-            <a:extLst>
-              <a:ext uri="{FF2B5EF4-FFF2-40B4-BE49-F238E27FC236}">
-                <a16:creationId xmlns:a16="http://schemas.microsoft.com/office/drawing/2014/main" id="{3664F5C4-0E0A-F646-968F-0A3AE9A158DF}"/>
-              </a:ext>
-            </a:extLst>
-          </p:cNvPr>
-          <p:cNvSpPr/>
-          <p:nvPr/>
-        </p:nvSpPr>
-        <p:spPr>
-          <a:xfrm>
-            <a:off x="2118122" y="1208604"/>
-            <a:ext cx="294022" cy="294022"/>
-          </a:xfrm>
-          <a:prstGeom prst="rect">
-            <a:avLst/>
-          </a:prstGeom>
-          <a:noFill/>
-        </p:spPr>
-        <p:style>
-          <a:lnRef idx="2">
-            <a:schemeClr val="accent1">
-              <a:shade val="50000"/>
-            </a:schemeClr>
-          </a:lnRef>
-          <a:fillRef idx="1">
-            <a:schemeClr val="accent1"/>
-          </a:fillRef>
-          <a:effectRef idx="0">
-            <a:schemeClr val="accent1"/>
-          </a:effectRef>
-          <a:fontRef idx="minor">
-            <a:schemeClr val="lt1"/>
-          </a:fontRef>
-        </p:style>
-        <p:txBody>
-          <a:bodyPr rtlCol="0" anchor="ctr"/>
-          <a:lstStyle/>
-          <a:p>
-            <a:pPr algn="ctr"/>
-            <a:endParaRPr lang="en-US"/>
-          </a:p>
-        </p:txBody>
-      </p:sp>
-      <p:sp>
-        <p:nvSpPr>
-          <p:cNvPr id="38" name="Rectangle 37">
-            <a:extLst>
-              <a:ext uri="{FF2B5EF4-FFF2-40B4-BE49-F238E27FC236}">
-                <a16:creationId xmlns:a16="http://schemas.microsoft.com/office/drawing/2014/main" id="{CB60F128-11A4-E94B-AA68-260714EE26C3}"/>
-              </a:ext>
-            </a:extLst>
-          </p:cNvPr>
-          <p:cNvSpPr/>
-          <p:nvPr/>
-        </p:nvSpPr>
-        <p:spPr>
-          <a:xfrm>
-            <a:off x="2465219" y="861201"/>
-            <a:ext cx="294022" cy="294022"/>
-          </a:xfrm>
-          <a:prstGeom prst="rect">
-            <a:avLst/>
-          </a:prstGeom>
-          <a:noFill/>
-        </p:spPr>
-        <p:style>
-          <a:lnRef idx="2">
-            <a:schemeClr val="accent1">
-              <a:shade val="50000"/>
-            </a:schemeClr>
-          </a:lnRef>
-          <a:fillRef idx="1">
-            <a:schemeClr val="accent1"/>
-          </a:fillRef>
-          <a:effectRef idx="0">
-            <a:schemeClr val="accent1"/>
-          </a:effectRef>
-          <a:fontRef idx="minor">
-            <a:schemeClr val="lt1"/>
-          </a:fontRef>
-        </p:style>
-        <p:txBody>
-          <a:bodyPr rtlCol="0" anchor="ctr"/>
-          <a:lstStyle/>
-          <a:p>
-            <a:pPr algn="ctr"/>
-            <a:endParaRPr lang="en-US"/>
-          </a:p>
-        </p:txBody>
-      </p:sp>
-      <p:sp>
-        <p:nvSpPr>
-          <p:cNvPr id="39" name="Rectangle 38">
-            <a:extLst>
-              <a:ext uri="{FF2B5EF4-FFF2-40B4-BE49-F238E27FC236}">
-                <a16:creationId xmlns:a16="http://schemas.microsoft.com/office/drawing/2014/main" id="{3264F9F0-9B3D-A04D-BFBB-135207AF1EC7}"/>
-              </a:ext>
-            </a:extLst>
-          </p:cNvPr>
-          <p:cNvSpPr/>
-          <p:nvPr/>
-        </p:nvSpPr>
-        <p:spPr>
-          <a:xfrm>
-            <a:off x="2465219" y="1211588"/>
-            <a:ext cx="294022" cy="294022"/>
-          </a:xfrm>
-          <a:prstGeom prst="rect">
-            <a:avLst/>
-          </a:prstGeom>
-        </p:spPr>
-        <p:style>
-          <a:lnRef idx="2">
-            <a:schemeClr val="accent1">
-              <a:shade val="50000"/>
-            </a:schemeClr>
-          </a:lnRef>
-          <a:fillRef idx="1">
-            <a:schemeClr val="accent1"/>
-          </a:fillRef>
-          <a:effectRef idx="0">
-            <a:schemeClr val="accent1"/>
-          </a:effectRef>
-          <a:fontRef idx="minor">
-            <a:schemeClr val="lt1"/>
-          </a:fontRef>
-        </p:style>
-        <p:txBody>
-          <a:bodyPr rtlCol="0" anchor="ctr"/>
-          <a:lstStyle/>
-          <a:p>
-            <a:pPr algn="ctr"/>
-            <a:endParaRPr lang="en-US"/>
-          </a:p>
-        </p:txBody>
-      </p:sp>
-      <p:sp>
-        <p:nvSpPr>
-          <p:cNvPr id="40" name="Rectangle 39">
-            <a:extLst>
-              <a:ext uri="{FF2B5EF4-FFF2-40B4-BE49-F238E27FC236}">
-                <a16:creationId xmlns:a16="http://schemas.microsoft.com/office/drawing/2014/main" id="{1B516205-78F7-CC44-BA01-E2D40FF6321F}"/>
-              </a:ext>
-            </a:extLst>
-          </p:cNvPr>
-          <p:cNvSpPr/>
-          <p:nvPr/>
-        </p:nvSpPr>
-        <p:spPr>
-          <a:xfrm>
-            <a:off x="3703607" y="3120540"/>
-            <a:ext cx="294022" cy="294022"/>
-          </a:xfrm>
-          <a:prstGeom prst="rect">
-            <a:avLst/>
-          </a:prstGeom>
-        </p:spPr>
-        <p:style>
-          <a:lnRef idx="2">
-            <a:schemeClr val="accent1">
-              <a:shade val="50000"/>
-            </a:schemeClr>
-          </a:lnRef>
-          <a:fillRef idx="1">
-            <a:schemeClr val="accent1"/>
-          </a:fillRef>
-          <a:effectRef idx="0">
-            <a:schemeClr val="accent1"/>
-          </a:effectRef>
-          <a:fontRef idx="minor">
-            <a:schemeClr val="lt1"/>
-          </a:fontRef>
-        </p:style>
-        <p:txBody>
-          <a:bodyPr rtlCol="0" anchor="ctr"/>
-          <a:lstStyle/>
-          <a:p>
-            <a:pPr algn="ctr"/>
-            <a:endParaRPr lang="en-US"/>
-          </a:p>
-        </p:txBody>
-      </p:sp>
-      <p:cxnSp>
-        <p:nvCxnSpPr>
-          <p:cNvPr id="41" name="Straight Connector 40">
-            <a:extLst>
-              <a:ext uri="{FF2B5EF4-FFF2-40B4-BE49-F238E27FC236}">
-                <a16:creationId xmlns:a16="http://schemas.microsoft.com/office/drawing/2014/main" id="{7216AC2F-0177-4F4F-A248-AD59D1AAA510}"/>
-              </a:ext>
-            </a:extLst>
-          </p:cNvPr>
-          <p:cNvCxnSpPr>
-            <a:cxnSpLocks/>
-          </p:cNvCxnSpPr>
-          <p:nvPr/>
-        </p:nvCxnSpPr>
-        <p:spPr>
-          <a:xfrm flipH="1">
-            <a:off x="2916862" y="2955756"/>
-            <a:ext cx="662706" cy="941746"/>
-          </a:xfrm>
-          <a:prstGeom prst="line">
-            <a:avLst/>
-          </a:prstGeom>
-          <a:ln w="63500"/>
-        </p:spPr>
-        <p:style>
-          <a:lnRef idx="1">
-            <a:schemeClr val="accent1"/>
-          </a:lnRef>
-          <a:fillRef idx="0">
-            <a:schemeClr val="accent1"/>
-          </a:fillRef>
-          <a:effectRef idx="0">
-            <a:schemeClr val="accent1"/>
-          </a:effectRef>
-          <a:fontRef idx="minor">
-            <a:schemeClr val="tx1"/>
-          </a:fontRef>
-        </p:style>
-      </p:cxnSp>
-      <p:sp>
-        <p:nvSpPr>
-          <p:cNvPr id="42" name="Rectangle 41">
-            <a:extLst>
-              <a:ext uri="{FF2B5EF4-FFF2-40B4-BE49-F238E27FC236}">
-                <a16:creationId xmlns:a16="http://schemas.microsoft.com/office/drawing/2014/main" id="{67915EE0-B9A4-9E43-BC51-B9F763510F2C}"/>
-              </a:ext>
-            </a:extLst>
-          </p:cNvPr>
-          <p:cNvSpPr/>
-          <p:nvPr/>
-        </p:nvSpPr>
-        <p:spPr>
-          <a:xfrm>
-            <a:off x="3703607" y="3470927"/>
-            <a:ext cx="294022" cy="294022"/>
-          </a:xfrm>
-          <a:prstGeom prst="rect">
-            <a:avLst/>
-          </a:prstGeom>
-        </p:spPr>
-        <p:style>
-          <a:lnRef idx="2">
-            <a:schemeClr val="accent1">
-              <a:shade val="50000"/>
-            </a:schemeClr>
-          </a:lnRef>
-          <a:fillRef idx="1">
-            <a:schemeClr val="accent1"/>
-          </a:fillRef>
-          <a:effectRef idx="0">
-            <a:schemeClr val="accent1"/>
-          </a:effectRef>
-          <a:fontRef idx="minor">
-            <a:schemeClr val="lt1"/>
-          </a:fontRef>
-        </p:style>
-        <p:txBody>
-          <a:bodyPr rtlCol="0" anchor="ctr"/>
-          <a:lstStyle/>
-          <a:p>
-            <a:pPr algn="ctr"/>
-            <a:endParaRPr lang="en-US"/>
-          </a:p>
-        </p:txBody>
-      </p:sp>
-      <p:sp>
-        <p:nvSpPr>
-          <p:cNvPr id="43" name="Rectangle 42">
-            <a:extLst>
-              <a:ext uri="{FF2B5EF4-FFF2-40B4-BE49-F238E27FC236}">
-                <a16:creationId xmlns:a16="http://schemas.microsoft.com/office/drawing/2014/main" id="{B3077243-4022-6A45-A43A-6703C1B7C220}"/>
-              </a:ext>
-            </a:extLst>
-          </p:cNvPr>
-          <p:cNvSpPr/>
-          <p:nvPr/>
-        </p:nvSpPr>
-        <p:spPr>
-          <a:xfrm>
-            <a:off x="4050704" y="3123524"/>
-            <a:ext cx="294022" cy="294022"/>
-          </a:xfrm>
-          <a:prstGeom prst="rect">
-            <a:avLst/>
-          </a:prstGeom>
-          <a:noFill/>
-        </p:spPr>
-        <p:style>
-          <a:lnRef idx="2">
-            <a:schemeClr val="accent1">
-              <a:shade val="50000"/>
-            </a:schemeClr>
-          </a:lnRef>
-          <a:fillRef idx="1">
-            <a:schemeClr val="accent1"/>
-          </a:fillRef>
-          <a:effectRef idx="0">
-            <a:schemeClr val="accent1"/>
-          </a:effectRef>
-          <a:fontRef idx="minor">
-            <a:schemeClr val="lt1"/>
-          </a:fontRef>
-        </p:style>
-        <p:txBody>
-          <a:bodyPr rtlCol="0" anchor="ctr"/>
-          <a:lstStyle/>
-          <a:p>
-            <a:pPr algn="ctr"/>
-            <a:endParaRPr lang="en-US"/>
-          </a:p>
-        </p:txBody>
-      </p:sp>
-      <p:sp>
-        <p:nvSpPr>
-          <p:cNvPr id="44" name="Rectangle 43">
-            <a:extLst>
-              <a:ext uri="{FF2B5EF4-FFF2-40B4-BE49-F238E27FC236}">
-                <a16:creationId xmlns:a16="http://schemas.microsoft.com/office/drawing/2014/main" id="{A8BF1D14-9BC5-D64E-BD66-C5891F3A6F5F}"/>
-              </a:ext>
-            </a:extLst>
-          </p:cNvPr>
-          <p:cNvSpPr/>
-          <p:nvPr/>
-        </p:nvSpPr>
-        <p:spPr>
-          <a:xfrm>
-            <a:off x="4050704" y="3473911"/>
-            <a:ext cx="294022" cy="294022"/>
-          </a:xfrm>
-          <a:prstGeom prst="rect">
-            <a:avLst/>
-          </a:prstGeom>
-          <a:noFill/>
-        </p:spPr>
-        <p:style>
-          <a:lnRef idx="2">
-            <a:schemeClr val="accent1">
-              <a:shade val="50000"/>
-            </a:schemeClr>
-          </a:lnRef>
-          <a:fillRef idx="1">
-            <a:schemeClr val="accent1"/>
-          </a:fillRef>
-          <a:effectRef idx="0">
-            <a:schemeClr val="accent1"/>
-          </a:effectRef>
-          <a:fontRef idx="minor">
-            <a:schemeClr val="lt1"/>
-          </a:fontRef>
-        </p:style>
-        <p:txBody>
-          <a:bodyPr rtlCol="0" anchor="ctr"/>
-          <a:lstStyle/>
-          <a:p>
-            <a:pPr algn="ctr"/>
-            <a:endParaRPr lang="en-US"/>
-          </a:p>
-        </p:txBody>
-      </p:sp>
-      <p:sp>
-        <p:nvSpPr>
-          <p:cNvPr id="45" name="Rectangle 44">
-            <a:extLst>
-              <a:ext uri="{FF2B5EF4-FFF2-40B4-BE49-F238E27FC236}">
-                <a16:creationId xmlns:a16="http://schemas.microsoft.com/office/drawing/2014/main" id="{37E9A8BB-544B-EA4E-BE4C-242E32E8970B}"/>
-              </a:ext>
-            </a:extLst>
-          </p:cNvPr>
-          <p:cNvSpPr/>
-          <p:nvPr/>
-        </p:nvSpPr>
-        <p:spPr>
-          <a:xfrm>
-            <a:off x="2118123" y="3128173"/>
-            <a:ext cx="294022" cy="294022"/>
-          </a:xfrm>
-          <a:prstGeom prst="rect">
-            <a:avLst/>
-          </a:prstGeom>
-        </p:spPr>
-        <p:style>
-          <a:lnRef idx="2">
-            <a:schemeClr val="accent1">
-              <a:shade val="50000"/>
-            </a:schemeClr>
-          </a:lnRef>
-          <a:fillRef idx="1">
-            <a:schemeClr val="accent1"/>
-          </a:fillRef>
-          <a:effectRef idx="0">
-            <a:schemeClr val="accent1"/>
-          </a:effectRef>
-          <a:fontRef idx="minor">
-            <a:schemeClr val="lt1"/>
-          </a:fontRef>
-        </p:style>
-        <p:txBody>
-          <a:bodyPr rtlCol="0" anchor="ctr"/>
-          <a:lstStyle/>
-          <a:p>
-            <a:pPr algn="ctr"/>
-            <a:endParaRPr lang="en-US"/>
-          </a:p>
-        </p:txBody>
-      </p:sp>
-      <p:sp>
-        <p:nvSpPr>
-          <p:cNvPr id="46" name="Rectangle 45">
-            <a:extLst>
-              <a:ext uri="{FF2B5EF4-FFF2-40B4-BE49-F238E27FC236}">
-                <a16:creationId xmlns:a16="http://schemas.microsoft.com/office/drawing/2014/main" id="{CAB3D40E-9C84-8548-8CA4-B956B80F99C7}"/>
-              </a:ext>
-            </a:extLst>
-          </p:cNvPr>
-          <p:cNvSpPr/>
-          <p:nvPr/>
-        </p:nvSpPr>
-        <p:spPr>
-          <a:xfrm>
-            <a:off x="2118123" y="3478560"/>
-            <a:ext cx="294022" cy="294022"/>
-          </a:xfrm>
-          <a:prstGeom prst="rect">
-            <a:avLst/>
-          </a:prstGeom>
-          <a:noFill/>
-        </p:spPr>
-        <p:style>
-          <a:lnRef idx="2">
-            <a:schemeClr val="accent1">
-              <a:shade val="50000"/>
-            </a:schemeClr>
-          </a:lnRef>
-          <a:fillRef idx="1">
-            <a:schemeClr val="accent1"/>
-          </a:fillRef>
-          <a:effectRef idx="0">
-            <a:schemeClr val="accent1"/>
-          </a:effectRef>
-          <a:fontRef idx="minor">
-            <a:schemeClr val="lt1"/>
-          </a:fontRef>
-        </p:style>
-        <p:txBody>
-          <a:bodyPr rtlCol="0" anchor="ctr"/>
-          <a:lstStyle/>
-          <a:p>
-            <a:pPr algn="ctr"/>
-            <a:endParaRPr lang="en-US"/>
-          </a:p>
-        </p:txBody>
-      </p:sp>
-      <p:sp>
-        <p:nvSpPr>
-          <p:cNvPr id="47" name="Rectangle 46">
-            <a:extLst>
-              <a:ext uri="{FF2B5EF4-FFF2-40B4-BE49-F238E27FC236}">
-                <a16:creationId xmlns:a16="http://schemas.microsoft.com/office/drawing/2014/main" id="{7EEC0E68-D6C9-D349-BA65-5BC090CE0FDE}"/>
-              </a:ext>
-            </a:extLst>
-          </p:cNvPr>
-          <p:cNvSpPr/>
-          <p:nvPr/>
-        </p:nvSpPr>
-        <p:spPr>
-          <a:xfrm>
-            <a:off x="2465220" y="3131157"/>
-            <a:ext cx="294022" cy="294022"/>
-          </a:xfrm>
-          <a:prstGeom prst="rect">
-            <a:avLst/>
-          </a:prstGeom>
-          <a:noFill/>
-        </p:spPr>
-        <p:style>
-          <a:lnRef idx="2">
-            <a:schemeClr val="accent1">
-              <a:shade val="50000"/>
-            </a:schemeClr>
-          </a:lnRef>
-          <a:fillRef idx="1">
-            <a:schemeClr val="accent1"/>
-          </a:fillRef>
-          <a:effectRef idx="0">
-            <a:schemeClr val="accent1"/>
-          </a:effectRef>
-          <a:fontRef idx="minor">
-            <a:schemeClr val="lt1"/>
-          </a:fontRef>
-        </p:style>
-        <p:txBody>
-          <a:bodyPr rtlCol="0" anchor="ctr"/>
-          <a:lstStyle/>
-          <a:p>
-            <a:pPr algn="ctr"/>
-            <a:endParaRPr lang="en-US"/>
-          </a:p>
-        </p:txBody>
-      </p:sp>
-      <p:sp>
-        <p:nvSpPr>
-          <p:cNvPr id="48" name="Rectangle 47">
-            <a:extLst>
-              <a:ext uri="{FF2B5EF4-FFF2-40B4-BE49-F238E27FC236}">
-                <a16:creationId xmlns:a16="http://schemas.microsoft.com/office/drawing/2014/main" id="{E4FF259A-3C7A-1D49-BD43-BF4B707EBCBE}"/>
-              </a:ext>
-            </a:extLst>
-          </p:cNvPr>
-          <p:cNvSpPr/>
-          <p:nvPr/>
-        </p:nvSpPr>
-        <p:spPr>
-          <a:xfrm>
-            <a:off x="2465220" y="3481544"/>
-            <a:ext cx="294022" cy="294022"/>
-          </a:xfrm>
-          <a:prstGeom prst="rect">
-            <a:avLst/>
-          </a:prstGeom>
-          <a:noFill/>
-        </p:spPr>
-        <p:style>
-          <a:lnRef idx="2">
-            <a:schemeClr val="accent1">
-              <a:shade val="50000"/>
-            </a:schemeClr>
-          </a:lnRef>
-          <a:fillRef idx="1">
-            <a:schemeClr val="accent1"/>
-          </a:fillRef>
-          <a:effectRef idx="0">
-            <a:schemeClr val="accent1"/>
-          </a:effectRef>
-          <a:fontRef idx="minor">
-            <a:schemeClr val="lt1"/>
-          </a:fontRef>
-        </p:style>
-        <p:txBody>
-          <a:bodyPr rtlCol="0" anchor="ctr"/>
-          <a:lstStyle/>
-          <a:p>
-            <a:pPr algn="ctr"/>
-            <a:endParaRPr lang="en-US"/>
-          </a:p>
-        </p:txBody>
-      </p:sp>
-      <p:sp>
-        <p:nvSpPr>
-          <p:cNvPr id="49" name="Rectangle 48">
-            <a:extLst>
-              <a:ext uri="{FF2B5EF4-FFF2-40B4-BE49-F238E27FC236}">
-                <a16:creationId xmlns:a16="http://schemas.microsoft.com/office/drawing/2014/main" id="{158E0873-B085-C849-8D7B-B426ACB395F7}"/>
-              </a:ext>
-            </a:extLst>
-          </p:cNvPr>
-          <p:cNvSpPr/>
-          <p:nvPr/>
-        </p:nvSpPr>
-        <p:spPr>
-          <a:xfrm>
-            <a:off x="3711629" y="5334349"/>
-            <a:ext cx="294022" cy="294022"/>
-          </a:xfrm>
-          <a:prstGeom prst="rect">
-            <a:avLst/>
-          </a:prstGeom>
-        </p:spPr>
-        <p:style>
-          <a:lnRef idx="2">
-            <a:schemeClr val="accent1">
-              <a:shade val="50000"/>
-            </a:schemeClr>
-          </a:lnRef>
-          <a:fillRef idx="1">
-            <a:schemeClr val="accent1"/>
-          </a:fillRef>
-          <a:effectRef idx="0">
-            <a:schemeClr val="accent1"/>
-          </a:effectRef>
-          <a:fontRef idx="minor">
-            <a:schemeClr val="lt1"/>
-          </a:fontRef>
-        </p:style>
-        <p:txBody>
-          <a:bodyPr rtlCol="0" anchor="ctr"/>
-          <a:lstStyle/>
-          <a:p>
-            <a:pPr algn="ctr"/>
-            <a:endParaRPr lang="en-US"/>
-          </a:p>
-        </p:txBody>
-      </p:sp>
-      <p:cxnSp>
-        <p:nvCxnSpPr>
-          <p:cNvPr id="50" name="Straight Connector 49">
-            <a:extLst>
-              <a:ext uri="{FF2B5EF4-FFF2-40B4-BE49-F238E27FC236}">
-                <a16:creationId xmlns:a16="http://schemas.microsoft.com/office/drawing/2014/main" id="{9E49F533-0A29-9744-BFFA-EF2A046C30B8}"/>
-              </a:ext>
-            </a:extLst>
-          </p:cNvPr>
-          <p:cNvCxnSpPr>
-            <a:cxnSpLocks/>
-          </p:cNvCxnSpPr>
-          <p:nvPr/>
-        </p:nvCxnSpPr>
-        <p:spPr>
-          <a:xfrm flipH="1">
-            <a:off x="2924884" y="5169565"/>
-            <a:ext cx="662706" cy="941746"/>
-          </a:xfrm>
-          <a:prstGeom prst="line">
-            <a:avLst/>
-          </a:prstGeom>
-          <a:ln w="63500"/>
-        </p:spPr>
-        <p:style>
-          <a:lnRef idx="1">
-            <a:schemeClr val="accent1"/>
-          </a:lnRef>
-          <a:fillRef idx="0">
-            <a:schemeClr val="accent1"/>
-          </a:fillRef>
-          <a:effectRef idx="0">
-            <a:schemeClr val="accent1"/>
-          </a:effectRef>
-          <a:fontRef idx="minor">
-            <a:schemeClr val="tx1"/>
-          </a:fontRef>
-        </p:style>
-      </p:cxnSp>
-      <p:sp>
-        <p:nvSpPr>
-          <p:cNvPr id="51" name="Rectangle 50">
-            <a:extLst>
-              <a:ext uri="{FF2B5EF4-FFF2-40B4-BE49-F238E27FC236}">
-                <a16:creationId xmlns:a16="http://schemas.microsoft.com/office/drawing/2014/main" id="{DB8514BA-6284-2E45-8AB6-2CCAD94E079D}"/>
-              </a:ext>
-            </a:extLst>
-          </p:cNvPr>
-          <p:cNvSpPr/>
-          <p:nvPr/>
-        </p:nvSpPr>
-        <p:spPr>
-          <a:xfrm>
-            <a:off x="3711629" y="5684736"/>
-            <a:ext cx="294022" cy="294022"/>
-          </a:xfrm>
-          <a:prstGeom prst="rect">
-            <a:avLst/>
-          </a:prstGeom>
-          <a:noFill/>
-        </p:spPr>
-        <p:style>
-          <a:lnRef idx="2">
-            <a:schemeClr val="accent1">
-              <a:shade val="50000"/>
-            </a:schemeClr>
-          </a:lnRef>
-          <a:fillRef idx="1">
-            <a:schemeClr val="accent1"/>
-          </a:fillRef>
-          <a:effectRef idx="0">
-            <a:schemeClr val="accent1"/>
-          </a:effectRef>
-          <a:fontRef idx="minor">
-            <a:schemeClr val="lt1"/>
-          </a:fontRef>
-        </p:style>
-        <p:txBody>
-          <a:bodyPr rtlCol="0" anchor="ctr"/>
-          <a:lstStyle/>
-          <a:p>
-            <a:pPr algn="ctr"/>
-            <a:endParaRPr lang="en-US"/>
-          </a:p>
-        </p:txBody>
-      </p:sp>
-      <p:sp>
-        <p:nvSpPr>
-          <p:cNvPr id="52" name="Rectangle 51">
-            <a:extLst>
-              <a:ext uri="{FF2B5EF4-FFF2-40B4-BE49-F238E27FC236}">
-                <a16:creationId xmlns:a16="http://schemas.microsoft.com/office/drawing/2014/main" id="{C97CA396-BE2A-834C-ABA5-36A8CEF46151}"/>
-              </a:ext>
-            </a:extLst>
-          </p:cNvPr>
-          <p:cNvSpPr/>
-          <p:nvPr/>
-        </p:nvSpPr>
-        <p:spPr>
-          <a:xfrm>
-            <a:off x="4058726" y="5337333"/>
-            <a:ext cx="294022" cy="294022"/>
-          </a:xfrm>
-          <a:prstGeom prst="rect">
-            <a:avLst/>
-          </a:prstGeom>
-        </p:spPr>
-        <p:style>
-          <a:lnRef idx="2">
-            <a:schemeClr val="accent1">
-              <a:shade val="50000"/>
-            </a:schemeClr>
-          </a:lnRef>
-          <a:fillRef idx="1">
-            <a:schemeClr val="accent1"/>
-          </a:fillRef>
-          <a:effectRef idx="0">
-            <a:schemeClr val="accent1"/>
-          </a:effectRef>
-          <a:fontRef idx="minor">
-            <a:schemeClr val="lt1"/>
-          </a:fontRef>
-        </p:style>
-        <p:txBody>
-          <a:bodyPr rtlCol="0" anchor="ctr"/>
-          <a:lstStyle/>
-          <a:p>
-            <a:pPr algn="ctr"/>
-            <a:endParaRPr lang="en-US"/>
-          </a:p>
-        </p:txBody>
-      </p:sp>
-      <p:sp>
-        <p:nvSpPr>
-          <p:cNvPr id="53" name="Rectangle 52">
-            <a:extLst>
-              <a:ext uri="{FF2B5EF4-FFF2-40B4-BE49-F238E27FC236}">
-                <a16:creationId xmlns:a16="http://schemas.microsoft.com/office/drawing/2014/main" id="{375565C6-7939-054A-A0E3-FB44858927E5}"/>
-              </a:ext>
-            </a:extLst>
-          </p:cNvPr>
-          <p:cNvSpPr/>
-          <p:nvPr/>
-        </p:nvSpPr>
-        <p:spPr>
-          <a:xfrm>
-            <a:off x="4058726" y="5687720"/>
-            <a:ext cx="294022" cy="294022"/>
-          </a:xfrm>
-          <a:prstGeom prst="rect">
-            <a:avLst/>
-          </a:prstGeom>
-          <a:noFill/>
-        </p:spPr>
-        <p:style>
-          <a:lnRef idx="2">
-            <a:schemeClr val="accent1">
-              <a:shade val="50000"/>
-            </a:schemeClr>
-          </a:lnRef>
-          <a:fillRef idx="1">
-            <a:schemeClr val="accent1"/>
-          </a:fillRef>
-          <a:effectRef idx="0">
-            <a:schemeClr val="accent1"/>
-          </a:effectRef>
-          <a:fontRef idx="minor">
-            <a:schemeClr val="lt1"/>
-          </a:fontRef>
-        </p:style>
-        <p:txBody>
-          <a:bodyPr rtlCol="0" anchor="ctr"/>
-          <a:lstStyle/>
-          <a:p>
-            <a:pPr algn="ctr"/>
-            <a:endParaRPr lang="en-US"/>
-          </a:p>
-        </p:txBody>
-      </p:sp>
-      <p:sp>
-        <p:nvSpPr>
-          <p:cNvPr id="54" name="Rectangle 53">
-            <a:extLst>
-              <a:ext uri="{FF2B5EF4-FFF2-40B4-BE49-F238E27FC236}">
-                <a16:creationId xmlns:a16="http://schemas.microsoft.com/office/drawing/2014/main" id="{8E68F321-7945-1F42-B2E9-884B98598712}"/>
-              </a:ext>
-            </a:extLst>
-          </p:cNvPr>
-          <p:cNvSpPr/>
-          <p:nvPr/>
-        </p:nvSpPr>
-        <p:spPr>
-          <a:xfrm>
-            <a:off x="2126145" y="5341982"/>
-            <a:ext cx="294022" cy="294022"/>
-          </a:xfrm>
-          <a:prstGeom prst="rect">
-            <a:avLst/>
-          </a:prstGeom>
-        </p:spPr>
-        <p:style>
-          <a:lnRef idx="2">
-            <a:schemeClr val="accent1">
-              <a:shade val="50000"/>
-            </a:schemeClr>
-          </a:lnRef>
-          <a:fillRef idx="1">
-            <a:schemeClr val="accent1"/>
-          </a:fillRef>
-          <a:effectRef idx="0">
-            <a:schemeClr val="accent1"/>
-          </a:effectRef>
-          <a:fontRef idx="minor">
-            <a:schemeClr val="lt1"/>
-          </a:fontRef>
-        </p:style>
-        <p:txBody>
-          <a:bodyPr rtlCol="0" anchor="ctr"/>
-          <a:lstStyle/>
-          <a:p>
-            <a:pPr algn="ctr"/>
-            <a:endParaRPr lang="en-US"/>
-          </a:p>
-        </p:txBody>
-      </p:sp>
-      <p:sp>
-        <p:nvSpPr>
-          <p:cNvPr id="55" name="Rectangle 54">
-            <a:extLst>
-              <a:ext uri="{FF2B5EF4-FFF2-40B4-BE49-F238E27FC236}">
-                <a16:creationId xmlns:a16="http://schemas.microsoft.com/office/drawing/2014/main" id="{8D68E3CF-2745-8441-8A12-8B5B00C392A2}"/>
-              </a:ext>
-            </a:extLst>
-          </p:cNvPr>
-          <p:cNvSpPr/>
-          <p:nvPr/>
-        </p:nvSpPr>
-        <p:spPr>
-          <a:xfrm>
-            <a:off x="2126145" y="5692369"/>
-            <a:ext cx="294022" cy="294022"/>
-          </a:xfrm>
-          <a:prstGeom prst="rect">
-            <a:avLst/>
-          </a:prstGeom>
-          <a:noFill/>
-        </p:spPr>
-        <p:style>
-          <a:lnRef idx="2">
-            <a:schemeClr val="accent1">
-              <a:shade val="50000"/>
-            </a:schemeClr>
-          </a:lnRef>
-          <a:fillRef idx="1">
-            <a:schemeClr val="accent1"/>
-          </a:fillRef>
-          <a:effectRef idx="0">
-            <a:schemeClr val="accent1"/>
-          </a:effectRef>
-          <a:fontRef idx="minor">
-            <a:schemeClr val="lt1"/>
-          </a:fontRef>
-        </p:style>
-        <p:txBody>
-          <a:bodyPr rtlCol="0" anchor="ctr"/>
-          <a:lstStyle/>
-          <a:p>
-            <a:pPr algn="ctr"/>
-            <a:endParaRPr lang="en-US"/>
-          </a:p>
-        </p:txBody>
-      </p:sp>
-      <p:sp>
-        <p:nvSpPr>
-          <p:cNvPr id="56" name="Rectangle 55">
-            <a:extLst>
-              <a:ext uri="{FF2B5EF4-FFF2-40B4-BE49-F238E27FC236}">
-                <a16:creationId xmlns:a16="http://schemas.microsoft.com/office/drawing/2014/main" id="{4386F94C-9DFA-AF44-BAEF-2DBDA547CB18}"/>
-              </a:ext>
-            </a:extLst>
-          </p:cNvPr>
-          <p:cNvSpPr/>
-          <p:nvPr/>
-        </p:nvSpPr>
-        <p:spPr>
-          <a:xfrm>
-            <a:off x="2473242" y="5344966"/>
-            <a:ext cx="294022" cy="294022"/>
-          </a:xfrm>
-          <a:prstGeom prst="rect">
-            <a:avLst/>
-          </a:prstGeom>
-          <a:noFill/>
-        </p:spPr>
-        <p:style>
-          <a:lnRef idx="2">
-            <a:schemeClr val="accent1">
-              <a:shade val="50000"/>
-            </a:schemeClr>
-          </a:lnRef>
-          <a:fillRef idx="1">
-            <a:schemeClr val="accent1"/>
-          </a:fillRef>
-          <a:effectRef idx="0">
-            <a:schemeClr val="accent1"/>
-          </a:effectRef>
-          <a:fontRef idx="minor">
-            <a:schemeClr val="lt1"/>
-          </a:fontRef>
-        </p:style>
-        <p:txBody>
-          <a:bodyPr rtlCol="0" anchor="ctr"/>
-          <a:lstStyle/>
-          <a:p>
-            <a:pPr algn="ctr"/>
-            <a:endParaRPr lang="en-US"/>
-          </a:p>
-        </p:txBody>
-      </p:sp>
-      <p:sp>
-        <p:nvSpPr>
-          <p:cNvPr id="57" name="Rectangle 56">
-            <a:extLst>
-              <a:ext uri="{FF2B5EF4-FFF2-40B4-BE49-F238E27FC236}">
-                <a16:creationId xmlns:a16="http://schemas.microsoft.com/office/drawing/2014/main" id="{24567E88-9B35-A947-9CA2-8485DA9E8996}"/>
-              </a:ext>
-            </a:extLst>
-          </p:cNvPr>
-          <p:cNvSpPr/>
-          <p:nvPr/>
-        </p:nvSpPr>
-        <p:spPr>
-          <a:xfrm>
-            <a:off x="2473242" y="5695353"/>
-            <a:ext cx="294022" cy="294022"/>
-          </a:xfrm>
-          <a:prstGeom prst="rect">
-            <a:avLst/>
-          </a:prstGeom>
-          <a:noFill/>
-        </p:spPr>
-        <p:style>
-          <a:lnRef idx="2">
-            <a:schemeClr val="accent1">
-              <a:shade val="50000"/>
-            </a:schemeClr>
-          </a:lnRef>
-          <a:fillRef idx="1">
-            <a:schemeClr val="accent1"/>
-          </a:fillRef>
-          <a:effectRef idx="0">
-            <a:schemeClr val="accent1"/>
-          </a:effectRef>
-          <a:fontRef idx="minor">
-            <a:schemeClr val="lt1"/>
-          </a:fontRef>
-        </p:style>
-        <p:txBody>
-          <a:bodyPr rtlCol="0" anchor="ctr"/>
-          <a:lstStyle/>
-          <a:p>
-            <a:pPr algn="ctr"/>
-            <a:endParaRPr lang="en-US"/>
-          </a:p>
-        </p:txBody>
-      </p:sp>
-      <p:pic>
-        <p:nvPicPr>
-          <p:cNvPr id="2" name="Picture 1">
-            <a:extLst>
-              <a:ext uri="{FF2B5EF4-FFF2-40B4-BE49-F238E27FC236}">
-                <a16:creationId xmlns:a16="http://schemas.microsoft.com/office/drawing/2014/main" id="{B4DC31EE-51D9-284B-A6D4-A39218EA598D}"/>
-              </a:ext>
-            </a:extLst>
-          </p:cNvPr>
-          <p:cNvPicPr>
-            <a:picLocks noChangeAspect="1"/>
-          </p:cNvPicPr>
-          <p:nvPr/>
-        </p:nvPicPr>
-        <p:blipFill>
-          <a:blip r:embed="rId4" cstate="email">
-            <a:extLst>
-              <a:ext uri="{28A0092B-C50C-407E-A947-70E740481C1C}">
-                <a14:useLocalDpi xmlns:a14="http://schemas.microsoft.com/office/drawing/2010/main"/>
-              </a:ext>
-            </a:extLst>
-          </a:blip>
-          <a:stretch>
-            <a:fillRect/>
-          </a:stretch>
-        </p:blipFill>
-        <p:spPr>
-          <a:xfrm>
-            <a:off x="6021706" y="2355415"/>
-            <a:ext cx="2418531" cy="1049685"/>
-          </a:xfrm>
-          <a:prstGeom prst="rect">
-            <a:avLst/>
-          </a:prstGeom>
-        </p:spPr>
-      </p:pic>
-      <p:pic>
-        <p:nvPicPr>
-          <p:cNvPr id="5" name="Picture 4">
-            <a:extLst>
-              <a:ext uri="{FF2B5EF4-FFF2-40B4-BE49-F238E27FC236}">
-                <a16:creationId xmlns:a16="http://schemas.microsoft.com/office/drawing/2014/main" id="{B968C331-C9F4-444C-B693-8DC0DAB85D60}"/>
-              </a:ext>
-            </a:extLst>
-          </p:cNvPr>
-          <p:cNvPicPr>
-            <a:picLocks noChangeAspect="1"/>
-          </p:cNvPicPr>
-          <p:nvPr/>
-        </p:nvPicPr>
-        <p:blipFill>
-          <a:blip r:embed="rId5" cstate="email">
-            <a:extLst>
-              <a:ext uri="{28A0092B-C50C-407E-A947-70E740481C1C}">
-                <a14:useLocalDpi xmlns:a14="http://schemas.microsoft.com/office/drawing/2010/main"/>
-              </a:ext>
-            </a:extLst>
-          </a:blip>
-          <a:stretch>
-            <a:fillRect/>
-          </a:stretch>
-        </p:blipFill>
-        <p:spPr>
-          <a:xfrm>
-            <a:off x="6021706" y="4721776"/>
-            <a:ext cx="1301750" cy="1562100"/>
-          </a:xfrm>
-          <a:prstGeom prst="rect">
-            <a:avLst/>
-          </a:prstGeom>
-        </p:spPr>
-      </p:pic>
-      <p:sp>
-        <p:nvSpPr>
-          <p:cNvPr id="6" name="TextBox 5">
-            <a:extLst>
-              <a:ext uri="{FF2B5EF4-FFF2-40B4-BE49-F238E27FC236}">
-                <a16:creationId xmlns:a16="http://schemas.microsoft.com/office/drawing/2014/main" id="{9BEA9CC4-2A34-5A49-839C-B3E39045925D}"/>
-              </a:ext>
-            </a:extLst>
-          </p:cNvPr>
-          <p:cNvSpPr txBox="1"/>
-          <p:nvPr/>
-        </p:nvSpPr>
-        <p:spPr>
-          <a:xfrm>
-            <a:off x="7484897" y="5545528"/>
-            <a:ext cx="3649579" cy="923330"/>
-          </a:xfrm>
-          <a:prstGeom prst="rect">
-            <a:avLst/>
-          </a:prstGeom>
-          <a:noFill/>
-        </p:spPr>
-        <p:txBody>
-          <a:bodyPr wrap="square" rtlCol="0">
-            <a:spAutoFit/>
-          </a:bodyPr>
-          <a:lstStyle/>
-          <a:p>
-            <a:r>
-              <a:rPr lang="en-US" dirty="0"/>
-              <a:t>Nuclear Bomb </a:t>
-            </a:r>
-          </a:p>
-          <a:p>
-            <a:r>
-              <a:rPr lang="en-US" dirty="0"/>
-              <a:t>  - low precision (many FP)</a:t>
-            </a:r>
-          </a:p>
-          <a:p>
-            <a:r>
-              <a:rPr lang="en-US" dirty="0"/>
-              <a:t>  - high recall (get everything)</a:t>
-            </a:r>
-          </a:p>
-        </p:txBody>
-      </p:sp>
-      <p:sp>
-        <p:nvSpPr>
-          <p:cNvPr id="58" name="TextBox 57">
-            <a:extLst>
-              <a:ext uri="{FF2B5EF4-FFF2-40B4-BE49-F238E27FC236}">
-                <a16:creationId xmlns:a16="http://schemas.microsoft.com/office/drawing/2014/main" id="{78F8E667-8B30-6C42-936C-323FB68A2869}"/>
-              </a:ext>
-            </a:extLst>
-          </p:cNvPr>
-          <p:cNvSpPr txBox="1"/>
-          <p:nvPr/>
-        </p:nvSpPr>
-        <p:spPr>
-          <a:xfrm>
-            <a:off x="7484896" y="3149083"/>
-            <a:ext cx="3649579" cy="923330"/>
-          </a:xfrm>
-          <a:prstGeom prst="rect">
-            <a:avLst/>
-          </a:prstGeom>
-          <a:noFill/>
-        </p:spPr>
-        <p:txBody>
-          <a:bodyPr wrap="square" rtlCol="0">
-            <a:spAutoFit/>
-          </a:bodyPr>
-          <a:lstStyle/>
-          <a:p>
-            <a:r>
-              <a:rPr lang="en-US" dirty="0"/>
-              <a:t>Sniper</a:t>
-            </a:r>
-          </a:p>
-          <a:p>
-            <a:r>
-              <a:rPr lang="en-US" dirty="0"/>
-              <a:t>  - high precision (zero FP)</a:t>
-            </a:r>
-          </a:p>
-          <a:p>
-            <a:r>
-              <a:rPr lang="en-US" dirty="0"/>
-              <a:t>  - low recall (can't get everything)</a:t>
-            </a:r>
-          </a:p>
-        </p:txBody>
-      </p:sp>
-      <p:pic>
-        <p:nvPicPr>
-          <p:cNvPr id="7" name="Picture 6">
-            <a:extLst>
-              <a:ext uri="{FF2B5EF4-FFF2-40B4-BE49-F238E27FC236}">
-                <a16:creationId xmlns:a16="http://schemas.microsoft.com/office/drawing/2014/main" id="{266FCCA6-C9C0-FC49-9598-EC5E4B220A7B}"/>
-              </a:ext>
-            </a:extLst>
-          </p:cNvPr>
-          <p:cNvPicPr>
-            <a:picLocks noChangeAspect="1"/>
-          </p:cNvPicPr>
-          <p:nvPr/>
-        </p:nvPicPr>
-        <p:blipFill>
-          <a:blip r:embed="rId6" cstate="email">
-            <a:extLst>
-              <a:ext uri="{28A0092B-C50C-407E-A947-70E740481C1C}">
-                <a14:useLocalDpi xmlns:a14="http://schemas.microsoft.com/office/drawing/2010/main"/>
-              </a:ext>
-            </a:extLst>
-          </a:blip>
-          <a:stretch>
-            <a:fillRect/>
-          </a:stretch>
-        </p:blipFill>
-        <p:spPr>
-          <a:xfrm>
-            <a:off x="6015299" y="527906"/>
-            <a:ext cx="1346129" cy="1346129"/>
-          </a:xfrm>
-          <a:prstGeom prst="rect">
-            <a:avLst/>
-          </a:prstGeom>
-        </p:spPr>
-      </p:pic>
     </p:spTree>
     <p:extLst>
       <p:ext uri="{BB962C8B-B14F-4D97-AF65-F5344CB8AC3E}">
-        <p14:creationId xmlns:p14="http://schemas.microsoft.com/office/powerpoint/2010/main" val="1412137750"/>
+        <p14:creationId xmlns:p14="http://schemas.microsoft.com/office/powerpoint/2010/main" val="158420829"/>
       </p:ext>
     </p:extLst>
   </p:cSld>
@@ -11478,6 +12015,1717 @@
           <a:chExt cx="0" cy="0"/>
         </a:xfrm>
       </p:grpSpPr>
+      <p:pic>
+        <p:nvPicPr>
+          <p:cNvPr id="3" name="Picture 2">
+            <a:extLst>
+              <a:ext uri="{FF2B5EF4-FFF2-40B4-BE49-F238E27FC236}">
+                <a16:creationId xmlns:a16="http://schemas.microsoft.com/office/drawing/2014/main" id="{4D8283FA-2D57-6143-BD4D-5E14DD32FD69}"/>
+              </a:ext>
+            </a:extLst>
+          </p:cNvPr>
+          <p:cNvPicPr>
+            <a:picLocks noChangeAspect="1"/>
+          </p:cNvPicPr>
+          <p:nvPr/>
+        </p:nvPicPr>
+        <p:blipFill>
+          <a:blip r:embed="rId3"/>
+          <a:stretch>
+            <a:fillRect/>
+          </a:stretch>
+        </p:blipFill>
+        <p:spPr>
+          <a:xfrm>
+            <a:off x="8943787" y="-1637"/>
+            <a:ext cx="3248213" cy="2817727"/>
+          </a:xfrm>
+          <a:prstGeom prst="rect">
+            <a:avLst/>
+          </a:prstGeom>
+        </p:spPr>
+      </p:pic>
+      <p:sp>
+        <p:nvSpPr>
+          <p:cNvPr id="8" name="Google Shape;88;p13">
+            <a:extLst>
+              <a:ext uri="{FF2B5EF4-FFF2-40B4-BE49-F238E27FC236}">
+                <a16:creationId xmlns:a16="http://schemas.microsoft.com/office/drawing/2014/main" id="{2B1BDB6E-ED89-9444-9CFB-7D7AF5C8172F}"/>
+              </a:ext>
+            </a:extLst>
+          </p:cNvPr>
+          <p:cNvSpPr txBox="1"/>
+          <p:nvPr/>
+        </p:nvSpPr>
+        <p:spPr>
+          <a:xfrm>
+            <a:off x="247177" y="159708"/>
+            <a:ext cx="4155858" cy="429251"/>
+          </a:xfrm>
+          <a:prstGeom prst="rect">
+            <a:avLst/>
+          </a:prstGeom>
+          <a:noFill/>
+          <a:ln>
+            <a:noFill/>
+          </a:ln>
+        </p:spPr>
+        <p:txBody>
+          <a:bodyPr spcFirstLastPara="1" wrap="square" lIns="91425" tIns="45700" rIns="91425" bIns="45700" anchor="t" anchorCtr="0">
+            <a:noAutofit/>
+          </a:bodyPr>
+          <a:lstStyle/>
+          <a:p>
+            <a:pPr marL="0" marR="0" lvl="0" indent="0" algn="l" rtl="0">
+              <a:spcBef>
+                <a:spcPts val="0"/>
+              </a:spcBef>
+              <a:spcAft>
+                <a:spcPts val="0"/>
+              </a:spcAft>
+              <a:buNone/>
+            </a:pPr>
+            <a:r>
+              <a:rPr lang="en-US" sz="2000" b="1" i="0" u="none" strike="noStrike" cap="none" dirty="0">
+                <a:solidFill>
+                  <a:schemeClr val="dk1"/>
+                </a:solidFill>
+                <a:latin typeface="Calibri"/>
+                <a:ea typeface="Calibri"/>
+                <a:cs typeface="Calibri"/>
+                <a:sym typeface="Calibri"/>
+              </a:rPr>
+              <a:t>Accuracy = sum(Diagonal) / sum(ALL)</a:t>
+            </a:r>
+          </a:p>
+        </p:txBody>
+      </p:sp>
+      <p:sp>
+        <p:nvSpPr>
+          <p:cNvPr id="12" name="Google Shape;88;p13">
+            <a:extLst>
+              <a:ext uri="{FF2B5EF4-FFF2-40B4-BE49-F238E27FC236}">
+                <a16:creationId xmlns:a16="http://schemas.microsoft.com/office/drawing/2014/main" id="{911526FC-858C-B54A-89E0-E40F21479EFA}"/>
+              </a:ext>
+            </a:extLst>
+          </p:cNvPr>
+          <p:cNvSpPr txBox="1"/>
+          <p:nvPr/>
+        </p:nvSpPr>
+        <p:spPr>
+          <a:xfrm>
+            <a:off x="226270" y="4572230"/>
+            <a:ext cx="4979394" cy="429251"/>
+          </a:xfrm>
+          <a:prstGeom prst="rect">
+            <a:avLst/>
+          </a:prstGeom>
+          <a:noFill/>
+          <a:ln>
+            <a:noFill/>
+          </a:ln>
+        </p:spPr>
+        <p:txBody>
+          <a:bodyPr spcFirstLastPara="1" wrap="square" lIns="91425" tIns="45700" rIns="91425" bIns="45700" anchor="t" anchorCtr="0">
+            <a:noAutofit/>
+          </a:bodyPr>
+          <a:lstStyle/>
+          <a:p>
+            <a:pPr marL="0" marR="0" lvl="0" indent="0" algn="l" rtl="0">
+              <a:spcBef>
+                <a:spcPts val="0"/>
+              </a:spcBef>
+              <a:spcAft>
+                <a:spcPts val="0"/>
+              </a:spcAft>
+              <a:buNone/>
+            </a:pPr>
+            <a:r>
+              <a:rPr lang="en-US" sz="2000" b="1" dirty="0">
+                <a:solidFill>
+                  <a:schemeClr val="dk1"/>
+                </a:solidFill>
+                <a:latin typeface="Calibri"/>
+                <a:cs typeface="Calibri"/>
+                <a:sym typeface="Calibri"/>
+              </a:rPr>
+              <a:t>Recall = TP / (TP+FN) = TP / </a:t>
+            </a:r>
+            <a:r>
+              <a:rPr lang="en-US" sz="2000" b="1" dirty="0" err="1">
+                <a:solidFill>
+                  <a:schemeClr val="dk1"/>
+                </a:solidFill>
+                <a:latin typeface="Calibri"/>
+                <a:cs typeface="Calibri"/>
+                <a:sym typeface="Calibri"/>
+              </a:rPr>
+              <a:t>Actual_Positives</a:t>
+            </a:r>
+            <a:endParaRPr sz="2000" dirty="0"/>
+          </a:p>
+          <a:p>
+            <a:pPr marL="0" marR="0" lvl="0" indent="0" algn="l" rtl="0">
+              <a:spcBef>
+                <a:spcPts val="0"/>
+              </a:spcBef>
+              <a:spcAft>
+                <a:spcPts val="0"/>
+              </a:spcAft>
+              <a:buNone/>
+            </a:pPr>
+            <a:endParaRPr sz="2000" dirty="0">
+              <a:solidFill>
+                <a:schemeClr val="dk1"/>
+              </a:solidFill>
+              <a:latin typeface="Calibri"/>
+              <a:ea typeface="Calibri"/>
+              <a:cs typeface="Calibri"/>
+              <a:sym typeface="Calibri"/>
+            </a:endParaRPr>
+          </a:p>
+        </p:txBody>
+      </p:sp>
+      <p:sp>
+        <p:nvSpPr>
+          <p:cNvPr id="13" name="Google Shape;88;p13">
+            <a:extLst>
+              <a:ext uri="{FF2B5EF4-FFF2-40B4-BE49-F238E27FC236}">
+                <a16:creationId xmlns:a16="http://schemas.microsoft.com/office/drawing/2014/main" id="{00CE273A-9856-814F-80A0-A0D131AA03C8}"/>
+              </a:ext>
+            </a:extLst>
+          </p:cNvPr>
+          <p:cNvSpPr txBox="1"/>
+          <p:nvPr/>
+        </p:nvSpPr>
+        <p:spPr>
+          <a:xfrm>
+            <a:off x="247176" y="2422320"/>
+            <a:ext cx="5712465" cy="505334"/>
+          </a:xfrm>
+          <a:prstGeom prst="rect">
+            <a:avLst/>
+          </a:prstGeom>
+          <a:noFill/>
+          <a:ln>
+            <a:noFill/>
+          </a:ln>
+        </p:spPr>
+        <p:txBody>
+          <a:bodyPr spcFirstLastPara="1" wrap="square" lIns="91425" tIns="45700" rIns="91425" bIns="45700" anchor="t" anchorCtr="0">
+            <a:noAutofit/>
+          </a:bodyPr>
+          <a:lstStyle/>
+          <a:p>
+            <a:pPr lvl="0"/>
+            <a:r>
+              <a:rPr lang="en-US" sz="2000" b="1" dirty="0">
+                <a:solidFill>
+                  <a:schemeClr val="dk1"/>
+                </a:solidFill>
+                <a:latin typeface="Calibri"/>
+                <a:cs typeface="Calibri"/>
+                <a:sym typeface="Calibri"/>
+              </a:rPr>
+              <a:t>Precision = TP / (TP+FP</a:t>
+            </a:r>
+            <a:r>
+              <a:rPr lang="en-US" sz="2000" b="1" dirty="0">
+                <a:solidFill>
+                  <a:schemeClr val="dk1"/>
+                </a:solidFill>
+                <a:cs typeface="Calibri"/>
+                <a:sym typeface="Calibri"/>
+              </a:rPr>
+              <a:t>) = TP / </a:t>
+            </a:r>
+            <a:r>
+              <a:rPr lang="en-US" sz="2000" b="1" dirty="0" err="1">
+                <a:solidFill>
+                  <a:schemeClr val="dk1"/>
+                </a:solidFill>
+                <a:cs typeface="Calibri"/>
+                <a:sym typeface="Calibri"/>
+              </a:rPr>
+              <a:t>Predicted_Positives</a:t>
+            </a:r>
+            <a:endParaRPr sz="2000" dirty="0">
+              <a:solidFill>
+                <a:schemeClr val="dk1"/>
+              </a:solidFill>
+              <a:latin typeface="Calibri"/>
+              <a:ea typeface="Calibri"/>
+              <a:cs typeface="Calibri"/>
+              <a:sym typeface="Calibri"/>
+            </a:endParaRPr>
+          </a:p>
+        </p:txBody>
+      </p:sp>
+      <p:sp>
+        <p:nvSpPr>
+          <p:cNvPr id="14" name="Rectangle 13">
+            <a:extLst>
+              <a:ext uri="{FF2B5EF4-FFF2-40B4-BE49-F238E27FC236}">
+                <a16:creationId xmlns:a16="http://schemas.microsoft.com/office/drawing/2014/main" id="{A149A53B-AD44-1146-A0BF-25CBD0891323}"/>
+              </a:ext>
+            </a:extLst>
+          </p:cNvPr>
+          <p:cNvSpPr/>
+          <p:nvPr/>
+        </p:nvSpPr>
+        <p:spPr>
+          <a:xfrm>
+            <a:off x="3703606" y="850584"/>
+            <a:ext cx="294022" cy="294022"/>
+          </a:xfrm>
+          <a:prstGeom prst="rect">
+            <a:avLst/>
+          </a:prstGeom>
+        </p:spPr>
+        <p:style>
+          <a:lnRef idx="2">
+            <a:schemeClr val="accent1">
+              <a:shade val="50000"/>
+            </a:schemeClr>
+          </a:lnRef>
+          <a:fillRef idx="1">
+            <a:schemeClr val="accent1"/>
+          </a:fillRef>
+          <a:effectRef idx="0">
+            <a:schemeClr val="accent1"/>
+          </a:effectRef>
+          <a:fontRef idx="minor">
+            <a:schemeClr val="lt1"/>
+          </a:fontRef>
+        </p:style>
+        <p:txBody>
+          <a:bodyPr rtlCol="0" anchor="ctr"/>
+          <a:lstStyle/>
+          <a:p>
+            <a:pPr algn="ctr"/>
+            <a:endParaRPr lang="en-US"/>
+          </a:p>
+        </p:txBody>
+      </p:sp>
+      <p:cxnSp>
+        <p:nvCxnSpPr>
+          <p:cNvPr id="22" name="Straight Connector 21">
+            <a:extLst>
+              <a:ext uri="{FF2B5EF4-FFF2-40B4-BE49-F238E27FC236}">
+                <a16:creationId xmlns:a16="http://schemas.microsoft.com/office/drawing/2014/main" id="{2428DF91-7CB5-7C4F-85CC-17D1E068A46B}"/>
+              </a:ext>
+            </a:extLst>
+          </p:cNvPr>
+          <p:cNvCxnSpPr>
+            <a:cxnSpLocks/>
+          </p:cNvCxnSpPr>
+          <p:nvPr/>
+        </p:nvCxnSpPr>
+        <p:spPr>
+          <a:xfrm flipH="1">
+            <a:off x="2916861" y="685800"/>
+            <a:ext cx="662706" cy="941746"/>
+          </a:xfrm>
+          <a:prstGeom prst="line">
+            <a:avLst/>
+          </a:prstGeom>
+          <a:ln w="63500"/>
+        </p:spPr>
+        <p:style>
+          <a:lnRef idx="1">
+            <a:schemeClr val="accent1"/>
+          </a:lnRef>
+          <a:fillRef idx="0">
+            <a:schemeClr val="accent1"/>
+          </a:fillRef>
+          <a:effectRef idx="0">
+            <a:schemeClr val="accent1"/>
+          </a:effectRef>
+          <a:fontRef idx="minor">
+            <a:schemeClr val="tx1"/>
+          </a:fontRef>
+        </p:style>
+      </p:cxnSp>
+      <p:sp>
+        <p:nvSpPr>
+          <p:cNvPr id="33" name="Rectangle 32">
+            <a:extLst>
+              <a:ext uri="{FF2B5EF4-FFF2-40B4-BE49-F238E27FC236}">
+                <a16:creationId xmlns:a16="http://schemas.microsoft.com/office/drawing/2014/main" id="{A5A08C01-7A38-A049-9823-C82C2EB96902}"/>
+              </a:ext>
+            </a:extLst>
+          </p:cNvPr>
+          <p:cNvSpPr/>
+          <p:nvPr/>
+        </p:nvSpPr>
+        <p:spPr>
+          <a:xfrm>
+            <a:off x="3703606" y="1200971"/>
+            <a:ext cx="294022" cy="294022"/>
+          </a:xfrm>
+          <a:prstGeom prst="rect">
+            <a:avLst/>
+          </a:prstGeom>
+        </p:spPr>
+        <p:style>
+          <a:lnRef idx="2">
+            <a:schemeClr val="accent1">
+              <a:shade val="50000"/>
+            </a:schemeClr>
+          </a:lnRef>
+          <a:fillRef idx="1">
+            <a:schemeClr val="accent1"/>
+          </a:fillRef>
+          <a:effectRef idx="0">
+            <a:schemeClr val="accent1"/>
+          </a:effectRef>
+          <a:fontRef idx="minor">
+            <a:schemeClr val="lt1"/>
+          </a:fontRef>
+        </p:style>
+        <p:txBody>
+          <a:bodyPr rtlCol="0" anchor="ctr"/>
+          <a:lstStyle/>
+          <a:p>
+            <a:pPr algn="ctr"/>
+            <a:endParaRPr lang="en-US"/>
+          </a:p>
+        </p:txBody>
+      </p:sp>
+      <p:sp>
+        <p:nvSpPr>
+          <p:cNvPr id="34" name="Rectangle 33">
+            <a:extLst>
+              <a:ext uri="{FF2B5EF4-FFF2-40B4-BE49-F238E27FC236}">
+                <a16:creationId xmlns:a16="http://schemas.microsoft.com/office/drawing/2014/main" id="{EB59FCFC-7742-B24F-B8B1-93C31745DA30}"/>
+              </a:ext>
+            </a:extLst>
+          </p:cNvPr>
+          <p:cNvSpPr/>
+          <p:nvPr/>
+        </p:nvSpPr>
+        <p:spPr>
+          <a:xfrm>
+            <a:off x="4050703" y="853568"/>
+            <a:ext cx="294022" cy="294022"/>
+          </a:xfrm>
+          <a:prstGeom prst="rect">
+            <a:avLst/>
+          </a:prstGeom>
+        </p:spPr>
+        <p:style>
+          <a:lnRef idx="2">
+            <a:schemeClr val="accent1">
+              <a:shade val="50000"/>
+            </a:schemeClr>
+          </a:lnRef>
+          <a:fillRef idx="1">
+            <a:schemeClr val="accent1"/>
+          </a:fillRef>
+          <a:effectRef idx="0">
+            <a:schemeClr val="accent1"/>
+          </a:effectRef>
+          <a:fontRef idx="minor">
+            <a:schemeClr val="lt1"/>
+          </a:fontRef>
+        </p:style>
+        <p:txBody>
+          <a:bodyPr rtlCol="0" anchor="ctr"/>
+          <a:lstStyle/>
+          <a:p>
+            <a:pPr algn="ctr"/>
+            <a:endParaRPr lang="en-US"/>
+          </a:p>
+        </p:txBody>
+      </p:sp>
+      <p:sp>
+        <p:nvSpPr>
+          <p:cNvPr id="35" name="Rectangle 34">
+            <a:extLst>
+              <a:ext uri="{FF2B5EF4-FFF2-40B4-BE49-F238E27FC236}">
+                <a16:creationId xmlns:a16="http://schemas.microsoft.com/office/drawing/2014/main" id="{04AA9930-BC63-374C-BDA9-AACA1FEC9CFA}"/>
+              </a:ext>
+            </a:extLst>
+          </p:cNvPr>
+          <p:cNvSpPr/>
+          <p:nvPr/>
+        </p:nvSpPr>
+        <p:spPr>
+          <a:xfrm>
+            <a:off x="4050703" y="1203955"/>
+            <a:ext cx="294022" cy="294022"/>
+          </a:xfrm>
+          <a:prstGeom prst="rect">
+            <a:avLst/>
+          </a:prstGeom>
+        </p:spPr>
+        <p:style>
+          <a:lnRef idx="2">
+            <a:schemeClr val="accent1">
+              <a:shade val="50000"/>
+            </a:schemeClr>
+          </a:lnRef>
+          <a:fillRef idx="1">
+            <a:schemeClr val="accent1"/>
+          </a:fillRef>
+          <a:effectRef idx="0">
+            <a:schemeClr val="accent1"/>
+          </a:effectRef>
+          <a:fontRef idx="minor">
+            <a:schemeClr val="lt1"/>
+          </a:fontRef>
+        </p:style>
+        <p:txBody>
+          <a:bodyPr rtlCol="0" anchor="ctr"/>
+          <a:lstStyle/>
+          <a:p>
+            <a:pPr algn="ctr"/>
+            <a:endParaRPr lang="en-US"/>
+          </a:p>
+        </p:txBody>
+      </p:sp>
+      <p:sp>
+        <p:nvSpPr>
+          <p:cNvPr id="36" name="Rectangle 35">
+            <a:extLst>
+              <a:ext uri="{FF2B5EF4-FFF2-40B4-BE49-F238E27FC236}">
+                <a16:creationId xmlns:a16="http://schemas.microsoft.com/office/drawing/2014/main" id="{803EF5E0-2203-954C-BBED-81EC8A345B35}"/>
+              </a:ext>
+            </a:extLst>
+          </p:cNvPr>
+          <p:cNvSpPr/>
+          <p:nvPr/>
+        </p:nvSpPr>
+        <p:spPr>
+          <a:xfrm>
+            <a:off x="2118122" y="858217"/>
+            <a:ext cx="294022" cy="294022"/>
+          </a:xfrm>
+          <a:prstGeom prst="rect">
+            <a:avLst/>
+          </a:prstGeom>
+        </p:spPr>
+        <p:style>
+          <a:lnRef idx="2">
+            <a:schemeClr val="accent1">
+              <a:shade val="50000"/>
+            </a:schemeClr>
+          </a:lnRef>
+          <a:fillRef idx="1">
+            <a:schemeClr val="accent1"/>
+          </a:fillRef>
+          <a:effectRef idx="0">
+            <a:schemeClr val="accent1"/>
+          </a:effectRef>
+          <a:fontRef idx="minor">
+            <a:schemeClr val="lt1"/>
+          </a:fontRef>
+        </p:style>
+        <p:txBody>
+          <a:bodyPr rtlCol="0" anchor="ctr"/>
+          <a:lstStyle/>
+          <a:p>
+            <a:pPr algn="ctr"/>
+            <a:endParaRPr lang="en-US"/>
+          </a:p>
+        </p:txBody>
+      </p:sp>
+      <p:sp>
+        <p:nvSpPr>
+          <p:cNvPr id="37" name="Rectangle 36">
+            <a:extLst>
+              <a:ext uri="{FF2B5EF4-FFF2-40B4-BE49-F238E27FC236}">
+                <a16:creationId xmlns:a16="http://schemas.microsoft.com/office/drawing/2014/main" id="{3664F5C4-0E0A-F646-968F-0A3AE9A158DF}"/>
+              </a:ext>
+            </a:extLst>
+          </p:cNvPr>
+          <p:cNvSpPr/>
+          <p:nvPr/>
+        </p:nvSpPr>
+        <p:spPr>
+          <a:xfrm>
+            <a:off x="2118122" y="1208604"/>
+            <a:ext cx="294022" cy="294022"/>
+          </a:xfrm>
+          <a:prstGeom prst="rect">
+            <a:avLst/>
+          </a:prstGeom>
+          <a:noFill/>
+        </p:spPr>
+        <p:style>
+          <a:lnRef idx="2">
+            <a:schemeClr val="accent1">
+              <a:shade val="50000"/>
+            </a:schemeClr>
+          </a:lnRef>
+          <a:fillRef idx="1">
+            <a:schemeClr val="accent1"/>
+          </a:fillRef>
+          <a:effectRef idx="0">
+            <a:schemeClr val="accent1"/>
+          </a:effectRef>
+          <a:fontRef idx="minor">
+            <a:schemeClr val="lt1"/>
+          </a:fontRef>
+        </p:style>
+        <p:txBody>
+          <a:bodyPr rtlCol="0" anchor="ctr"/>
+          <a:lstStyle/>
+          <a:p>
+            <a:pPr algn="ctr"/>
+            <a:endParaRPr lang="en-US"/>
+          </a:p>
+        </p:txBody>
+      </p:sp>
+      <p:sp>
+        <p:nvSpPr>
+          <p:cNvPr id="38" name="Rectangle 37">
+            <a:extLst>
+              <a:ext uri="{FF2B5EF4-FFF2-40B4-BE49-F238E27FC236}">
+                <a16:creationId xmlns:a16="http://schemas.microsoft.com/office/drawing/2014/main" id="{CB60F128-11A4-E94B-AA68-260714EE26C3}"/>
+              </a:ext>
+            </a:extLst>
+          </p:cNvPr>
+          <p:cNvSpPr/>
+          <p:nvPr/>
+        </p:nvSpPr>
+        <p:spPr>
+          <a:xfrm>
+            <a:off x="2465219" y="861201"/>
+            <a:ext cx="294022" cy="294022"/>
+          </a:xfrm>
+          <a:prstGeom prst="rect">
+            <a:avLst/>
+          </a:prstGeom>
+          <a:noFill/>
+        </p:spPr>
+        <p:style>
+          <a:lnRef idx="2">
+            <a:schemeClr val="accent1">
+              <a:shade val="50000"/>
+            </a:schemeClr>
+          </a:lnRef>
+          <a:fillRef idx="1">
+            <a:schemeClr val="accent1"/>
+          </a:fillRef>
+          <a:effectRef idx="0">
+            <a:schemeClr val="accent1"/>
+          </a:effectRef>
+          <a:fontRef idx="minor">
+            <a:schemeClr val="lt1"/>
+          </a:fontRef>
+        </p:style>
+        <p:txBody>
+          <a:bodyPr rtlCol="0" anchor="ctr"/>
+          <a:lstStyle/>
+          <a:p>
+            <a:pPr algn="ctr"/>
+            <a:endParaRPr lang="en-US"/>
+          </a:p>
+        </p:txBody>
+      </p:sp>
+      <p:sp>
+        <p:nvSpPr>
+          <p:cNvPr id="39" name="Rectangle 38">
+            <a:extLst>
+              <a:ext uri="{FF2B5EF4-FFF2-40B4-BE49-F238E27FC236}">
+                <a16:creationId xmlns:a16="http://schemas.microsoft.com/office/drawing/2014/main" id="{3264F9F0-9B3D-A04D-BFBB-135207AF1EC7}"/>
+              </a:ext>
+            </a:extLst>
+          </p:cNvPr>
+          <p:cNvSpPr/>
+          <p:nvPr/>
+        </p:nvSpPr>
+        <p:spPr>
+          <a:xfrm>
+            <a:off x="2465219" y="1211588"/>
+            <a:ext cx="294022" cy="294022"/>
+          </a:xfrm>
+          <a:prstGeom prst="rect">
+            <a:avLst/>
+          </a:prstGeom>
+        </p:spPr>
+        <p:style>
+          <a:lnRef idx="2">
+            <a:schemeClr val="accent1">
+              <a:shade val="50000"/>
+            </a:schemeClr>
+          </a:lnRef>
+          <a:fillRef idx="1">
+            <a:schemeClr val="accent1"/>
+          </a:fillRef>
+          <a:effectRef idx="0">
+            <a:schemeClr val="accent1"/>
+          </a:effectRef>
+          <a:fontRef idx="minor">
+            <a:schemeClr val="lt1"/>
+          </a:fontRef>
+        </p:style>
+        <p:txBody>
+          <a:bodyPr rtlCol="0" anchor="ctr"/>
+          <a:lstStyle/>
+          <a:p>
+            <a:pPr algn="ctr"/>
+            <a:endParaRPr lang="en-US"/>
+          </a:p>
+        </p:txBody>
+      </p:sp>
+      <p:sp>
+        <p:nvSpPr>
+          <p:cNvPr id="40" name="Rectangle 39">
+            <a:extLst>
+              <a:ext uri="{FF2B5EF4-FFF2-40B4-BE49-F238E27FC236}">
+                <a16:creationId xmlns:a16="http://schemas.microsoft.com/office/drawing/2014/main" id="{1B516205-78F7-CC44-BA01-E2D40FF6321F}"/>
+              </a:ext>
+            </a:extLst>
+          </p:cNvPr>
+          <p:cNvSpPr/>
+          <p:nvPr/>
+        </p:nvSpPr>
+        <p:spPr>
+          <a:xfrm>
+            <a:off x="3703607" y="3120540"/>
+            <a:ext cx="294022" cy="294022"/>
+          </a:xfrm>
+          <a:prstGeom prst="rect">
+            <a:avLst/>
+          </a:prstGeom>
+        </p:spPr>
+        <p:style>
+          <a:lnRef idx="2">
+            <a:schemeClr val="accent1">
+              <a:shade val="50000"/>
+            </a:schemeClr>
+          </a:lnRef>
+          <a:fillRef idx="1">
+            <a:schemeClr val="accent1"/>
+          </a:fillRef>
+          <a:effectRef idx="0">
+            <a:schemeClr val="accent1"/>
+          </a:effectRef>
+          <a:fontRef idx="minor">
+            <a:schemeClr val="lt1"/>
+          </a:fontRef>
+        </p:style>
+        <p:txBody>
+          <a:bodyPr rtlCol="0" anchor="ctr"/>
+          <a:lstStyle/>
+          <a:p>
+            <a:pPr algn="ctr"/>
+            <a:endParaRPr lang="en-US"/>
+          </a:p>
+        </p:txBody>
+      </p:sp>
+      <p:cxnSp>
+        <p:nvCxnSpPr>
+          <p:cNvPr id="41" name="Straight Connector 40">
+            <a:extLst>
+              <a:ext uri="{FF2B5EF4-FFF2-40B4-BE49-F238E27FC236}">
+                <a16:creationId xmlns:a16="http://schemas.microsoft.com/office/drawing/2014/main" id="{7216AC2F-0177-4F4F-A248-AD59D1AAA510}"/>
+              </a:ext>
+            </a:extLst>
+          </p:cNvPr>
+          <p:cNvCxnSpPr>
+            <a:cxnSpLocks/>
+          </p:cNvCxnSpPr>
+          <p:nvPr/>
+        </p:nvCxnSpPr>
+        <p:spPr>
+          <a:xfrm flipH="1">
+            <a:off x="2916862" y="2955756"/>
+            <a:ext cx="662706" cy="941746"/>
+          </a:xfrm>
+          <a:prstGeom prst="line">
+            <a:avLst/>
+          </a:prstGeom>
+          <a:ln w="63500"/>
+        </p:spPr>
+        <p:style>
+          <a:lnRef idx="1">
+            <a:schemeClr val="accent1"/>
+          </a:lnRef>
+          <a:fillRef idx="0">
+            <a:schemeClr val="accent1"/>
+          </a:fillRef>
+          <a:effectRef idx="0">
+            <a:schemeClr val="accent1"/>
+          </a:effectRef>
+          <a:fontRef idx="minor">
+            <a:schemeClr val="tx1"/>
+          </a:fontRef>
+        </p:style>
+      </p:cxnSp>
+      <p:sp>
+        <p:nvSpPr>
+          <p:cNvPr id="42" name="Rectangle 41">
+            <a:extLst>
+              <a:ext uri="{FF2B5EF4-FFF2-40B4-BE49-F238E27FC236}">
+                <a16:creationId xmlns:a16="http://schemas.microsoft.com/office/drawing/2014/main" id="{67915EE0-B9A4-9E43-BC51-B9F763510F2C}"/>
+              </a:ext>
+            </a:extLst>
+          </p:cNvPr>
+          <p:cNvSpPr/>
+          <p:nvPr/>
+        </p:nvSpPr>
+        <p:spPr>
+          <a:xfrm>
+            <a:off x="3703607" y="3470927"/>
+            <a:ext cx="294022" cy="294022"/>
+          </a:xfrm>
+          <a:prstGeom prst="rect">
+            <a:avLst/>
+          </a:prstGeom>
+        </p:spPr>
+        <p:style>
+          <a:lnRef idx="2">
+            <a:schemeClr val="accent1">
+              <a:shade val="50000"/>
+            </a:schemeClr>
+          </a:lnRef>
+          <a:fillRef idx="1">
+            <a:schemeClr val="accent1"/>
+          </a:fillRef>
+          <a:effectRef idx="0">
+            <a:schemeClr val="accent1"/>
+          </a:effectRef>
+          <a:fontRef idx="minor">
+            <a:schemeClr val="lt1"/>
+          </a:fontRef>
+        </p:style>
+        <p:txBody>
+          <a:bodyPr rtlCol="0" anchor="ctr"/>
+          <a:lstStyle/>
+          <a:p>
+            <a:pPr algn="ctr"/>
+            <a:endParaRPr lang="en-US"/>
+          </a:p>
+        </p:txBody>
+      </p:sp>
+      <p:sp>
+        <p:nvSpPr>
+          <p:cNvPr id="43" name="Rectangle 42">
+            <a:extLst>
+              <a:ext uri="{FF2B5EF4-FFF2-40B4-BE49-F238E27FC236}">
+                <a16:creationId xmlns:a16="http://schemas.microsoft.com/office/drawing/2014/main" id="{B3077243-4022-6A45-A43A-6703C1B7C220}"/>
+              </a:ext>
+            </a:extLst>
+          </p:cNvPr>
+          <p:cNvSpPr/>
+          <p:nvPr/>
+        </p:nvSpPr>
+        <p:spPr>
+          <a:xfrm>
+            <a:off x="4050704" y="3123524"/>
+            <a:ext cx="294022" cy="294022"/>
+          </a:xfrm>
+          <a:prstGeom prst="rect">
+            <a:avLst/>
+          </a:prstGeom>
+          <a:noFill/>
+        </p:spPr>
+        <p:style>
+          <a:lnRef idx="2">
+            <a:schemeClr val="accent1">
+              <a:shade val="50000"/>
+            </a:schemeClr>
+          </a:lnRef>
+          <a:fillRef idx="1">
+            <a:schemeClr val="accent1"/>
+          </a:fillRef>
+          <a:effectRef idx="0">
+            <a:schemeClr val="accent1"/>
+          </a:effectRef>
+          <a:fontRef idx="minor">
+            <a:schemeClr val="lt1"/>
+          </a:fontRef>
+        </p:style>
+        <p:txBody>
+          <a:bodyPr rtlCol="0" anchor="ctr"/>
+          <a:lstStyle/>
+          <a:p>
+            <a:pPr algn="ctr"/>
+            <a:endParaRPr lang="en-US"/>
+          </a:p>
+        </p:txBody>
+      </p:sp>
+      <p:sp>
+        <p:nvSpPr>
+          <p:cNvPr id="44" name="Rectangle 43">
+            <a:extLst>
+              <a:ext uri="{FF2B5EF4-FFF2-40B4-BE49-F238E27FC236}">
+                <a16:creationId xmlns:a16="http://schemas.microsoft.com/office/drawing/2014/main" id="{A8BF1D14-9BC5-D64E-BD66-C5891F3A6F5F}"/>
+              </a:ext>
+            </a:extLst>
+          </p:cNvPr>
+          <p:cNvSpPr/>
+          <p:nvPr/>
+        </p:nvSpPr>
+        <p:spPr>
+          <a:xfrm>
+            <a:off x="4050704" y="3473911"/>
+            <a:ext cx="294022" cy="294022"/>
+          </a:xfrm>
+          <a:prstGeom prst="rect">
+            <a:avLst/>
+          </a:prstGeom>
+          <a:noFill/>
+        </p:spPr>
+        <p:style>
+          <a:lnRef idx="2">
+            <a:schemeClr val="accent1">
+              <a:shade val="50000"/>
+            </a:schemeClr>
+          </a:lnRef>
+          <a:fillRef idx="1">
+            <a:schemeClr val="accent1"/>
+          </a:fillRef>
+          <a:effectRef idx="0">
+            <a:schemeClr val="accent1"/>
+          </a:effectRef>
+          <a:fontRef idx="minor">
+            <a:schemeClr val="lt1"/>
+          </a:fontRef>
+        </p:style>
+        <p:txBody>
+          <a:bodyPr rtlCol="0" anchor="ctr"/>
+          <a:lstStyle/>
+          <a:p>
+            <a:pPr algn="ctr"/>
+            <a:endParaRPr lang="en-US"/>
+          </a:p>
+        </p:txBody>
+      </p:sp>
+      <p:sp>
+        <p:nvSpPr>
+          <p:cNvPr id="45" name="Rectangle 44">
+            <a:extLst>
+              <a:ext uri="{FF2B5EF4-FFF2-40B4-BE49-F238E27FC236}">
+                <a16:creationId xmlns:a16="http://schemas.microsoft.com/office/drawing/2014/main" id="{37E9A8BB-544B-EA4E-BE4C-242E32E8970B}"/>
+              </a:ext>
+            </a:extLst>
+          </p:cNvPr>
+          <p:cNvSpPr/>
+          <p:nvPr/>
+        </p:nvSpPr>
+        <p:spPr>
+          <a:xfrm>
+            <a:off x="2118123" y="3128173"/>
+            <a:ext cx="294022" cy="294022"/>
+          </a:xfrm>
+          <a:prstGeom prst="rect">
+            <a:avLst/>
+          </a:prstGeom>
+        </p:spPr>
+        <p:style>
+          <a:lnRef idx="2">
+            <a:schemeClr val="accent1">
+              <a:shade val="50000"/>
+            </a:schemeClr>
+          </a:lnRef>
+          <a:fillRef idx="1">
+            <a:schemeClr val="accent1"/>
+          </a:fillRef>
+          <a:effectRef idx="0">
+            <a:schemeClr val="accent1"/>
+          </a:effectRef>
+          <a:fontRef idx="minor">
+            <a:schemeClr val="lt1"/>
+          </a:fontRef>
+        </p:style>
+        <p:txBody>
+          <a:bodyPr rtlCol="0" anchor="ctr"/>
+          <a:lstStyle/>
+          <a:p>
+            <a:pPr algn="ctr"/>
+            <a:endParaRPr lang="en-US"/>
+          </a:p>
+        </p:txBody>
+      </p:sp>
+      <p:sp>
+        <p:nvSpPr>
+          <p:cNvPr id="46" name="Rectangle 45">
+            <a:extLst>
+              <a:ext uri="{FF2B5EF4-FFF2-40B4-BE49-F238E27FC236}">
+                <a16:creationId xmlns:a16="http://schemas.microsoft.com/office/drawing/2014/main" id="{CAB3D40E-9C84-8548-8CA4-B956B80F99C7}"/>
+              </a:ext>
+            </a:extLst>
+          </p:cNvPr>
+          <p:cNvSpPr/>
+          <p:nvPr/>
+        </p:nvSpPr>
+        <p:spPr>
+          <a:xfrm>
+            <a:off x="2118123" y="3478560"/>
+            <a:ext cx="294022" cy="294022"/>
+          </a:xfrm>
+          <a:prstGeom prst="rect">
+            <a:avLst/>
+          </a:prstGeom>
+          <a:noFill/>
+        </p:spPr>
+        <p:style>
+          <a:lnRef idx="2">
+            <a:schemeClr val="accent1">
+              <a:shade val="50000"/>
+            </a:schemeClr>
+          </a:lnRef>
+          <a:fillRef idx="1">
+            <a:schemeClr val="accent1"/>
+          </a:fillRef>
+          <a:effectRef idx="0">
+            <a:schemeClr val="accent1"/>
+          </a:effectRef>
+          <a:fontRef idx="minor">
+            <a:schemeClr val="lt1"/>
+          </a:fontRef>
+        </p:style>
+        <p:txBody>
+          <a:bodyPr rtlCol="0" anchor="ctr"/>
+          <a:lstStyle/>
+          <a:p>
+            <a:pPr algn="ctr"/>
+            <a:endParaRPr lang="en-US"/>
+          </a:p>
+        </p:txBody>
+      </p:sp>
+      <p:sp>
+        <p:nvSpPr>
+          <p:cNvPr id="47" name="Rectangle 46">
+            <a:extLst>
+              <a:ext uri="{FF2B5EF4-FFF2-40B4-BE49-F238E27FC236}">
+                <a16:creationId xmlns:a16="http://schemas.microsoft.com/office/drawing/2014/main" id="{7EEC0E68-D6C9-D349-BA65-5BC090CE0FDE}"/>
+              </a:ext>
+            </a:extLst>
+          </p:cNvPr>
+          <p:cNvSpPr/>
+          <p:nvPr/>
+        </p:nvSpPr>
+        <p:spPr>
+          <a:xfrm>
+            <a:off x="2465220" y="3131157"/>
+            <a:ext cx="294022" cy="294022"/>
+          </a:xfrm>
+          <a:prstGeom prst="rect">
+            <a:avLst/>
+          </a:prstGeom>
+          <a:noFill/>
+        </p:spPr>
+        <p:style>
+          <a:lnRef idx="2">
+            <a:schemeClr val="accent1">
+              <a:shade val="50000"/>
+            </a:schemeClr>
+          </a:lnRef>
+          <a:fillRef idx="1">
+            <a:schemeClr val="accent1"/>
+          </a:fillRef>
+          <a:effectRef idx="0">
+            <a:schemeClr val="accent1"/>
+          </a:effectRef>
+          <a:fontRef idx="minor">
+            <a:schemeClr val="lt1"/>
+          </a:fontRef>
+        </p:style>
+        <p:txBody>
+          <a:bodyPr rtlCol="0" anchor="ctr"/>
+          <a:lstStyle/>
+          <a:p>
+            <a:pPr algn="ctr"/>
+            <a:endParaRPr lang="en-US"/>
+          </a:p>
+        </p:txBody>
+      </p:sp>
+      <p:sp>
+        <p:nvSpPr>
+          <p:cNvPr id="48" name="Rectangle 47">
+            <a:extLst>
+              <a:ext uri="{FF2B5EF4-FFF2-40B4-BE49-F238E27FC236}">
+                <a16:creationId xmlns:a16="http://schemas.microsoft.com/office/drawing/2014/main" id="{E4FF259A-3C7A-1D49-BD43-BF4B707EBCBE}"/>
+              </a:ext>
+            </a:extLst>
+          </p:cNvPr>
+          <p:cNvSpPr/>
+          <p:nvPr/>
+        </p:nvSpPr>
+        <p:spPr>
+          <a:xfrm>
+            <a:off x="2465220" y="3481544"/>
+            <a:ext cx="294022" cy="294022"/>
+          </a:xfrm>
+          <a:prstGeom prst="rect">
+            <a:avLst/>
+          </a:prstGeom>
+          <a:noFill/>
+        </p:spPr>
+        <p:style>
+          <a:lnRef idx="2">
+            <a:schemeClr val="accent1">
+              <a:shade val="50000"/>
+            </a:schemeClr>
+          </a:lnRef>
+          <a:fillRef idx="1">
+            <a:schemeClr val="accent1"/>
+          </a:fillRef>
+          <a:effectRef idx="0">
+            <a:schemeClr val="accent1"/>
+          </a:effectRef>
+          <a:fontRef idx="minor">
+            <a:schemeClr val="lt1"/>
+          </a:fontRef>
+        </p:style>
+        <p:txBody>
+          <a:bodyPr rtlCol="0" anchor="ctr"/>
+          <a:lstStyle/>
+          <a:p>
+            <a:pPr algn="ctr"/>
+            <a:endParaRPr lang="en-US"/>
+          </a:p>
+        </p:txBody>
+      </p:sp>
+      <p:sp>
+        <p:nvSpPr>
+          <p:cNvPr id="49" name="Rectangle 48">
+            <a:extLst>
+              <a:ext uri="{FF2B5EF4-FFF2-40B4-BE49-F238E27FC236}">
+                <a16:creationId xmlns:a16="http://schemas.microsoft.com/office/drawing/2014/main" id="{158E0873-B085-C849-8D7B-B426ACB395F7}"/>
+              </a:ext>
+            </a:extLst>
+          </p:cNvPr>
+          <p:cNvSpPr/>
+          <p:nvPr/>
+        </p:nvSpPr>
+        <p:spPr>
+          <a:xfrm>
+            <a:off x="3711629" y="5334349"/>
+            <a:ext cx="294022" cy="294022"/>
+          </a:xfrm>
+          <a:prstGeom prst="rect">
+            <a:avLst/>
+          </a:prstGeom>
+        </p:spPr>
+        <p:style>
+          <a:lnRef idx="2">
+            <a:schemeClr val="accent1">
+              <a:shade val="50000"/>
+            </a:schemeClr>
+          </a:lnRef>
+          <a:fillRef idx="1">
+            <a:schemeClr val="accent1"/>
+          </a:fillRef>
+          <a:effectRef idx="0">
+            <a:schemeClr val="accent1"/>
+          </a:effectRef>
+          <a:fontRef idx="minor">
+            <a:schemeClr val="lt1"/>
+          </a:fontRef>
+        </p:style>
+        <p:txBody>
+          <a:bodyPr rtlCol="0" anchor="ctr"/>
+          <a:lstStyle/>
+          <a:p>
+            <a:pPr algn="ctr"/>
+            <a:endParaRPr lang="en-US"/>
+          </a:p>
+        </p:txBody>
+      </p:sp>
+      <p:cxnSp>
+        <p:nvCxnSpPr>
+          <p:cNvPr id="50" name="Straight Connector 49">
+            <a:extLst>
+              <a:ext uri="{FF2B5EF4-FFF2-40B4-BE49-F238E27FC236}">
+                <a16:creationId xmlns:a16="http://schemas.microsoft.com/office/drawing/2014/main" id="{9E49F533-0A29-9744-BFFA-EF2A046C30B8}"/>
+              </a:ext>
+            </a:extLst>
+          </p:cNvPr>
+          <p:cNvCxnSpPr>
+            <a:cxnSpLocks/>
+          </p:cNvCxnSpPr>
+          <p:nvPr/>
+        </p:nvCxnSpPr>
+        <p:spPr>
+          <a:xfrm flipH="1">
+            <a:off x="2924884" y="5169565"/>
+            <a:ext cx="662706" cy="941746"/>
+          </a:xfrm>
+          <a:prstGeom prst="line">
+            <a:avLst/>
+          </a:prstGeom>
+          <a:ln w="63500"/>
+        </p:spPr>
+        <p:style>
+          <a:lnRef idx="1">
+            <a:schemeClr val="accent1"/>
+          </a:lnRef>
+          <a:fillRef idx="0">
+            <a:schemeClr val="accent1"/>
+          </a:fillRef>
+          <a:effectRef idx="0">
+            <a:schemeClr val="accent1"/>
+          </a:effectRef>
+          <a:fontRef idx="minor">
+            <a:schemeClr val="tx1"/>
+          </a:fontRef>
+        </p:style>
+      </p:cxnSp>
+      <p:sp>
+        <p:nvSpPr>
+          <p:cNvPr id="51" name="Rectangle 50">
+            <a:extLst>
+              <a:ext uri="{FF2B5EF4-FFF2-40B4-BE49-F238E27FC236}">
+                <a16:creationId xmlns:a16="http://schemas.microsoft.com/office/drawing/2014/main" id="{DB8514BA-6284-2E45-8AB6-2CCAD94E079D}"/>
+              </a:ext>
+            </a:extLst>
+          </p:cNvPr>
+          <p:cNvSpPr/>
+          <p:nvPr/>
+        </p:nvSpPr>
+        <p:spPr>
+          <a:xfrm>
+            <a:off x="3711629" y="5684736"/>
+            <a:ext cx="294022" cy="294022"/>
+          </a:xfrm>
+          <a:prstGeom prst="rect">
+            <a:avLst/>
+          </a:prstGeom>
+          <a:noFill/>
+        </p:spPr>
+        <p:style>
+          <a:lnRef idx="2">
+            <a:schemeClr val="accent1">
+              <a:shade val="50000"/>
+            </a:schemeClr>
+          </a:lnRef>
+          <a:fillRef idx="1">
+            <a:schemeClr val="accent1"/>
+          </a:fillRef>
+          <a:effectRef idx="0">
+            <a:schemeClr val="accent1"/>
+          </a:effectRef>
+          <a:fontRef idx="minor">
+            <a:schemeClr val="lt1"/>
+          </a:fontRef>
+        </p:style>
+        <p:txBody>
+          <a:bodyPr rtlCol="0" anchor="ctr"/>
+          <a:lstStyle/>
+          <a:p>
+            <a:pPr algn="ctr"/>
+            <a:endParaRPr lang="en-US"/>
+          </a:p>
+        </p:txBody>
+      </p:sp>
+      <p:sp>
+        <p:nvSpPr>
+          <p:cNvPr id="52" name="Rectangle 51">
+            <a:extLst>
+              <a:ext uri="{FF2B5EF4-FFF2-40B4-BE49-F238E27FC236}">
+                <a16:creationId xmlns:a16="http://schemas.microsoft.com/office/drawing/2014/main" id="{C97CA396-BE2A-834C-ABA5-36A8CEF46151}"/>
+              </a:ext>
+            </a:extLst>
+          </p:cNvPr>
+          <p:cNvSpPr/>
+          <p:nvPr/>
+        </p:nvSpPr>
+        <p:spPr>
+          <a:xfrm>
+            <a:off x="4058726" y="5337333"/>
+            <a:ext cx="294022" cy="294022"/>
+          </a:xfrm>
+          <a:prstGeom prst="rect">
+            <a:avLst/>
+          </a:prstGeom>
+        </p:spPr>
+        <p:style>
+          <a:lnRef idx="2">
+            <a:schemeClr val="accent1">
+              <a:shade val="50000"/>
+            </a:schemeClr>
+          </a:lnRef>
+          <a:fillRef idx="1">
+            <a:schemeClr val="accent1"/>
+          </a:fillRef>
+          <a:effectRef idx="0">
+            <a:schemeClr val="accent1"/>
+          </a:effectRef>
+          <a:fontRef idx="minor">
+            <a:schemeClr val="lt1"/>
+          </a:fontRef>
+        </p:style>
+        <p:txBody>
+          <a:bodyPr rtlCol="0" anchor="ctr"/>
+          <a:lstStyle/>
+          <a:p>
+            <a:pPr algn="ctr"/>
+            <a:endParaRPr lang="en-US"/>
+          </a:p>
+        </p:txBody>
+      </p:sp>
+      <p:sp>
+        <p:nvSpPr>
+          <p:cNvPr id="53" name="Rectangle 52">
+            <a:extLst>
+              <a:ext uri="{FF2B5EF4-FFF2-40B4-BE49-F238E27FC236}">
+                <a16:creationId xmlns:a16="http://schemas.microsoft.com/office/drawing/2014/main" id="{375565C6-7939-054A-A0E3-FB44858927E5}"/>
+              </a:ext>
+            </a:extLst>
+          </p:cNvPr>
+          <p:cNvSpPr/>
+          <p:nvPr/>
+        </p:nvSpPr>
+        <p:spPr>
+          <a:xfrm>
+            <a:off x="4058726" y="5687720"/>
+            <a:ext cx="294022" cy="294022"/>
+          </a:xfrm>
+          <a:prstGeom prst="rect">
+            <a:avLst/>
+          </a:prstGeom>
+          <a:noFill/>
+        </p:spPr>
+        <p:style>
+          <a:lnRef idx="2">
+            <a:schemeClr val="accent1">
+              <a:shade val="50000"/>
+            </a:schemeClr>
+          </a:lnRef>
+          <a:fillRef idx="1">
+            <a:schemeClr val="accent1"/>
+          </a:fillRef>
+          <a:effectRef idx="0">
+            <a:schemeClr val="accent1"/>
+          </a:effectRef>
+          <a:fontRef idx="minor">
+            <a:schemeClr val="lt1"/>
+          </a:fontRef>
+        </p:style>
+        <p:txBody>
+          <a:bodyPr rtlCol="0" anchor="ctr"/>
+          <a:lstStyle/>
+          <a:p>
+            <a:pPr algn="ctr"/>
+            <a:endParaRPr lang="en-US"/>
+          </a:p>
+        </p:txBody>
+      </p:sp>
+      <p:sp>
+        <p:nvSpPr>
+          <p:cNvPr id="54" name="Rectangle 53">
+            <a:extLst>
+              <a:ext uri="{FF2B5EF4-FFF2-40B4-BE49-F238E27FC236}">
+                <a16:creationId xmlns:a16="http://schemas.microsoft.com/office/drawing/2014/main" id="{8E68F321-7945-1F42-B2E9-884B98598712}"/>
+              </a:ext>
+            </a:extLst>
+          </p:cNvPr>
+          <p:cNvSpPr/>
+          <p:nvPr/>
+        </p:nvSpPr>
+        <p:spPr>
+          <a:xfrm>
+            <a:off x="2126145" y="5341982"/>
+            <a:ext cx="294022" cy="294022"/>
+          </a:xfrm>
+          <a:prstGeom prst="rect">
+            <a:avLst/>
+          </a:prstGeom>
+        </p:spPr>
+        <p:style>
+          <a:lnRef idx="2">
+            <a:schemeClr val="accent1">
+              <a:shade val="50000"/>
+            </a:schemeClr>
+          </a:lnRef>
+          <a:fillRef idx="1">
+            <a:schemeClr val="accent1"/>
+          </a:fillRef>
+          <a:effectRef idx="0">
+            <a:schemeClr val="accent1"/>
+          </a:effectRef>
+          <a:fontRef idx="minor">
+            <a:schemeClr val="lt1"/>
+          </a:fontRef>
+        </p:style>
+        <p:txBody>
+          <a:bodyPr rtlCol="0" anchor="ctr"/>
+          <a:lstStyle/>
+          <a:p>
+            <a:pPr algn="ctr"/>
+            <a:endParaRPr lang="en-US"/>
+          </a:p>
+        </p:txBody>
+      </p:sp>
+      <p:sp>
+        <p:nvSpPr>
+          <p:cNvPr id="55" name="Rectangle 54">
+            <a:extLst>
+              <a:ext uri="{FF2B5EF4-FFF2-40B4-BE49-F238E27FC236}">
+                <a16:creationId xmlns:a16="http://schemas.microsoft.com/office/drawing/2014/main" id="{8D68E3CF-2745-8441-8A12-8B5B00C392A2}"/>
+              </a:ext>
+            </a:extLst>
+          </p:cNvPr>
+          <p:cNvSpPr/>
+          <p:nvPr/>
+        </p:nvSpPr>
+        <p:spPr>
+          <a:xfrm>
+            <a:off x="2126145" y="5692369"/>
+            <a:ext cx="294022" cy="294022"/>
+          </a:xfrm>
+          <a:prstGeom prst="rect">
+            <a:avLst/>
+          </a:prstGeom>
+          <a:noFill/>
+        </p:spPr>
+        <p:style>
+          <a:lnRef idx="2">
+            <a:schemeClr val="accent1">
+              <a:shade val="50000"/>
+            </a:schemeClr>
+          </a:lnRef>
+          <a:fillRef idx="1">
+            <a:schemeClr val="accent1"/>
+          </a:fillRef>
+          <a:effectRef idx="0">
+            <a:schemeClr val="accent1"/>
+          </a:effectRef>
+          <a:fontRef idx="minor">
+            <a:schemeClr val="lt1"/>
+          </a:fontRef>
+        </p:style>
+        <p:txBody>
+          <a:bodyPr rtlCol="0" anchor="ctr"/>
+          <a:lstStyle/>
+          <a:p>
+            <a:pPr algn="ctr"/>
+            <a:endParaRPr lang="en-US"/>
+          </a:p>
+        </p:txBody>
+      </p:sp>
+      <p:sp>
+        <p:nvSpPr>
+          <p:cNvPr id="56" name="Rectangle 55">
+            <a:extLst>
+              <a:ext uri="{FF2B5EF4-FFF2-40B4-BE49-F238E27FC236}">
+                <a16:creationId xmlns:a16="http://schemas.microsoft.com/office/drawing/2014/main" id="{4386F94C-9DFA-AF44-BAEF-2DBDA547CB18}"/>
+              </a:ext>
+            </a:extLst>
+          </p:cNvPr>
+          <p:cNvSpPr/>
+          <p:nvPr/>
+        </p:nvSpPr>
+        <p:spPr>
+          <a:xfrm>
+            <a:off x="2473242" y="5344966"/>
+            <a:ext cx="294022" cy="294022"/>
+          </a:xfrm>
+          <a:prstGeom prst="rect">
+            <a:avLst/>
+          </a:prstGeom>
+          <a:noFill/>
+        </p:spPr>
+        <p:style>
+          <a:lnRef idx="2">
+            <a:schemeClr val="accent1">
+              <a:shade val="50000"/>
+            </a:schemeClr>
+          </a:lnRef>
+          <a:fillRef idx="1">
+            <a:schemeClr val="accent1"/>
+          </a:fillRef>
+          <a:effectRef idx="0">
+            <a:schemeClr val="accent1"/>
+          </a:effectRef>
+          <a:fontRef idx="minor">
+            <a:schemeClr val="lt1"/>
+          </a:fontRef>
+        </p:style>
+        <p:txBody>
+          <a:bodyPr rtlCol="0" anchor="ctr"/>
+          <a:lstStyle/>
+          <a:p>
+            <a:pPr algn="ctr"/>
+            <a:endParaRPr lang="en-US"/>
+          </a:p>
+        </p:txBody>
+      </p:sp>
+      <p:sp>
+        <p:nvSpPr>
+          <p:cNvPr id="57" name="Rectangle 56">
+            <a:extLst>
+              <a:ext uri="{FF2B5EF4-FFF2-40B4-BE49-F238E27FC236}">
+                <a16:creationId xmlns:a16="http://schemas.microsoft.com/office/drawing/2014/main" id="{24567E88-9B35-A947-9CA2-8485DA9E8996}"/>
+              </a:ext>
+            </a:extLst>
+          </p:cNvPr>
+          <p:cNvSpPr/>
+          <p:nvPr/>
+        </p:nvSpPr>
+        <p:spPr>
+          <a:xfrm>
+            <a:off x="2473242" y="5695353"/>
+            <a:ext cx="294022" cy="294022"/>
+          </a:xfrm>
+          <a:prstGeom prst="rect">
+            <a:avLst/>
+          </a:prstGeom>
+          <a:noFill/>
+        </p:spPr>
+        <p:style>
+          <a:lnRef idx="2">
+            <a:schemeClr val="accent1">
+              <a:shade val="50000"/>
+            </a:schemeClr>
+          </a:lnRef>
+          <a:fillRef idx="1">
+            <a:schemeClr val="accent1"/>
+          </a:fillRef>
+          <a:effectRef idx="0">
+            <a:schemeClr val="accent1"/>
+          </a:effectRef>
+          <a:fontRef idx="minor">
+            <a:schemeClr val="lt1"/>
+          </a:fontRef>
+        </p:style>
+        <p:txBody>
+          <a:bodyPr rtlCol="0" anchor="ctr"/>
+          <a:lstStyle/>
+          <a:p>
+            <a:pPr algn="ctr"/>
+            <a:endParaRPr lang="en-US"/>
+          </a:p>
+        </p:txBody>
+      </p:sp>
+      <p:pic>
+        <p:nvPicPr>
+          <p:cNvPr id="2" name="Picture 1">
+            <a:extLst>
+              <a:ext uri="{FF2B5EF4-FFF2-40B4-BE49-F238E27FC236}">
+                <a16:creationId xmlns:a16="http://schemas.microsoft.com/office/drawing/2014/main" id="{B4DC31EE-51D9-284B-A6D4-A39218EA598D}"/>
+              </a:ext>
+            </a:extLst>
+          </p:cNvPr>
+          <p:cNvPicPr>
+            <a:picLocks noChangeAspect="1"/>
+          </p:cNvPicPr>
+          <p:nvPr/>
+        </p:nvPicPr>
+        <p:blipFill>
+          <a:blip r:embed="rId4" cstate="email">
+            <a:extLst>
+              <a:ext uri="{28A0092B-C50C-407E-A947-70E740481C1C}">
+                <a14:useLocalDpi xmlns:a14="http://schemas.microsoft.com/office/drawing/2010/main"/>
+              </a:ext>
+            </a:extLst>
+          </a:blip>
+          <a:stretch>
+            <a:fillRect/>
+          </a:stretch>
+        </p:blipFill>
+        <p:spPr>
+          <a:xfrm>
+            <a:off x="6021706" y="2355415"/>
+            <a:ext cx="2418531" cy="1049685"/>
+          </a:xfrm>
+          <a:prstGeom prst="rect">
+            <a:avLst/>
+          </a:prstGeom>
+        </p:spPr>
+      </p:pic>
+      <p:pic>
+        <p:nvPicPr>
+          <p:cNvPr id="5" name="Picture 4">
+            <a:extLst>
+              <a:ext uri="{FF2B5EF4-FFF2-40B4-BE49-F238E27FC236}">
+                <a16:creationId xmlns:a16="http://schemas.microsoft.com/office/drawing/2014/main" id="{B968C331-C9F4-444C-B693-8DC0DAB85D60}"/>
+              </a:ext>
+            </a:extLst>
+          </p:cNvPr>
+          <p:cNvPicPr>
+            <a:picLocks noChangeAspect="1"/>
+          </p:cNvPicPr>
+          <p:nvPr/>
+        </p:nvPicPr>
+        <p:blipFill>
+          <a:blip r:embed="rId5" cstate="email">
+            <a:extLst>
+              <a:ext uri="{28A0092B-C50C-407E-A947-70E740481C1C}">
+                <a14:useLocalDpi xmlns:a14="http://schemas.microsoft.com/office/drawing/2010/main"/>
+              </a:ext>
+            </a:extLst>
+          </a:blip>
+          <a:stretch>
+            <a:fillRect/>
+          </a:stretch>
+        </p:blipFill>
+        <p:spPr>
+          <a:xfrm>
+            <a:off x="6021706" y="4721776"/>
+            <a:ext cx="1301750" cy="1562100"/>
+          </a:xfrm>
+          <a:prstGeom prst="rect">
+            <a:avLst/>
+          </a:prstGeom>
+        </p:spPr>
+      </p:pic>
+      <p:sp>
+        <p:nvSpPr>
+          <p:cNvPr id="6" name="TextBox 5">
+            <a:extLst>
+              <a:ext uri="{FF2B5EF4-FFF2-40B4-BE49-F238E27FC236}">
+                <a16:creationId xmlns:a16="http://schemas.microsoft.com/office/drawing/2014/main" id="{9BEA9CC4-2A34-5A49-839C-B3E39045925D}"/>
+              </a:ext>
+            </a:extLst>
+          </p:cNvPr>
+          <p:cNvSpPr txBox="1"/>
+          <p:nvPr/>
+        </p:nvSpPr>
+        <p:spPr>
+          <a:xfrm>
+            <a:off x="7484897" y="5545528"/>
+            <a:ext cx="3649579" cy="923330"/>
+          </a:xfrm>
+          <a:prstGeom prst="rect">
+            <a:avLst/>
+          </a:prstGeom>
+          <a:noFill/>
+        </p:spPr>
+        <p:txBody>
+          <a:bodyPr wrap="square" rtlCol="0">
+            <a:spAutoFit/>
+          </a:bodyPr>
+          <a:lstStyle/>
+          <a:p>
+            <a:r>
+              <a:rPr lang="en-US" dirty="0"/>
+              <a:t>Nuclear Bomb </a:t>
+            </a:r>
+          </a:p>
+          <a:p>
+            <a:r>
+              <a:rPr lang="en-US" dirty="0"/>
+              <a:t>  - low precision (many FP)</a:t>
+            </a:r>
+          </a:p>
+          <a:p>
+            <a:r>
+              <a:rPr lang="en-US" dirty="0"/>
+              <a:t>  - high recall (get everything)</a:t>
+            </a:r>
+          </a:p>
+        </p:txBody>
+      </p:sp>
+      <p:sp>
+        <p:nvSpPr>
+          <p:cNvPr id="58" name="TextBox 57">
+            <a:extLst>
+              <a:ext uri="{FF2B5EF4-FFF2-40B4-BE49-F238E27FC236}">
+                <a16:creationId xmlns:a16="http://schemas.microsoft.com/office/drawing/2014/main" id="{78F8E667-8B30-6C42-936C-323FB68A2869}"/>
+              </a:ext>
+            </a:extLst>
+          </p:cNvPr>
+          <p:cNvSpPr txBox="1"/>
+          <p:nvPr/>
+        </p:nvSpPr>
+        <p:spPr>
+          <a:xfrm>
+            <a:off x="7484896" y="3149083"/>
+            <a:ext cx="3649579" cy="923330"/>
+          </a:xfrm>
+          <a:prstGeom prst="rect">
+            <a:avLst/>
+          </a:prstGeom>
+          <a:noFill/>
+        </p:spPr>
+        <p:txBody>
+          <a:bodyPr wrap="square" rtlCol="0">
+            <a:spAutoFit/>
+          </a:bodyPr>
+          <a:lstStyle/>
+          <a:p>
+            <a:r>
+              <a:rPr lang="en-US" dirty="0"/>
+              <a:t>Sniper</a:t>
+            </a:r>
+          </a:p>
+          <a:p>
+            <a:r>
+              <a:rPr lang="en-US" dirty="0"/>
+              <a:t>  - high precision (zero FP)</a:t>
+            </a:r>
+          </a:p>
+          <a:p>
+            <a:r>
+              <a:rPr lang="en-US" dirty="0"/>
+              <a:t>  - low recall (can't get everything)</a:t>
+            </a:r>
+          </a:p>
+        </p:txBody>
+      </p:sp>
+      <p:pic>
+        <p:nvPicPr>
+          <p:cNvPr id="7" name="Picture 6">
+            <a:extLst>
+              <a:ext uri="{FF2B5EF4-FFF2-40B4-BE49-F238E27FC236}">
+                <a16:creationId xmlns:a16="http://schemas.microsoft.com/office/drawing/2014/main" id="{266FCCA6-C9C0-FC49-9598-EC5E4B220A7B}"/>
+              </a:ext>
+            </a:extLst>
+          </p:cNvPr>
+          <p:cNvPicPr>
+            <a:picLocks noChangeAspect="1"/>
+          </p:cNvPicPr>
+          <p:nvPr/>
+        </p:nvPicPr>
+        <p:blipFill>
+          <a:blip r:embed="rId6" cstate="email">
+            <a:extLst>
+              <a:ext uri="{28A0092B-C50C-407E-A947-70E740481C1C}">
+                <a14:useLocalDpi xmlns:a14="http://schemas.microsoft.com/office/drawing/2010/main"/>
+              </a:ext>
+            </a:extLst>
+          </a:blip>
+          <a:stretch>
+            <a:fillRect/>
+          </a:stretch>
+        </p:blipFill>
+        <p:spPr>
+          <a:xfrm>
+            <a:off x="6015299" y="527906"/>
+            <a:ext cx="1346129" cy="1346129"/>
+          </a:xfrm>
+          <a:prstGeom prst="rect">
+            <a:avLst/>
+          </a:prstGeom>
+        </p:spPr>
+      </p:pic>
+    </p:spTree>
+    <p:extLst>
+      <p:ext uri="{BB962C8B-B14F-4D97-AF65-F5344CB8AC3E}">
+        <p14:creationId xmlns:p14="http://schemas.microsoft.com/office/powerpoint/2010/main" val="1412137750"/>
+      </p:ext>
+    </p:extLst>
+  </p:cSld>
+  <p:clrMapOvr>
+    <a:masterClrMapping/>
+  </p:clrMapOvr>
+</p:sld>
+</file>
+
+<file path=ppt/slides/slide8.xml><?xml version="1.0" encoding="utf-8"?>
+<p:sld xmlns:a="http://schemas.openxmlformats.org/drawingml/2006/main" xmlns:r="http://schemas.openxmlformats.org/officeDocument/2006/relationships" xmlns:p="http://schemas.openxmlformats.org/presentationml/2006/main">
+  <p:cSld>
+    <p:spTree>
+      <p:nvGrpSpPr>
+        <p:cNvPr id="1" name="Shape 87"/>
+        <p:cNvGrpSpPr/>
+        <p:nvPr/>
+      </p:nvGrpSpPr>
+      <p:grpSpPr>
+        <a:xfrm>
+          <a:off x="0" y="0"/>
+          <a:ext cx="0" cy="0"/>
+          <a:chOff x="0" y="0"/>
+          <a:chExt cx="0" cy="0"/>
+        </a:xfrm>
+      </p:grpSpPr>
       <p:sp>
         <p:nvSpPr>
           <p:cNvPr id="88" name="Google Shape;88;p13"/>
@@ -12025,7 +14273,7 @@
 </p:sld>
 </file>
 
-<file path=ppt/slides/slide8.xml><?xml version="1.0" encoding="utf-8"?>
+<file path=ppt/slides/slide9.xml><?xml version="1.0" encoding="utf-8"?>
 <p:sld xmlns:a="http://schemas.openxmlformats.org/drawingml/2006/main" xmlns:r="http://schemas.openxmlformats.org/officeDocument/2006/relationships" xmlns:p="http://schemas.openxmlformats.org/presentationml/2006/main">
   <p:cSld>
     <p:spTree>
@@ -13290,856 +15538,6 @@
     <p:extLst>
       <p:ext uri="{BB962C8B-B14F-4D97-AF65-F5344CB8AC3E}">
         <p14:creationId xmlns:p14="http://schemas.microsoft.com/office/powerpoint/2010/main" val="2196185501"/>
-      </p:ext>
-    </p:extLst>
-  </p:cSld>
-  <p:clrMapOvr>
-    <a:masterClrMapping/>
-  </p:clrMapOvr>
-</p:sld>
-</file>
-
-<file path=ppt/slides/slide9.xml><?xml version="1.0" encoding="utf-8"?>
-<p:sld xmlns:a="http://schemas.openxmlformats.org/drawingml/2006/main" xmlns:r="http://schemas.openxmlformats.org/officeDocument/2006/relationships" xmlns:p="http://schemas.openxmlformats.org/presentationml/2006/main">
-  <p:cSld>
-    <p:spTree>
-      <p:nvGrpSpPr>
-        <p:cNvPr id="1" name=""/>
-        <p:cNvGrpSpPr/>
-        <p:nvPr/>
-      </p:nvGrpSpPr>
-      <p:grpSpPr>
-        <a:xfrm>
-          <a:off x="0" y="0"/>
-          <a:ext cx="0" cy="0"/>
-          <a:chOff x="0" y="0"/>
-          <a:chExt cx="0" cy="0"/>
-        </a:xfrm>
-      </p:grpSpPr>
-      <p:sp>
-        <p:nvSpPr>
-          <p:cNvPr id="4" name="Rectangle 3">
-            <a:extLst>
-              <a:ext uri="{FF2B5EF4-FFF2-40B4-BE49-F238E27FC236}">
-                <a16:creationId xmlns:a16="http://schemas.microsoft.com/office/drawing/2014/main" id="{9613AF28-158F-874A-80C9-B3721DC64360}"/>
-              </a:ext>
-            </a:extLst>
-          </p:cNvPr>
-          <p:cNvSpPr/>
-          <p:nvPr/>
-        </p:nvSpPr>
-        <p:spPr>
-          <a:xfrm>
-            <a:off x="150988" y="3594550"/>
-            <a:ext cx="6020789" cy="3059017"/>
-          </a:xfrm>
-          <a:prstGeom prst="rect">
-            <a:avLst/>
-          </a:prstGeom>
-          <a:noFill/>
-          <a:ln w="63500"/>
-        </p:spPr>
-        <p:style>
-          <a:lnRef idx="2">
-            <a:schemeClr val="accent1">
-              <a:shade val="50000"/>
-            </a:schemeClr>
-          </a:lnRef>
-          <a:fillRef idx="1">
-            <a:schemeClr val="accent1"/>
-          </a:fillRef>
-          <a:effectRef idx="0">
-            <a:schemeClr val="accent1"/>
-          </a:effectRef>
-          <a:fontRef idx="minor">
-            <a:schemeClr val="lt1"/>
-          </a:fontRef>
-        </p:style>
-        <p:txBody>
-          <a:bodyPr rtlCol="0" anchor="ctr"/>
-          <a:lstStyle/>
-          <a:p>
-            <a:pPr algn="ctr"/>
-            <a:endParaRPr lang="en-US" dirty="0"/>
-          </a:p>
-        </p:txBody>
-      </p:sp>
-      <p:sp>
-        <p:nvSpPr>
-          <p:cNvPr id="5" name="Rectangle 4">
-            <a:extLst>
-              <a:ext uri="{FF2B5EF4-FFF2-40B4-BE49-F238E27FC236}">
-                <a16:creationId xmlns:a16="http://schemas.microsoft.com/office/drawing/2014/main" id="{92764486-E703-DE4F-A0AF-94B80A05EA77}"/>
-              </a:ext>
-            </a:extLst>
-          </p:cNvPr>
-          <p:cNvSpPr/>
-          <p:nvPr/>
-        </p:nvSpPr>
-        <p:spPr>
-          <a:xfrm>
-            <a:off x="6171777" y="3594550"/>
-            <a:ext cx="1027087" cy="3059017"/>
-          </a:xfrm>
-          <a:prstGeom prst="rect">
-            <a:avLst/>
-          </a:prstGeom>
-          <a:noFill/>
-          <a:ln w="63500"/>
-        </p:spPr>
-        <p:style>
-          <a:lnRef idx="2">
-            <a:schemeClr val="accent1">
-              <a:shade val="50000"/>
-            </a:schemeClr>
-          </a:lnRef>
-          <a:fillRef idx="1">
-            <a:schemeClr val="accent1"/>
-          </a:fillRef>
-          <a:effectRef idx="0">
-            <a:schemeClr val="accent1"/>
-          </a:effectRef>
-          <a:fontRef idx="minor">
-            <a:schemeClr val="lt1"/>
-          </a:fontRef>
-        </p:style>
-        <p:txBody>
-          <a:bodyPr rtlCol="0" anchor="ctr"/>
-          <a:lstStyle/>
-          <a:p>
-            <a:pPr algn="ctr"/>
-            <a:endParaRPr lang="en-US" dirty="0"/>
-          </a:p>
-        </p:txBody>
-      </p:sp>
-      <p:sp>
-        <p:nvSpPr>
-          <p:cNvPr id="6" name="Rectangle 5">
-            <a:extLst>
-              <a:ext uri="{FF2B5EF4-FFF2-40B4-BE49-F238E27FC236}">
-                <a16:creationId xmlns:a16="http://schemas.microsoft.com/office/drawing/2014/main" id="{5AEF3E3B-D40A-8E40-A82A-F9EBF21FFAF7}"/>
-              </a:ext>
-            </a:extLst>
-          </p:cNvPr>
-          <p:cNvSpPr/>
-          <p:nvPr/>
-        </p:nvSpPr>
-        <p:spPr>
-          <a:xfrm>
-            <a:off x="5505890" y="4048581"/>
-            <a:ext cx="1692974" cy="2585108"/>
-          </a:xfrm>
-          <a:prstGeom prst="rect">
-            <a:avLst/>
-          </a:prstGeom>
-          <a:solidFill>
-            <a:schemeClr val="accent5">
-              <a:lumMod val="40000"/>
-              <a:lumOff val="60000"/>
-              <a:alpha val="39000"/>
-            </a:schemeClr>
-          </a:solidFill>
-        </p:spPr>
-        <p:style>
-          <a:lnRef idx="2">
-            <a:schemeClr val="accent1">
-              <a:shade val="50000"/>
-            </a:schemeClr>
-          </a:lnRef>
-          <a:fillRef idx="1">
-            <a:schemeClr val="accent1"/>
-          </a:fillRef>
-          <a:effectRef idx="0">
-            <a:schemeClr val="accent1"/>
-          </a:effectRef>
-          <a:fontRef idx="minor">
-            <a:schemeClr val="lt1"/>
-          </a:fontRef>
-        </p:style>
-        <p:txBody>
-          <a:bodyPr rtlCol="0" anchor="ctr"/>
-          <a:lstStyle/>
-          <a:p>
-            <a:pPr algn="ctr"/>
-            <a:endParaRPr lang="en-US" dirty="0"/>
-          </a:p>
-        </p:txBody>
-      </p:sp>
-      <p:sp>
-        <p:nvSpPr>
-          <p:cNvPr id="7" name="TextBox 6">
-            <a:extLst>
-              <a:ext uri="{FF2B5EF4-FFF2-40B4-BE49-F238E27FC236}">
-                <a16:creationId xmlns:a16="http://schemas.microsoft.com/office/drawing/2014/main" id="{6B74670B-9E8A-0B4B-9B60-F33269846B51}"/>
-              </a:ext>
-            </a:extLst>
-          </p:cNvPr>
-          <p:cNvSpPr txBox="1"/>
-          <p:nvPr/>
-        </p:nvSpPr>
-        <p:spPr>
-          <a:xfrm>
-            <a:off x="6339726" y="4933452"/>
-            <a:ext cx="682573" cy="646331"/>
-          </a:xfrm>
-          <a:prstGeom prst="rect">
-            <a:avLst/>
-          </a:prstGeom>
-          <a:noFill/>
-        </p:spPr>
-        <p:txBody>
-          <a:bodyPr wrap="square" rtlCol="0">
-            <a:spAutoFit/>
-          </a:bodyPr>
-          <a:lstStyle/>
-          <a:p>
-            <a:pPr algn="ctr"/>
-            <a:r>
-              <a:rPr lang="en-US" b="1" dirty="0">
-                <a:solidFill>
-                  <a:srgbClr val="0070C0"/>
-                </a:solidFill>
-              </a:rPr>
-              <a:t>TP</a:t>
-            </a:r>
-          </a:p>
-          <a:p>
-            <a:pPr algn="ctr"/>
-            <a:r>
-              <a:rPr lang="en-US" b="1" dirty="0">
-                <a:solidFill>
-                  <a:srgbClr val="0070C0"/>
-                </a:solidFill>
-              </a:rPr>
-              <a:t>495</a:t>
-            </a:r>
-          </a:p>
-        </p:txBody>
-      </p:sp>
-      <p:sp>
-        <p:nvSpPr>
-          <p:cNvPr id="8" name="TextBox 7">
-            <a:extLst>
-              <a:ext uri="{FF2B5EF4-FFF2-40B4-BE49-F238E27FC236}">
-                <a16:creationId xmlns:a16="http://schemas.microsoft.com/office/drawing/2014/main" id="{1F57D23C-1B7E-9340-9CC9-2E518FED35CF}"/>
-              </a:ext>
-            </a:extLst>
-          </p:cNvPr>
-          <p:cNvSpPr txBox="1"/>
-          <p:nvPr/>
-        </p:nvSpPr>
-        <p:spPr>
-          <a:xfrm>
-            <a:off x="6339726" y="3645655"/>
-            <a:ext cx="682573" cy="369332"/>
-          </a:xfrm>
-          <a:prstGeom prst="rect">
-            <a:avLst/>
-          </a:prstGeom>
-          <a:noFill/>
-        </p:spPr>
-        <p:txBody>
-          <a:bodyPr wrap="square" rtlCol="0">
-            <a:spAutoFit/>
-          </a:bodyPr>
-          <a:lstStyle/>
-          <a:p>
-            <a:r>
-              <a:rPr lang="en-US" b="1" dirty="0">
-                <a:solidFill>
-                  <a:srgbClr val="0070C0"/>
-                </a:solidFill>
-              </a:rPr>
-              <a:t>FN=5</a:t>
-            </a:r>
-          </a:p>
-        </p:txBody>
-      </p:sp>
-      <p:sp>
-        <p:nvSpPr>
-          <p:cNvPr id="9" name="TextBox 8">
-            <a:extLst>
-              <a:ext uri="{FF2B5EF4-FFF2-40B4-BE49-F238E27FC236}">
-                <a16:creationId xmlns:a16="http://schemas.microsoft.com/office/drawing/2014/main" id="{DC6B00C2-624C-E54A-8F82-45AE7E8B68EB}"/>
-              </a:ext>
-            </a:extLst>
-          </p:cNvPr>
-          <p:cNvSpPr txBox="1"/>
-          <p:nvPr/>
-        </p:nvSpPr>
-        <p:spPr>
-          <a:xfrm>
-            <a:off x="5505890" y="4933452"/>
-            <a:ext cx="654433" cy="646331"/>
-          </a:xfrm>
-          <a:prstGeom prst="rect">
-            <a:avLst/>
-          </a:prstGeom>
-          <a:noFill/>
-        </p:spPr>
-        <p:txBody>
-          <a:bodyPr wrap="square" rtlCol="0">
-            <a:spAutoFit/>
-          </a:bodyPr>
-          <a:lstStyle/>
-          <a:p>
-            <a:pPr algn="ctr"/>
-            <a:r>
-              <a:rPr lang="en-US" b="1" dirty="0">
-                <a:solidFill>
-                  <a:srgbClr val="0070C0"/>
-                </a:solidFill>
-              </a:rPr>
-              <a:t>FP</a:t>
-            </a:r>
-          </a:p>
-          <a:p>
-            <a:pPr algn="ctr"/>
-            <a:r>
-              <a:rPr lang="en-US" b="1" dirty="0">
-                <a:solidFill>
-                  <a:srgbClr val="0070C0"/>
-                </a:solidFill>
-              </a:rPr>
-              <a:t>190</a:t>
-            </a:r>
-          </a:p>
-        </p:txBody>
-      </p:sp>
-      <p:sp>
-        <p:nvSpPr>
-          <p:cNvPr id="10" name="TextBox 9">
-            <a:extLst>
-              <a:ext uri="{FF2B5EF4-FFF2-40B4-BE49-F238E27FC236}">
-                <a16:creationId xmlns:a16="http://schemas.microsoft.com/office/drawing/2014/main" id="{AE36C196-A585-CC42-9604-0BFE015CBF48}"/>
-              </a:ext>
-            </a:extLst>
-          </p:cNvPr>
-          <p:cNvSpPr txBox="1"/>
-          <p:nvPr/>
-        </p:nvSpPr>
-        <p:spPr>
-          <a:xfrm>
-            <a:off x="113762" y="672510"/>
-            <a:ext cx="6703363" cy="2031325"/>
-          </a:xfrm>
-          <a:prstGeom prst="rect">
-            <a:avLst/>
-          </a:prstGeom>
-          <a:noFill/>
-        </p:spPr>
-        <p:txBody>
-          <a:bodyPr wrap="square" rtlCol="0">
-            <a:spAutoFit/>
-          </a:bodyPr>
-          <a:lstStyle/>
-          <a:p>
-            <a:r>
-              <a:rPr lang="en-US" dirty="0"/>
-              <a:t>We have a drug test with the following characteristics:</a:t>
-            </a:r>
-          </a:p>
-          <a:p>
-            <a:r>
-              <a:rPr lang="en-US" dirty="0"/>
-              <a:t>           false positives = 2%</a:t>
-            </a:r>
-          </a:p>
-          <a:p>
-            <a:r>
-              <a:rPr lang="en-US" dirty="0"/>
-              <a:t>           false negatives = 1%</a:t>
-            </a:r>
-          </a:p>
-          <a:p>
-            <a:r>
-              <a:rPr lang="en-US" dirty="0"/>
-              <a:t>5% of population are drug positive.</a:t>
-            </a:r>
-          </a:p>
-          <a:p>
-            <a:endParaRPr lang="en-US" dirty="0"/>
-          </a:p>
-          <a:p>
-            <a:r>
-              <a:rPr lang="en-US" dirty="0"/>
-              <a:t>If a person's test result is positive, what is the probability that this person is indeed drug positive?</a:t>
-            </a:r>
-          </a:p>
-        </p:txBody>
-      </p:sp>
-      <p:sp>
-        <p:nvSpPr>
-          <p:cNvPr id="12" name="TextBox 11">
-            <a:extLst>
-              <a:ext uri="{FF2B5EF4-FFF2-40B4-BE49-F238E27FC236}">
-                <a16:creationId xmlns:a16="http://schemas.microsoft.com/office/drawing/2014/main" id="{6B1C1EEC-E74C-B142-840B-42970BD8DED0}"/>
-              </a:ext>
-            </a:extLst>
-          </p:cNvPr>
-          <p:cNvSpPr txBox="1"/>
-          <p:nvPr/>
-        </p:nvSpPr>
-        <p:spPr>
-          <a:xfrm>
-            <a:off x="3720208" y="2826698"/>
-            <a:ext cx="2325759" cy="369332"/>
-          </a:xfrm>
-          <a:prstGeom prst="rect">
-            <a:avLst/>
-          </a:prstGeom>
-          <a:noFill/>
-        </p:spPr>
-        <p:txBody>
-          <a:bodyPr wrap="square" rtlCol="0">
-            <a:spAutoFit/>
-          </a:bodyPr>
-          <a:lstStyle/>
-          <a:p>
-            <a:r>
-              <a:rPr lang="en-US" b="1" dirty="0">
-                <a:solidFill>
-                  <a:srgbClr val="00B050"/>
-                </a:solidFill>
-              </a:rPr>
-              <a:t>10,000 people total</a:t>
-            </a:r>
-          </a:p>
-        </p:txBody>
-      </p:sp>
-      <p:sp>
-        <p:nvSpPr>
-          <p:cNvPr id="13" name="TextBox 12">
-            <a:extLst>
-              <a:ext uri="{FF2B5EF4-FFF2-40B4-BE49-F238E27FC236}">
-                <a16:creationId xmlns:a16="http://schemas.microsoft.com/office/drawing/2014/main" id="{19F54DC0-7904-4C4A-9A51-E770522D50CC}"/>
-              </a:ext>
-            </a:extLst>
-          </p:cNvPr>
-          <p:cNvSpPr txBox="1"/>
-          <p:nvPr/>
-        </p:nvSpPr>
-        <p:spPr>
-          <a:xfrm>
-            <a:off x="1520201" y="2882420"/>
-            <a:ext cx="1719425" cy="646331"/>
-          </a:xfrm>
-          <a:prstGeom prst="rect">
-            <a:avLst/>
-          </a:prstGeom>
-          <a:noFill/>
-        </p:spPr>
-        <p:txBody>
-          <a:bodyPr wrap="square" rtlCol="0">
-            <a:spAutoFit/>
-          </a:bodyPr>
-          <a:lstStyle/>
-          <a:p>
-            <a:pPr algn="ctr"/>
-            <a:r>
-              <a:rPr lang="en-US" b="1" dirty="0">
-                <a:solidFill>
-                  <a:srgbClr val="00B050"/>
-                </a:solidFill>
-              </a:rPr>
-              <a:t>95%</a:t>
-            </a:r>
-          </a:p>
-          <a:p>
-            <a:pPr algn="ctr"/>
-            <a:r>
-              <a:rPr lang="en-US" b="1" dirty="0">
-                <a:solidFill>
-                  <a:srgbClr val="00B050"/>
-                </a:solidFill>
-              </a:rPr>
-              <a:t>9,500 negative</a:t>
-            </a:r>
-          </a:p>
-        </p:txBody>
-      </p:sp>
-      <p:sp>
-        <p:nvSpPr>
-          <p:cNvPr id="14" name="TextBox 13">
-            <a:extLst>
-              <a:ext uri="{FF2B5EF4-FFF2-40B4-BE49-F238E27FC236}">
-                <a16:creationId xmlns:a16="http://schemas.microsoft.com/office/drawing/2014/main" id="{C21A50F1-5D51-3F4D-8F64-416F7FBD9E7E}"/>
-              </a:ext>
-            </a:extLst>
-          </p:cNvPr>
-          <p:cNvSpPr txBox="1"/>
-          <p:nvPr/>
-        </p:nvSpPr>
-        <p:spPr>
-          <a:xfrm>
-            <a:off x="5995211" y="2872864"/>
-            <a:ext cx="1371602" cy="646331"/>
-          </a:xfrm>
-          <a:prstGeom prst="rect">
-            <a:avLst/>
-          </a:prstGeom>
-          <a:noFill/>
-        </p:spPr>
-        <p:txBody>
-          <a:bodyPr wrap="square" rtlCol="0">
-            <a:spAutoFit/>
-          </a:bodyPr>
-          <a:lstStyle/>
-          <a:p>
-            <a:pPr algn="ctr"/>
-            <a:r>
-              <a:rPr lang="en-US" b="1" dirty="0">
-                <a:solidFill>
-                  <a:srgbClr val="00B050"/>
-                </a:solidFill>
-              </a:rPr>
-              <a:t>5%</a:t>
-            </a:r>
-          </a:p>
-          <a:p>
-            <a:pPr algn="ctr"/>
-            <a:r>
-              <a:rPr lang="en-US" b="1" dirty="0">
-                <a:solidFill>
-                  <a:srgbClr val="00B050"/>
-                </a:solidFill>
-              </a:rPr>
-              <a:t>500 positive</a:t>
-            </a:r>
-          </a:p>
-        </p:txBody>
-      </p:sp>
-      <p:sp>
-        <p:nvSpPr>
-          <p:cNvPr id="15" name="TextBox 14">
-            <a:extLst>
-              <a:ext uri="{FF2B5EF4-FFF2-40B4-BE49-F238E27FC236}">
-                <a16:creationId xmlns:a16="http://schemas.microsoft.com/office/drawing/2014/main" id="{5FB01364-0BA9-9949-8E1C-CC6D790D896A}"/>
-              </a:ext>
-            </a:extLst>
-          </p:cNvPr>
-          <p:cNvSpPr txBox="1"/>
-          <p:nvPr/>
-        </p:nvSpPr>
-        <p:spPr>
-          <a:xfrm>
-            <a:off x="8254691" y="751168"/>
-            <a:ext cx="2995035" cy="646331"/>
-          </a:xfrm>
-          <a:prstGeom prst="rect">
-            <a:avLst/>
-          </a:prstGeom>
-          <a:noFill/>
-        </p:spPr>
-        <p:txBody>
-          <a:bodyPr wrap="square" rtlCol="0">
-            <a:spAutoFit/>
-          </a:bodyPr>
-          <a:lstStyle/>
-          <a:p>
-            <a:r>
-              <a:rPr lang="en-US" dirty="0"/>
-              <a:t>FPR = 2% = </a:t>
-            </a:r>
-            <a:r>
-              <a:rPr lang="en-US" dirty="0">
-                <a:latin typeface="Consolas" panose="020B0609020204030204" pitchFamily="49" charset="0"/>
-                <a:cs typeface="Consolas" panose="020B0609020204030204" pitchFamily="49" charset="0"/>
-              </a:rPr>
-              <a:t>FP/N</a:t>
-            </a:r>
-          </a:p>
-          <a:p>
-            <a:r>
-              <a:rPr lang="en-US" dirty="0"/>
-              <a:t>FP = 2% of 9,500 = 190 </a:t>
-            </a:r>
-          </a:p>
-        </p:txBody>
-      </p:sp>
-      <p:sp>
-        <p:nvSpPr>
-          <p:cNvPr id="16" name="TextBox 15">
-            <a:extLst>
-              <a:ext uri="{FF2B5EF4-FFF2-40B4-BE49-F238E27FC236}">
-                <a16:creationId xmlns:a16="http://schemas.microsoft.com/office/drawing/2014/main" id="{980B50C7-3911-3F4F-AA46-65C283787DA7}"/>
-              </a:ext>
-            </a:extLst>
-          </p:cNvPr>
-          <p:cNvSpPr txBox="1"/>
-          <p:nvPr/>
-        </p:nvSpPr>
-        <p:spPr>
-          <a:xfrm>
-            <a:off x="8254691" y="1672605"/>
-            <a:ext cx="3041373" cy="646331"/>
-          </a:xfrm>
-          <a:prstGeom prst="rect">
-            <a:avLst/>
-          </a:prstGeom>
-          <a:noFill/>
-        </p:spPr>
-        <p:txBody>
-          <a:bodyPr wrap="square" rtlCol="0">
-            <a:spAutoFit/>
-          </a:bodyPr>
-          <a:lstStyle/>
-          <a:p>
-            <a:r>
-              <a:rPr lang="en-US" dirty="0"/>
-              <a:t>FNR = 1% = FN/P</a:t>
-            </a:r>
-          </a:p>
-          <a:p>
-            <a:r>
-              <a:rPr lang="en-US" dirty="0"/>
-              <a:t>FN = 1% of 500 = 5</a:t>
-            </a:r>
-          </a:p>
-        </p:txBody>
-      </p:sp>
-      <p:sp>
-        <p:nvSpPr>
-          <p:cNvPr id="17" name="TextBox 16">
-            <a:extLst>
-              <a:ext uri="{FF2B5EF4-FFF2-40B4-BE49-F238E27FC236}">
-                <a16:creationId xmlns:a16="http://schemas.microsoft.com/office/drawing/2014/main" id="{B84A3915-332E-C241-BD48-8886C250762A}"/>
-              </a:ext>
-            </a:extLst>
-          </p:cNvPr>
-          <p:cNvSpPr txBox="1"/>
-          <p:nvPr/>
-        </p:nvSpPr>
-        <p:spPr>
-          <a:xfrm>
-            <a:off x="8254691" y="2559565"/>
-            <a:ext cx="2047462" cy="369332"/>
-          </a:xfrm>
-          <a:prstGeom prst="rect">
-            <a:avLst/>
-          </a:prstGeom>
-          <a:noFill/>
-        </p:spPr>
-        <p:txBody>
-          <a:bodyPr wrap="square" rtlCol="0">
-            <a:spAutoFit/>
-          </a:bodyPr>
-          <a:lstStyle/>
-          <a:p>
-            <a:r>
-              <a:rPr lang="en-US" dirty="0"/>
-              <a:t>TP = 500-5=495</a:t>
-            </a:r>
-          </a:p>
-        </p:txBody>
-      </p:sp>
-      <p:sp>
-        <p:nvSpPr>
-          <p:cNvPr id="18" name="TextBox 17">
-            <a:extLst>
-              <a:ext uri="{FF2B5EF4-FFF2-40B4-BE49-F238E27FC236}">
-                <a16:creationId xmlns:a16="http://schemas.microsoft.com/office/drawing/2014/main" id="{093DAE60-9E58-FD49-878D-8C197C180CDA}"/>
-              </a:ext>
-            </a:extLst>
-          </p:cNvPr>
-          <p:cNvSpPr txBox="1"/>
-          <p:nvPr/>
-        </p:nvSpPr>
-        <p:spPr>
-          <a:xfrm>
-            <a:off x="8254691" y="2928897"/>
-            <a:ext cx="2842592" cy="369332"/>
-          </a:xfrm>
-          <a:prstGeom prst="rect">
-            <a:avLst/>
-          </a:prstGeom>
-          <a:noFill/>
-        </p:spPr>
-        <p:txBody>
-          <a:bodyPr wrap="square" rtlCol="0">
-            <a:spAutoFit/>
-          </a:bodyPr>
-          <a:lstStyle/>
-          <a:p>
-            <a:r>
-              <a:rPr lang="en-US" dirty="0"/>
-              <a:t>TN = 9,500-190 = 9310</a:t>
-            </a:r>
-          </a:p>
-        </p:txBody>
-      </p:sp>
-      <p:sp>
-        <p:nvSpPr>
-          <p:cNvPr id="19" name="TextBox 18">
-            <a:extLst>
-              <a:ext uri="{FF2B5EF4-FFF2-40B4-BE49-F238E27FC236}">
-                <a16:creationId xmlns:a16="http://schemas.microsoft.com/office/drawing/2014/main" id="{F0EDE16F-DA75-354A-9895-9AD2F69671BB}"/>
-              </a:ext>
-            </a:extLst>
-          </p:cNvPr>
-          <p:cNvSpPr txBox="1"/>
-          <p:nvPr/>
-        </p:nvSpPr>
-        <p:spPr>
-          <a:xfrm>
-            <a:off x="150987" y="3707337"/>
-            <a:ext cx="1207260" cy="369332"/>
-          </a:xfrm>
-          <a:prstGeom prst="rect">
-            <a:avLst/>
-          </a:prstGeom>
-          <a:noFill/>
-        </p:spPr>
-        <p:txBody>
-          <a:bodyPr wrap="square" rtlCol="0">
-            <a:spAutoFit/>
-          </a:bodyPr>
-          <a:lstStyle/>
-          <a:p>
-            <a:r>
-              <a:rPr lang="en-US" b="1" dirty="0">
-                <a:solidFill>
-                  <a:srgbClr val="0070C0"/>
-                </a:solidFill>
-              </a:rPr>
-              <a:t>TN = 9310</a:t>
-            </a:r>
-          </a:p>
-        </p:txBody>
-      </p:sp>
-      <p:sp>
-        <p:nvSpPr>
-          <p:cNvPr id="20" name="TextBox 19">
-            <a:extLst>
-              <a:ext uri="{FF2B5EF4-FFF2-40B4-BE49-F238E27FC236}">
-                <a16:creationId xmlns:a16="http://schemas.microsoft.com/office/drawing/2014/main" id="{F8D9657B-BE11-0347-B8B6-8AADCF22ED1B}"/>
-              </a:ext>
-            </a:extLst>
-          </p:cNvPr>
-          <p:cNvSpPr txBox="1"/>
-          <p:nvPr/>
-        </p:nvSpPr>
-        <p:spPr>
-          <a:xfrm>
-            <a:off x="8255428" y="3836096"/>
-            <a:ext cx="3936572" cy="2031325"/>
-          </a:xfrm>
-          <a:prstGeom prst="rect">
-            <a:avLst/>
-          </a:prstGeom>
-          <a:noFill/>
-        </p:spPr>
-        <p:txBody>
-          <a:bodyPr wrap="square" rtlCol="0">
-            <a:spAutoFit/>
-          </a:bodyPr>
-          <a:lstStyle/>
-          <a:p>
-            <a:r>
-              <a:rPr lang="en-US" dirty="0"/>
-              <a:t>If the person tests positive, </a:t>
-            </a:r>
-          </a:p>
-          <a:p>
-            <a:r>
-              <a:rPr lang="en-US" dirty="0"/>
-              <a:t>he is either TP or FP</a:t>
-            </a:r>
-          </a:p>
-          <a:p>
-            <a:endParaRPr lang="en-US" dirty="0"/>
-          </a:p>
-          <a:p>
-            <a:r>
-              <a:rPr lang="en-US" dirty="0"/>
-              <a:t>Probability of being positive given the results of the test:</a:t>
-            </a:r>
-          </a:p>
-          <a:p>
-            <a:endParaRPr lang="en-US" dirty="0"/>
-          </a:p>
-          <a:p>
-            <a:r>
-              <a:rPr lang="en-US" dirty="0"/>
-              <a:t>TP/(TP+FP) = 495/(495+190) = 0.72</a:t>
-            </a:r>
-          </a:p>
-        </p:txBody>
-      </p:sp>
-      <p:sp>
-        <p:nvSpPr>
-          <p:cNvPr id="2" name="TextBox 1">
-            <a:extLst>
-              <a:ext uri="{FF2B5EF4-FFF2-40B4-BE49-F238E27FC236}">
-                <a16:creationId xmlns:a16="http://schemas.microsoft.com/office/drawing/2014/main" id="{DF9ABAE0-A26C-5F44-8C55-794CA181EBFA}"/>
-              </a:ext>
-            </a:extLst>
-          </p:cNvPr>
-          <p:cNvSpPr txBox="1"/>
-          <p:nvPr/>
-        </p:nvSpPr>
-        <p:spPr>
-          <a:xfrm>
-            <a:off x="150987" y="149290"/>
-            <a:ext cx="3314457" cy="523220"/>
-          </a:xfrm>
-          <a:prstGeom prst="rect">
-            <a:avLst/>
-          </a:prstGeom>
-          <a:noFill/>
-        </p:spPr>
-        <p:txBody>
-          <a:bodyPr wrap="square" rtlCol="0">
-            <a:spAutoFit/>
-          </a:bodyPr>
-          <a:lstStyle/>
-          <a:p>
-            <a:r>
-              <a:rPr lang="en-US" sz="2800" b="1" dirty="0"/>
-              <a:t>Example – Drug Test</a:t>
-            </a:r>
-          </a:p>
-        </p:txBody>
-      </p:sp>
-      <p:sp>
-        <p:nvSpPr>
-          <p:cNvPr id="21" name="TextBox 20">
-            <a:extLst>
-              <a:ext uri="{FF2B5EF4-FFF2-40B4-BE49-F238E27FC236}">
-                <a16:creationId xmlns:a16="http://schemas.microsoft.com/office/drawing/2014/main" id="{7D5FB003-39A3-4F47-8B35-82CBDB400810}"/>
-              </a:ext>
-            </a:extLst>
-          </p:cNvPr>
-          <p:cNvSpPr txBox="1"/>
-          <p:nvPr/>
-        </p:nvSpPr>
-        <p:spPr>
-          <a:xfrm>
-            <a:off x="8254691" y="97203"/>
-            <a:ext cx="3314457" cy="523220"/>
-          </a:xfrm>
-          <a:prstGeom prst="rect">
-            <a:avLst/>
-          </a:prstGeom>
-          <a:noFill/>
-        </p:spPr>
-        <p:txBody>
-          <a:bodyPr wrap="square" rtlCol="0">
-            <a:spAutoFit/>
-          </a:bodyPr>
-          <a:lstStyle/>
-          <a:p>
-            <a:r>
-              <a:rPr lang="en-US" sz="2800" b="1" dirty="0"/>
-              <a:t>Solution:</a:t>
-            </a:r>
-          </a:p>
-        </p:txBody>
-      </p:sp>
-    </p:spTree>
-    <p:extLst>
-      <p:ext uri="{BB962C8B-B14F-4D97-AF65-F5344CB8AC3E}">
-        <p14:creationId xmlns:p14="http://schemas.microsoft.com/office/powerpoint/2010/main" val="2067706377"/>
       </p:ext>
     </p:extLst>
   </p:cSld>
